--- a/lectures/week-13/index.pptx
+++ b/lectures/week-13/index.pptx
@@ -8,6 +8,7 @@
     <p:sldId id="256" r:id="rId2"/>
     <p:sldId id="257" r:id="rId3"/>
     <p:sldId id="258" r:id="rId4"/>
+    <p:sldId id="259" r:id="rId5"/>
   </p:sldIdLst>
   <p:sldSz cx="9144000" cy="5143500" type="screen16x9"/>
   <p:notesSz cx="6858000" cy="9144000"/>
@@ -3207,12 +3208,12 @@
       </p:grpSpPr>
       <p:sp>
         <p:nvSpPr>
-          <p:cNvPr id="2" name="Title 1"/>
-          <p:cNvSpPr>
-            <a:spLocks noGrp="1"/>
-          </p:cNvSpPr>
-          <p:nvPr>
-            <p:ph type="title"/>
+          <p:cNvPr id="3" name="Content Placeholder 2"/>
+          <p:cNvSpPr>
+            <a:spLocks noGrp="1"/>
+          </p:cNvSpPr>
+          <p:nvPr>
+            <p:ph idx="1"/>
           </p:nvPr>
         </p:nvSpPr>
         <p:spPr/>
@@ -3224,84 +3225,12 @@
               <a:buNone/>
             </a:pPr>
             <a:r>
+              <a:rPr b="1"/>
+              <a:t>Draft Material:</a:t>
+            </a:r>
+            <a:r>
               <a:rPr/>
-              <a:t>Coming Soon</a:t>
-            </a:r>
-          </a:p>
-        </p:txBody>
-      </p:sp>
-      <p:sp>
-        <p:nvSpPr>
-          <p:cNvPr id="3" name="Content Placeholder 2"/>
-          <p:cNvSpPr>
-            <a:spLocks noGrp="1"/>
-          </p:cNvSpPr>
-          <p:nvPr>
-            <p:ph idx="1"/>
-          </p:nvPr>
-        </p:nvSpPr>
-        <p:spPr/>
-        <p:txBody>
-          <a:bodyPr/>
-          <a:lstStyle/>
-          <a:p>
-            <a:pPr lvl="0" indent="0" marL="0">
-              <a:buNone/>
-            </a:pPr>
-            <a:r>
-              <a:rPr/>
-              <a:t>This lecture is under development.</a:t>
-            </a:r>
-          </a:p>
-          <a:p>
-            <a:pPr lvl="0" indent="0" marL="0">
-              <a:buNone/>
-            </a:pPr>
-            <a:r>
-              <a:rPr/>
-              <a:t>Content to adapt from previous course:</a:t>
-            </a:r>
-          </a:p>
-          <a:p>
-            <a:pPr lvl="0"/>
-            <a:r>
-              <a:rPr/>
-              <a:t>Enriched notation diagram</a:t>
-            </a:r>
-          </a:p>
-          <a:p>
-            <a:pPr lvl="0"/>
-            <a:r>
-              <a:rPr/>
-              <a:t>Dominance definition and examples</a:t>
-            </a:r>
-          </a:p>
-          <a:p>
-            <a:pPr lvl="0"/>
-            <a:r>
-              <a:rPr/>
-              <a:t>Pareto front visualization</a:t>
-            </a:r>
-          </a:p>
-          <a:p>
-            <a:pPr lvl="0"/>
-            <a:r>
-              <a:rPr/>
-              <a:t>Weighted sum approach and limitations</a:t>
-            </a:r>
-          </a:p>
-          <a:p>
-            <a:pPr lvl="0"/>
-            <a:r>
-              <a:rPr/>
-              <a:t>Genetic algorithms / MOEAs</a:t>
-            </a:r>
-          </a:p>
-          <a:p>
-            <a:pPr lvl="0"/>
-            <a:r>
-              <a:rPr/>
-              <a:t>Convergence diagnostics (hypervolume)</a:t>
+              <a:t> This content is under development and subject to change.</a:t>
             </a:r>
           </a:p>
         </p:txBody>
@@ -3312,6 +3241,129 @@
 </file>
 
 <file path=ppt/slides/slide3.xml><?xml version="1.0" encoding="utf-8"?>
+<p:sld xmlns:a="http://schemas.openxmlformats.org/drawingml/2006/main" xmlns:r="http://schemas.openxmlformats.org/officeDocument/2006/relationships" xmlns:p="http://schemas.openxmlformats.org/presentationml/2006/main">
+  <p:cSld>
+    <p:spTree>
+      <p:nvGrpSpPr>
+        <p:cNvPr id="1" name=""/>
+        <p:cNvGrpSpPr/>
+        <p:nvPr/>
+      </p:nvGrpSpPr>
+      <p:grpSpPr>
+        <a:xfrm>
+          <a:off x="0" y="0"/>
+          <a:ext cx="0" cy="0"/>
+          <a:chOff x="0" y="0"/>
+          <a:chExt cx="0" cy="0"/>
+        </a:xfrm>
+      </p:grpSpPr>
+      <p:sp>
+        <p:nvSpPr>
+          <p:cNvPr id="2" name="Title 1"/>
+          <p:cNvSpPr>
+            <a:spLocks noGrp="1"/>
+          </p:cNvSpPr>
+          <p:nvPr>
+            <p:ph type="title"/>
+          </p:nvPr>
+        </p:nvSpPr>
+        <p:spPr/>
+        <p:txBody>
+          <a:bodyPr/>
+          <a:lstStyle/>
+          <a:p>
+            <a:pPr lvl="0" indent="0" marL="0">
+              <a:buNone/>
+            </a:pPr>
+            <a:r>
+              <a:rPr/>
+              <a:t>Coming Soon</a:t>
+            </a:r>
+          </a:p>
+        </p:txBody>
+      </p:sp>
+      <p:sp>
+        <p:nvSpPr>
+          <p:cNvPr id="3" name="Content Placeholder 2"/>
+          <p:cNvSpPr>
+            <a:spLocks noGrp="1"/>
+          </p:cNvSpPr>
+          <p:nvPr>
+            <p:ph idx="1"/>
+          </p:nvPr>
+        </p:nvSpPr>
+        <p:spPr/>
+        <p:txBody>
+          <a:bodyPr/>
+          <a:lstStyle/>
+          <a:p>
+            <a:pPr lvl="0" indent="0" marL="0">
+              <a:buNone/>
+            </a:pPr>
+            <a:r>
+              <a:rPr/>
+              <a:t>This lecture is under development.</a:t>
+            </a:r>
+          </a:p>
+          <a:p>
+            <a:pPr lvl="0" indent="0" marL="0">
+              <a:buNone/>
+            </a:pPr>
+            <a:r>
+              <a:rPr/>
+              <a:t>Content to adapt from previous course:</a:t>
+            </a:r>
+          </a:p>
+          <a:p>
+            <a:pPr lvl="0"/>
+            <a:r>
+              <a:rPr/>
+              <a:t>Enriched notation diagram</a:t>
+            </a:r>
+          </a:p>
+          <a:p>
+            <a:pPr lvl="0"/>
+            <a:r>
+              <a:rPr/>
+              <a:t>Dominance definition and examples</a:t>
+            </a:r>
+          </a:p>
+          <a:p>
+            <a:pPr lvl="0"/>
+            <a:r>
+              <a:rPr/>
+              <a:t>Pareto front visualization</a:t>
+            </a:r>
+          </a:p>
+          <a:p>
+            <a:pPr lvl="0"/>
+            <a:r>
+              <a:rPr/>
+              <a:t>Weighted sum approach and limitations</a:t>
+            </a:r>
+          </a:p>
+          <a:p>
+            <a:pPr lvl="0"/>
+            <a:r>
+              <a:rPr/>
+              <a:t>Genetic algorithms / MOEAs</a:t>
+            </a:r>
+          </a:p>
+          <a:p>
+            <a:pPr lvl="0"/>
+            <a:r>
+              <a:rPr/>
+              <a:t>Convergence diagnostics (hypervolume)</a:t>
+            </a:r>
+          </a:p>
+        </p:txBody>
+      </p:sp>
+    </p:spTree>
+  </p:cSld>
+</p:sld>
+</file>
+
+<file path=ppt/slides/slide4.xml><?xml version="1.0" encoding="utf-8"?>
 <p:sld xmlns:a="http://schemas.openxmlformats.org/drawingml/2006/main" xmlns:r="http://schemas.openxmlformats.org/officeDocument/2006/relationships" xmlns:p="http://schemas.openxmlformats.org/presentationml/2006/main">
   <p:cSld>
     <p:spTree>

--- a/lectures/week-13/index.pptx
+++ b/lectures/week-13/index.pptx
@@ -3118,7 +3118,7 @@
             </a:pPr>
             <a:r>
               <a:rPr/>
-              <a:t>Multi-Objective Optimization</a:t>
+              <a:t>Case Studies</a:t>
             </a:r>
           </a:p>
         </p:txBody>
@@ -3311,49 +3311,35 @@
             </a:pPr>
             <a:r>
               <a:rPr/>
-              <a:t>Content to adapt from previous course:</a:t>
+              <a:t>Possible content:</a:t>
             </a:r>
           </a:p>
           <a:p>
             <a:pPr lvl="0"/>
             <a:r>
               <a:rPr/>
-              <a:t>Enriched notation diagram</a:t>
+              <a:t>Real-world climate adaptation case studies</a:t>
             </a:r>
           </a:p>
           <a:p>
             <a:pPr lvl="0"/>
             <a:r>
               <a:rPr/>
-              <a:t>Dominance definition and examples</a:t>
+              <a:t>Integration of risk analysis, decision analysis, and optimization</a:t>
             </a:r>
           </a:p>
           <a:p>
             <a:pPr lvl="0"/>
             <a:r>
               <a:rPr/>
-              <a:t>Pareto front visualization</a:t>
+              <a:t>Lessons learned from practice</a:t>
             </a:r>
           </a:p>
           <a:p>
             <a:pPr lvl="0"/>
             <a:r>
               <a:rPr/>
-              <a:t>Weighted sum approach and limitations</a:t>
-            </a:r>
-          </a:p>
-          <a:p>
-            <a:pPr lvl="0"/>
-            <a:r>
-              <a:rPr/>
-              <a:t>Genetic algorithms / MOEAs</a:t>
-            </a:r>
-          </a:p>
-          <a:p>
-            <a:pPr lvl="0"/>
-            <a:r>
-              <a:rPr/>
-              <a:t>Convergence diagnostics (hypervolume)</a:t>
+              <a:t>Preparation for final project presentations</a:t>
             </a:r>
           </a:p>
         </p:txBody>

--- a/lectures/week-13/index.pptx
+++ b/lectures/week-13/index.pptx
@@ -4,11 +4,18 @@
   <p:sldMasterIdLst>
     <p:sldMasterId id="2147483648" r:id="rId1"/>
   </p:sldMasterIdLst>
+  <p:notesMasterIdLst>
+    <p:notesMasterId r:id="rId10"/>
+  </p:notesMasterIdLst>
   <p:sldIdLst>
     <p:sldId id="256" r:id="rId2"/>
     <p:sldId id="257" r:id="rId3"/>
     <p:sldId id="258" r:id="rId4"/>
     <p:sldId id="259" r:id="rId5"/>
+    <p:sldId id="260" r:id="rId6"/>
+    <p:sldId id="261" r:id="rId7"/>
+    <p:sldId id="262" r:id="rId8"/>
+    <p:sldId id="263" r:id="rId9"/>
   </p:sldIdLst>
   <p:sldSz cx="9144000" cy="5143500" type="screen16x9"/>
   <p:notesSz cx="6858000" cy="9144000"/>
@@ -124,6 +131,1153 @@
     </p:ext>
   </p:extLst>
 </p:presentation>
+</file>
+
+<file path=ppt/notesMasters/notesMaster1.xml><?xml version="1.0" encoding="utf-8"?>
+<p:notesMaster xmlns:a="http://schemas.openxmlformats.org/drawingml/2006/main" xmlns:r="http://schemas.openxmlformats.org/officeDocument/2006/relationships" xmlns:p="http://schemas.openxmlformats.org/presentationml/2006/main">
+  <p:cSld>
+    <p:bg>
+      <p:bgRef idx="1001">
+        <a:schemeClr val="bg1"/>
+      </p:bgRef>
+    </p:bg>
+    <p:spTree>
+      <p:nvGrpSpPr>
+        <p:cNvPr id="1" name=""/>
+        <p:cNvGrpSpPr/>
+        <p:nvPr/>
+      </p:nvGrpSpPr>
+      <p:grpSpPr>
+        <a:xfrm>
+          <a:off x="0" y="0"/>
+          <a:ext cx="0" cy="0"/>
+          <a:chOff x="0" y="0"/>
+          <a:chExt cx="0" cy="0"/>
+        </a:xfrm>
+      </p:grpSpPr>
+      <p:sp>
+        <p:nvSpPr>
+          <p:cNvPr id="2" name="Header Placeholder 1"/>
+          <p:cNvSpPr>
+            <a:spLocks noGrp="1"/>
+          </p:cNvSpPr>
+          <p:nvPr>
+            <p:ph type="hdr" sz="quarter"/>
+          </p:nvPr>
+        </p:nvSpPr>
+        <p:spPr>
+          <a:xfrm>
+            <a:off x="0" y="0"/>
+            <a:ext cx="2971800" cy="458788"/>
+          </a:xfrm>
+          <a:prstGeom prst="rect">
+            <a:avLst/>
+          </a:prstGeom>
+        </p:spPr>
+        <p:txBody>
+          <a:bodyPr vert="horz" lIns="91440" tIns="45720" rIns="91440" bIns="45720" rtlCol="0"/>
+          <a:lstStyle>
+            <a:lvl1pPr algn="l">
+              <a:defRPr sz="1200"/>
+            </a:lvl1pPr>
+          </a:lstStyle>
+          <a:p>
+            <a:endParaRPr lang="en-US"/>
+          </a:p>
+        </p:txBody>
+      </p:sp>
+      <p:sp>
+        <p:nvSpPr>
+          <p:cNvPr id="3" name="Date Placeholder 2"/>
+          <p:cNvSpPr>
+            <a:spLocks noGrp="1"/>
+          </p:cNvSpPr>
+          <p:nvPr>
+            <p:ph type="dt" idx="1"/>
+          </p:nvPr>
+        </p:nvSpPr>
+        <p:spPr>
+          <a:xfrm>
+            <a:off x="3884613" y="0"/>
+            <a:ext cx="2971800" cy="458788"/>
+          </a:xfrm>
+          <a:prstGeom prst="rect">
+            <a:avLst/>
+          </a:prstGeom>
+        </p:spPr>
+        <p:txBody>
+          <a:bodyPr vert="horz" lIns="91440" tIns="45720" rIns="91440" bIns="45720" rtlCol="0"/>
+          <a:lstStyle>
+            <a:lvl1pPr algn="r">
+              <a:defRPr sz="1200"/>
+            </a:lvl1pPr>
+          </a:lstStyle>
+          <a:p>
+            <a:fld id="{0F9C1CCF-B725-44A7-AA57-5E433BD85C9F}" type="datetimeFigureOut">
+              <a:rPr lang="en-US" smtClean="0"/>
+              <a:t>1/2/22</a:t>
+            </a:fld>
+            <a:endParaRPr lang="en-US"/>
+          </a:p>
+        </p:txBody>
+      </p:sp>
+      <p:sp>
+        <p:nvSpPr>
+          <p:cNvPr id="4" name="Slide Image Placeholder 3"/>
+          <p:cNvSpPr>
+            <a:spLocks noGrp="1" noRot="1" noChangeAspect="1"/>
+          </p:cNvSpPr>
+          <p:nvPr>
+            <p:ph type="sldImg" idx="2"/>
+          </p:nvPr>
+        </p:nvSpPr>
+        <p:spPr>
+          <a:xfrm>
+            <a:off x="685800" y="1143000"/>
+            <a:ext cx="5486400" cy="3086100"/>
+          </a:xfrm>
+          <a:prstGeom prst="rect">
+            <a:avLst/>
+          </a:prstGeom>
+          <a:noFill/>
+          <a:ln w="12700">
+            <a:solidFill>
+              <a:prstClr val="black"/>
+            </a:solidFill>
+          </a:ln>
+        </p:spPr>
+        <p:txBody>
+          <a:bodyPr vert="horz" lIns="91440" tIns="45720" rIns="91440" bIns="45720" rtlCol="0" anchor="ctr"/>
+          <a:lstStyle/>
+          <a:p>
+            <a:endParaRPr lang="en-US"/>
+          </a:p>
+        </p:txBody>
+      </p:sp>
+      <p:sp>
+        <p:nvSpPr>
+          <p:cNvPr id="5" name="Notes Placeholder 4"/>
+          <p:cNvSpPr>
+            <a:spLocks noGrp="1"/>
+          </p:cNvSpPr>
+          <p:nvPr>
+            <p:ph type="body" sz="quarter" idx="3"/>
+          </p:nvPr>
+        </p:nvSpPr>
+        <p:spPr>
+          <a:xfrm>
+            <a:off x="685800" y="4400550"/>
+            <a:ext cx="5486400" cy="3600450"/>
+          </a:xfrm>
+          <a:prstGeom prst="rect">
+            <a:avLst/>
+          </a:prstGeom>
+        </p:spPr>
+        <p:txBody>
+          <a:bodyPr vert="horz" lIns="91440" tIns="45720" rIns="91440" bIns="45720" rtlCol="0"/>
+          <a:lstStyle/>
+          <a:p>
+            <a:pPr lvl="0"/>
+            <a:r>
+              <a:rPr lang="en-US"/>
+              <a:t>Click to edit Master text styles</a:t>
+            </a:r>
+          </a:p>
+          <a:p>
+            <a:pPr lvl="1"/>
+            <a:r>
+              <a:rPr lang="en-US"/>
+              <a:t>Second level</a:t>
+            </a:r>
+          </a:p>
+          <a:p>
+            <a:pPr lvl="2"/>
+            <a:r>
+              <a:rPr lang="en-US"/>
+              <a:t>Third level</a:t>
+            </a:r>
+          </a:p>
+          <a:p>
+            <a:pPr lvl="3"/>
+            <a:r>
+              <a:rPr lang="en-US"/>
+              <a:t>Fourth level</a:t>
+            </a:r>
+          </a:p>
+          <a:p>
+            <a:pPr lvl="4"/>
+            <a:r>
+              <a:rPr lang="en-US"/>
+              <a:t>Fifth level</a:t>
+            </a:r>
+          </a:p>
+        </p:txBody>
+      </p:sp>
+      <p:sp>
+        <p:nvSpPr>
+          <p:cNvPr id="6" name="Footer Placeholder 5"/>
+          <p:cNvSpPr>
+            <a:spLocks noGrp="1"/>
+          </p:cNvSpPr>
+          <p:nvPr>
+            <p:ph type="ftr" sz="quarter" idx="4"/>
+          </p:nvPr>
+        </p:nvSpPr>
+        <p:spPr>
+          <a:xfrm>
+            <a:off x="0" y="8685213"/>
+            <a:ext cx="2971800" cy="458787"/>
+          </a:xfrm>
+          <a:prstGeom prst="rect">
+            <a:avLst/>
+          </a:prstGeom>
+        </p:spPr>
+        <p:txBody>
+          <a:bodyPr vert="horz" lIns="91440" tIns="45720" rIns="91440" bIns="45720" rtlCol="0" anchor="b"/>
+          <a:lstStyle>
+            <a:lvl1pPr algn="l">
+              <a:defRPr sz="1200"/>
+            </a:lvl1pPr>
+          </a:lstStyle>
+          <a:p>
+            <a:endParaRPr lang="en-US"/>
+          </a:p>
+        </p:txBody>
+      </p:sp>
+      <p:sp>
+        <p:nvSpPr>
+          <p:cNvPr id="7" name="Slide Number Placeholder 6"/>
+          <p:cNvSpPr>
+            <a:spLocks noGrp="1"/>
+          </p:cNvSpPr>
+          <p:nvPr>
+            <p:ph type="sldNum" sz="quarter" idx="5"/>
+          </p:nvPr>
+        </p:nvSpPr>
+        <p:spPr>
+          <a:xfrm>
+            <a:off x="3884613" y="8685213"/>
+            <a:ext cx="2971800" cy="458787"/>
+          </a:xfrm>
+          <a:prstGeom prst="rect">
+            <a:avLst/>
+          </a:prstGeom>
+        </p:spPr>
+        <p:txBody>
+          <a:bodyPr vert="horz" lIns="91440" tIns="45720" rIns="91440" bIns="45720" rtlCol="0" anchor="b"/>
+          <a:lstStyle>
+            <a:lvl1pPr algn="r">
+              <a:defRPr sz="1200"/>
+            </a:lvl1pPr>
+          </a:lstStyle>
+          <a:p>
+            <a:fld id="{18BDFEC3-8487-43E8-A154-7C12CBC1FFF2}" type="slidenum">
+              <a:rPr lang="en-US" smtClean="0"/>
+              <a:t>‹#›</a:t>
+            </a:fld>
+            <a:endParaRPr lang="en-US"/>
+          </a:p>
+        </p:txBody>
+      </p:sp>
+    </p:spTree>
+    <p:extLst>
+      <p:ext uri="{BB962C8B-B14F-4D97-AF65-F5344CB8AC3E}">
+        <p14:creationId xmlns:p14="http://schemas.microsoft.com/office/powerpoint/2010/main" val="3782709779"/>
+      </p:ext>
+    </p:extLst>
+  </p:cSld>
+  <p:clrMap bg1="lt1" tx1="dk1" bg2="lt2" tx2="dk2" accent1="accent1" accent2="accent2" accent3="accent3" accent4="accent4" accent5="accent5" accent6="accent6" hlink="hlink" folHlink="folHlink"/>
+  <p:notesStyle>
+    <a:lvl1pPr marL="0" algn="l" defTabSz="914400" rtl="0" eaLnBrk="1" latinLnBrk="0" hangingPunct="1">
+      <a:defRPr sz="1200" kern="1200">
+        <a:solidFill>
+          <a:schemeClr val="tx1"/>
+        </a:solidFill>
+        <a:latin typeface="+mn-lt"/>
+        <a:ea typeface="+mn-ea"/>
+        <a:cs typeface="+mn-cs"/>
+      </a:defRPr>
+    </a:lvl1pPr>
+    <a:lvl2pPr marL="457200" algn="l" defTabSz="914400" rtl="0" eaLnBrk="1" latinLnBrk="0" hangingPunct="1">
+      <a:defRPr sz="1200" kern="1200">
+        <a:solidFill>
+          <a:schemeClr val="tx1"/>
+        </a:solidFill>
+        <a:latin typeface="+mn-lt"/>
+        <a:ea typeface="+mn-ea"/>
+        <a:cs typeface="+mn-cs"/>
+      </a:defRPr>
+    </a:lvl2pPr>
+    <a:lvl3pPr marL="914400" algn="l" defTabSz="914400" rtl="0" eaLnBrk="1" latinLnBrk="0" hangingPunct="1">
+      <a:defRPr sz="1200" kern="1200">
+        <a:solidFill>
+          <a:schemeClr val="tx1"/>
+        </a:solidFill>
+        <a:latin typeface="+mn-lt"/>
+        <a:ea typeface="+mn-ea"/>
+        <a:cs typeface="+mn-cs"/>
+      </a:defRPr>
+    </a:lvl3pPr>
+    <a:lvl4pPr marL="1371600" algn="l" defTabSz="914400" rtl="0" eaLnBrk="1" latinLnBrk="0" hangingPunct="1">
+      <a:defRPr sz="1200" kern="1200">
+        <a:solidFill>
+          <a:schemeClr val="tx1"/>
+        </a:solidFill>
+        <a:latin typeface="+mn-lt"/>
+        <a:ea typeface="+mn-ea"/>
+        <a:cs typeface="+mn-cs"/>
+      </a:defRPr>
+    </a:lvl4pPr>
+    <a:lvl5pPr marL="1828800" algn="l" defTabSz="914400" rtl="0" eaLnBrk="1" latinLnBrk="0" hangingPunct="1">
+      <a:defRPr sz="1200" kern="1200">
+        <a:solidFill>
+          <a:schemeClr val="tx1"/>
+        </a:solidFill>
+        <a:latin typeface="+mn-lt"/>
+        <a:ea typeface="+mn-ea"/>
+        <a:cs typeface="+mn-cs"/>
+      </a:defRPr>
+    </a:lvl5pPr>
+    <a:lvl6pPr marL="2286000" algn="l" defTabSz="914400" rtl="0" eaLnBrk="1" latinLnBrk="0" hangingPunct="1">
+      <a:defRPr sz="1200" kern="1200">
+        <a:solidFill>
+          <a:schemeClr val="tx1"/>
+        </a:solidFill>
+        <a:latin typeface="+mn-lt"/>
+        <a:ea typeface="+mn-ea"/>
+        <a:cs typeface="+mn-cs"/>
+      </a:defRPr>
+    </a:lvl6pPr>
+    <a:lvl7pPr marL="2743200" algn="l" defTabSz="914400" rtl="0" eaLnBrk="1" latinLnBrk="0" hangingPunct="1">
+      <a:defRPr sz="1200" kern="1200">
+        <a:solidFill>
+          <a:schemeClr val="tx1"/>
+        </a:solidFill>
+        <a:latin typeface="+mn-lt"/>
+        <a:ea typeface="+mn-ea"/>
+        <a:cs typeface="+mn-cs"/>
+      </a:defRPr>
+    </a:lvl7pPr>
+    <a:lvl8pPr marL="3200400" algn="l" defTabSz="914400" rtl="0" eaLnBrk="1" latinLnBrk="0" hangingPunct="1">
+      <a:defRPr sz="1200" kern="1200">
+        <a:solidFill>
+          <a:schemeClr val="tx1"/>
+        </a:solidFill>
+        <a:latin typeface="+mn-lt"/>
+        <a:ea typeface="+mn-ea"/>
+        <a:cs typeface="+mn-cs"/>
+      </a:defRPr>
+    </a:lvl8pPr>
+    <a:lvl9pPr marL="3657600" algn="l" defTabSz="914400" rtl="0" eaLnBrk="1" latinLnBrk="0" hangingPunct="1">
+      <a:defRPr sz="1200" kern="1200">
+        <a:solidFill>
+          <a:schemeClr val="tx1"/>
+        </a:solidFill>
+        <a:latin typeface="+mn-lt"/>
+        <a:ea typeface="+mn-ea"/>
+        <a:cs typeface="+mn-cs"/>
+      </a:defRPr>
+    </a:lvl9pPr>
+  </p:notesStyle>
+</p:notesMaster>
+</file>
+
+<file path=ppt/notesSlides/notesSlide1.xml><?xml version="1.0" encoding="utf-8"?>
+<p:notes xmlns:a="http://schemas.openxmlformats.org/drawingml/2006/main" xmlns:r="http://schemas.openxmlformats.org/officeDocument/2006/relationships" xmlns:p="http://schemas.openxmlformats.org/presentationml/2006/main">
+  <p:cSld>
+    <p:spTree>
+      <p:nvGrpSpPr>
+        <p:cNvPr id="1" name=""/>
+        <p:cNvGrpSpPr/>
+        <p:nvPr/>
+      </p:nvGrpSpPr>
+      <p:grpSpPr>
+        <a:xfrm>
+          <a:off x="0" y="0"/>
+          <a:ext cx="0" cy="0"/>
+          <a:chOff x="0" y="0"/>
+          <a:chExt cx="0" cy="0"/>
+        </a:xfrm>
+      </p:grpSpPr>
+      <p:sp>
+        <p:nvSpPr>
+          <p:cNvPr id="2" name="Slide Image Placeholder 1"/>
+          <p:cNvSpPr>
+            <a:spLocks noGrp="1" noRot="1" noChangeAspect="1"/>
+          </p:cNvSpPr>
+          <p:nvPr>
+            <p:ph type="sldImg"/>
+          </p:nvPr>
+        </p:nvSpPr>
+        <p:spPr/>
+      </p:sp>
+      <p:sp>
+        <p:nvSpPr>
+          <p:cNvPr id="3" name="Notes Placeholder 2"/>
+          <p:cNvSpPr>
+            <a:spLocks noGrp="1"/>
+          </p:cNvSpPr>
+          <p:nvPr>
+            <p:ph type="body" idx="1"/>
+          </p:nvPr>
+        </p:nvSpPr>
+        <p:spPr/>
+        <p:txBody>
+          <a:bodyPr/>
+          <a:lstStyle/>
+          <a:p>
+            <a:pPr lvl="0" indent="0" marL="0">
+              <a:buNone/>
+            </a:pPr>
+            <a:r>
+              <a:rPr/>
+              <a:t>Target: 1:02. Open with the hook — no framing yet, just the story. The Delta Works are an engineering marvel. But they were designed under a paradigm of “find the optimal solution and build it.” What happens when the assumptions behind that solution change? Sea-level rise projections in 1953 looked very different from today’s. Let the students sit with the tension: you can’t just optimize once for infrastructure that lasts centuries.</a:t>
+            </a:r>
+          </a:p>
+          <a:p>
+            <a:pPr lvl="0" indent="0" marL="0">
+              <a:buNone/>
+            </a:pPr>
+          </a:p>
+          <a:p>
+            <a:pPr lvl="0" indent="0" marL="0">
+              <a:buNone/>
+            </a:pPr>
+            <a:r>
+              <a:rPr/>
+              <a:t>Target: 1:05. This is the hook and framing slide. Keep it brief. The point: students have been learning methods in isolation. Today is about synthesis. Emphasize the celebration: they have actually built a serious toolkit. That’s worth acknowledging.</a:t>
+            </a:r>
+          </a:p>
+        </p:txBody>
+      </p:sp>
+      <p:sp>
+        <p:nvSpPr>
+          <p:cNvPr id="4" name="Slide Number Placeholder 3"/>
+          <p:cNvSpPr>
+            <a:spLocks noGrp="1"/>
+          </p:cNvSpPr>
+          <p:nvPr>
+            <p:ph type="sldNum" sz="quarter" idx="10"/>
+          </p:nvPr>
+        </p:nvSpPr>
+        <p:spPr/>
+        <p:txBody>
+          <a:bodyPr/>
+          <a:lstStyle/>
+          <a:p>
+            <a:fld id="{18BDFEC3-8487-43E8-A154-7C12CBC1FFF2}" type="slidenum">
+              <a:rPr lang="en-US"/>
+              <a:t>2</a:t>
+            </a:fld>
+            <a:endParaRPr lang="en-US"/>
+          </a:p>
+        </p:txBody>
+      </p:sp>
+    </p:spTree>
+  </p:cSld>
+</p:notes>
+</file>
+
+<file path=ppt/notesSlides/notesSlide2.xml><?xml version="1.0" encoding="utf-8"?>
+<p:notes xmlns:a="http://schemas.openxmlformats.org/drawingml/2006/main" xmlns:r="http://schemas.openxmlformats.org/officeDocument/2006/relationships" xmlns:p="http://schemas.openxmlformats.org/presentationml/2006/main">
+  <p:cSld>
+    <p:spTree>
+      <p:nvGrpSpPr>
+        <p:cNvPr id="1" name=""/>
+        <p:cNvGrpSpPr/>
+        <p:nvPr/>
+      </p:nvGrpSpPr>
+      <p:grpSpPr>
+        <a:xfrm>
+          <a:off x="0" y="0"/>
+          <a:ext cx="0" cy="0"/>
+          <a:chOff x="0" y="0"/>
+          <a:chExt cx="0" cy="0"/>
+        </a:xfrm>
+      </p:grpSpPr>
+      <p:sp>
+        <p:nvSpPr>
+          <p:cNvPr id="2" name="Slide Image Placeholder 1"/>
+          <p:cNvSpPr>
+            <a:spLocks noGrp="1" noRot="1" noChangeAspect="1"/>
+          </p:cNvSpPr>
+          <p:nvPr>
+            <p:ph type="sldImg"/>
+          </p:nvPr>
+        </p:nvSpPr>
+        <p:spPr/>
+      </p:sp>
+      <p:sp>
+        <p:nvSpPr>
+          <p:cNvPr id="3" name="Notes Placeholder 2"/>
+          <p:cNvSpPr>
+            <a:spLocks noGrp="1"/>
+          </p:cNvSpPr>
+          <p:nvPr>
+            <p:ph type="body" idx="1"/>
+          </p:nvPr>
+        </p:nvSpPr>
+        <p:spPr/>
+        <p:txBody>
+          <a:bodyPr/>
+          <a:lstStyle/>
+          <a:p>
+            <a:pPr lvl="0" indent="0" marL="0">
+              <a:buNone/>
+            </a:pPr>
+            <a:r>
+              <a:rPr/>
+              <a:t>Target: 1:06. Section break. Transition to the Haasnoot case study.</a:t>
+            </a:r>
+          </a:p>
+          <a:p>
+            <a:pPr lvl="0" indent="0" marL="0">
+              <a:buNone/>
+            </a:pPr>
+          </a:p>
+          <a:p>
+            <a:pPr lvl="0" indent="0" marL="0">
+              <a:buNone/>
+            </a:pPr>
+            <a:r>
+              <a:rPr/>
+              <a:t>Target: 1:09. This motivates why standard optimization fails here. Lock-in is key: once you build a dike to a certain height, you can’t easily unbuild it. The decision is irreversible (or very costly to reverse), and the uncertainty is deep. Connect to Week 8: this is precisely the setting where robustness frameworks matter most.</a:t>
+            </a:r>
+          </a:p>
+          <a:p>
+            <a:pPr lvl="0" indent="0" marL="0">
+              <a:buNone/>
+            </a:pPr>
+          </a:p>
+          <a:p>
+            <a:pPr lvl="0" indent="0" marL="0">
+              <a:buNone/>
+            </a:pPr>
+            <a:r>
+              <a:rPr/>
+              <a:t>Target: 1:12. This is the conceptual core of the lecture. Pathway = sequence of actions + adaptive triggers. The trigger might be: “when observed sea level rise exceeds X cm” or “when flood frequency exceeds Y per decade.” The key word is “observable” — the trigger has to be something you can actually measure. Draw this on the board if helpful: a timeline with decision points branching into multiple futures.</a:t>
+            </a:r>
+          </a:p>
+          <a:p>
+            <a:pPr lvl="0" indent="0" marL="0">
+              <a:buNone/>
+            </a:pPr>
+          </a:p>
+          <a:p>
+            <a:pPr lvl="0" indent="0" marL="0">
+              <a:buNone/>
+            </a:pPr>
+            <a:r>
+              <a:rPr/>
+              <a:t>Target: 1:15. The pathway map is the central deliverable in Haasnoot et al. Walk through what it looks like: a horizontal timeline, branching action sequences, trigger thresholds marked. Key conceptual shift: the output of the analysis is not a recommendation but a structured menu of options with conditions for choosing among them. This is very different from “find the optimal policy.”</a:t>
+            </a:r>
+          </a:p>
+          <a:p>
+            <a:pPr lvl="0" indent="0" marL="0">
+              <a:buNone/>
+            </a:pPr>
+          </a:p>
+          <a:p>
+            <a:pPr lvl="0" indent="0" marL="0">
+              <a:buNone/>
+            </a:pPr>
+            <a:r>
+              <a:rPr/>
+              <a:t>Target: 1:17. A quick contrast to anchor the idea. Don’t dwell — students should see this as a synthesis of ideas they already know. The bottom row is the most important: uncertainty isn’t something to minimize or quantify — it’s the thing that shapes how you design the system.</a:t>
+            </a:r>
+          </a:p>
+        </p:txBody>
+      </p:sp>
+      <p:sp>
+        <p:nvSpPr>
+          <p:cNvPr id="4" name="Slide Number Placeholder 3"/>
+          <p:cNvSpPr>
+            <a:spLocks noGrp="1"/>
+          </p:cNvSpPr>
+          <p:nvPr>
+            <p:ph type="sldNum" sz="quarter" idx="10"/>
+          </p:nvPr>
+        </p:nvSpPr>
+        <p:spPr/>
+        <p:txBody>
+          <a:bodyPr/>
+          <a:lstStyle/>
+          <a:p>
+            <a:fld id="{18BDFEC3-8487-43E8-A154-7C12CBC1FFF2}" type="slidenum">
+              <a:rPr lang="en-US"/>
+              <a:t>3</a:t>
+            </a:fld>
+            <a:endParaRPr lang="en-US"/>
+          </a:p>
+        </p:txBody>
+      </p:sp>
+    </p:spTree>
+  </p:cSld>
+</p:notes>
+</file>
+
+<file path=ppt/notesSlides/notesSlide3.xml><?xml version="1.0" encoding="utf-8"?>
+<p:notes xmlns:a="http://schemas.openxmlformats.org/drawingml/2006/main" xmlns:r="http://schemas.openxmlformats.org/officeDocument/2006/relationships" xmlns:p="http://schemas.openxmlformats.org/presentationml/2006/main">
+  <p:cSld>
+    <p:spTree>
+      <p:nvGrpSpPr>
+        <p:cNvPr id="1" name=""/>
+        <p:cNvGrpSpPr/>
+        <p:nvPr/>
+      </p:nvGrpSpPr>
+      <p:grpSpPr>
+        <a:xfrm>
+          <a:off x="0" y="0"/>
+          <a:ext cx="0" cy="0"/>
+          <a:chOff x="0" y="0"/>
+          <a:chExt cx="0" cy="0"/>
+        </a:xfrm>
+      </p:grpSpPr>
+      <p:sp>
+        <p:nvSpPr>
+          <p:cNvPr id="2" name="Slide Image Placeholder 1"/>
+          <p:cNvSpPr>
+            <a:spLocks noGrp="1" noRot="1" noChangeAspect="1"/>
+          </p:cNvSpPr>
+          <p:nvPr>
+            <p:ph type="sldImg"/>
+          </p:nvPr>
+        </p:nvSpPr>
+        <p:spPr/>
+      </p:sp>
+      <p:sp>
+        <p:nvSpPr>
+          <p:cNvPr id="3" name="Notes Placeholder 2"/>
+          <p:cNvSpPr>
+            <a:spLocks noGrp="1"/>
+          </p:cNvSpPr>
+          <p:nvPr>
+            <p:ph type="body" idx="1"/>
+          </p:nvPr>
+        </p:nvSpPr>
+        <p:spPr/>
+        <p:txBody>
+          <a:bodyPr/>
+          <a:lstStyle/>
+          <a:p>
+            <a:pPr lvl="0" indent="0" marL="0">
+              <a:buNone/>
+            </a:pPr>
+            <a:r>
+              <a:rPr/>
+              <a:t>Target: 1:18. Section 2: show how this case study uses each Module 3 tool. The goal is for students to see their course content as an integrated pipeline, not a list of separate methods.</a:t>
+            </a:r>
+          </a:p>
+          <a:p>
+            <a:pPr lvl="0" indent="0" marL="0">
+              <a:buNone/>
+            </a:pPr>
+          </a:p>
+          <a:p>
+            <a:pPr lvl="0" indent="0" marL="0">
+              <a:buNone/>
+            </a:pPr>
+            <a:r>
+              <a:rPr/>
+              <a:t>Target: 1:21. This is Week 10 content: exploratory modeling. The emphasis is on mapping the performance landscape, not finding the optimal solution. Key framing: you’re not asking “what’s the best plan?” — you’re asking “under what conditions does any given plan fail?”</a:t>
+            </a:r>
+          </a:p>
+          <a:p>
+            <a:pPr lvl="0" indent="0" marL="0">
+              <a:buNone/>
+            </a:pPr>
+          </a:p>
+          <a:p>
+            <a:pPr lvl="0" indent="0" marL="0">
+              <a:buNone/>
+            </a:pPr>
+            <a:r>
+              <a:rPr/>
+              <a:t>Target: 1:24. This is Week 10 content: PRIM / scenario discovery. The connection is direct: scenario discovery finds the conditions that define decision points. Example: “Strategy A fails when SLR &gt; 40 cm AND population growth &gt; 1.5%/year.” That box-shaped region in scenario space becomes a trigger: “switch to Strategy B when you observe these conditions.” This is a beautiful integration — scenario discovery literally generates the adaptive triggers.</a:t>
+            </a:r>
+          </a:p>
+          <a:p>
+            <a:pPr lvl="0" indent="0" marL="0">
+              <a:buNone/>
+            </a:pPr>
+          </a:p>
+          <a:p>
+            <a:pPr lvl="0" indent="0" marL="0">
+              <a:buNone/>
+            </a:pPr>
+            <a:r>
+              <a:rPr/>
+              <a:t>Target: 1:27. Week 11: sequential decision making. Path dependencies are important: if you build a very tall dike now, you may foreclose the option to later convert to managed retreat. The pathway map visualizes these dependencies explicitly. “Portfolio level”: instead of optimizing one sequence, you design a set of sequences that together cover many futures.</a:t>
+            </a:r>
+          </a:p>
+          <a:p>
+            <a:pPr lvl="0" indent="0" marL="0">
+              <a:buNone/>
+            </a:pPr>
+          </a:p>
+          <a:p>
+            <a:pPr lvl="0" indent="0" marL="0">
+              <a:buNone/>
+            </a:pPr>
+            <a:r>
+              <a:rPr/>
+              <a:t>Target: 1:30. Week 12: multi-objective optimization. The pathway map doesn’t produce a single recommendation — it produces a Pareto front of pathways. Decision-makers can then navigate trade-offs explicitly: “do we want the cheapest pathway, or the one that keeps the most options open?” Flexibility is worth calling out: this is a genuine objective, not just a constraint. Some pathways are more reversible than others, and that has real value under deep uncertainty.</a:t>
+            </a:r>
+          </a:p>
+          <a:p>
+            <a:pPr lvl="0" indent="0" marL="0">
+              <a:buNone/>
+            </a:pPr>
+          </a:p>
+          <a:p>
+            <a:pPr lvl="0" indent="0" marL="0">
+              <a:buNone/>
+            </a:pPr>
+            <a:r>
+              <a:rPr/>
+              <a:t>Target: 1:32. This is the key synthesis slide of the lecture. The pipeline shows how the four Module 3 methods connect into a coherent workflow. Take a moment here: ask students if they can trace their own project through this pipeline. Not every project will use all four stages, but most will touch at least three.</a:t>
+            </a:r>
+          </a:p>
+        </p:txBody>
+      </p:sp>
+      <p:sp>
+        <p:nvSpPr>
+          <p:cNvPr id="4" name="Slide Number Placeholder 3"/>
+          <p:cNvSpPr>
+            <a:spLocks noGrp="1"/>
+          </p:cNvSpPr>
+          <p:nvPr>
+            <p:ph type="sldNum" sz="quarter" idx="10"/>
+          </p:nvPr>
+        </p:nvSpPr>
+        <p:spPr/>
+        <p:txBody>
+          <a:bodyPr/>
+          <a:lstStyle/>
+          <a:p>
+            <a:fld id="{18BDFEC3-8487-43E8-A154-7C12CBC1FFF2}" type="slidenum">
+              <a:rPr lang="en-US"/>
+              <a:t>4</a:t>
+            </a:fld>
+            <a:endParaRPr lang="en-US"/>
+          </a:p>
+        </p:txBody>
+      </p:sp>
+    </p:spTree>
+  </p:cSld>
+</p:notes>
+</file>
+
+<file path=ppt/notesSlides/notesSlide4.xml><?xml version="1.0" encoding="utf-8"?>
+<p:notes xmlns:a="http://schemas.openxmlformats.org/drawingml/2006/main" xmlns:r="http://schemas.openxmlformats.org/officeDocument/2006/relationships" xmlns:p="http://schemas.openxmlformats.org/presentationml/2006/main">
+  <p:cSld>
+    <p:spTree>
+      <p:nvGrpSpPr>
+        <p:cNvPr id="1" name=""/>
+        <p:cNvGrpSpPr/>
+        <p:nvPr/>
+      </p:nvGrpSpPr>
+      <p:grpSpPr>
+        <a:xfrm>
+          <a:off x="0" y="0"/>
+          <a:ext cx="0" cy="0"/>
+          <a:chOff x="0" y="0"/>
+          <a:chExt cx="0" cy="0"/>
+        </a:xfrm>
+      </p:grpSpPr>
+      <p:sp>
+        <p:nvSpPr>
+          <p:cNvPr id="2" name="Slide Image Placeholder 1"/>
+          <p:cNvSpPr>
+            <a:spLocks noGrp="1" noRot="1" noChangeAspect="1"/>
+          </p:cNvSpPr>
+          <p:nvPr>
+            <p:ph type="sldImg"/>
+          </p:nvPr>
+        </p:nvSpPr>
+        <p:spPr/>
+      </p:sp>
+      <p:sp>
+        <p:nvSpPr>
+          <p:cNvPr id="3" name="Notes Placeholder 2"/>
+          <p:cNvSpPr>
+            <a:spLocks noGrp="1"/>
+          </p:cNvSpPr>
+          <p:nvPr>
+            <p:ph type="body" idx="1"/>
+          </p:nvPr>
+        </p:nvSpPr>
+        <p:spPr/>
+        <p:txBody>
+          <a:bodyPr/>
+          <a:lstStyle/>
+          <a:p>
+            <a:pPr lvl="0" indent="0" marL="0">
+              <a:buNone/>
+            </a:pPr>
+            <a:r>
+              <a:rPr/>
+              <a:t>Target: 1:33. Section 3: prepare students for Wednesday’s discussion with Dongwook. Give them analytical vocabulary to bring to the paper.</a:t>
+            </a:r>
+          </a:p>
+          <a:p>
+            <a:pPr lvl="0" indent="0" marL="0">
+              <a:buNone/>
+            </a:pPr>
+          </a:p>
+          <a:p>
+            <a:pPr lvl="0" indent="0" marL="0">
+              <a:buNone/>
+            </a:pPr>
+            <a:r>
+              <a:rPr/>
+              <a:t>Target: 1:36. These five questions give students a scaffold for Wednesday’s discussion. They should arrive having thought through each of these for Haasnoot et al. Question 5 is often the most revealing: good papers are honest about what they can’t answer. For Haasnoot: what’s NOT captured? Implementation costs? Political feasibility? Equity across communities? Encourage students to push on the limits — that’s where the interesting science lives.</a:t>
+            </a:r>
+          </a:p>
+          <a:p>
+            <a:pPr lvl="0" indent="0" marL="0">
+              <a:buNone/>
+            </a:pPr>
+          </a:p>
+          <a:p>
+            <a:pPr lvl="0" indent="0" marL="0">
+              <a:buNone/>
+            </a:pPr>
+            <a:r>
+              <a:rPr/>
+              <a:t>Target: 1:38. Specific prep questions for Wednesday. Dongwook will lead — your job is to set the stage so students come prepared. The last question (transferability) is particularly interesting: the Netherlands has specific institutional capacity, data quality, and political will. Does the method transfer to, say, a small island developing state? Don’t answer these here — just plant the questions.</a:t>
+            </a:r>
+          </a:p>
+        </p:txBody>
+      </p:sp>
+      <p:sp>
+        <p:nvSpPr>
+          <p:cNvPr id="4" name="Slide Number Placeholder 3"/>
+          <p:cNvSpPr>
+            <a:spLocks noGrp="1"/>
+          </p:cNvSpPr>
+          <p:nvPr>
+            <p:ph type="sldNum" sz="quarter" idx="10"/>
+          </p:nvPr>
+        </p:nvSpPr>
+        <p:spPr/>
+        <p:txBody>
+          <a:bodyPr/>
+          <a:lstStyle/>
+          <a:p>
+            <a:fld id="{18BDFEC3-8487-43E8-A154-7C12CBC1FFF2}" type="slidenum">
+              <a:rPr lang="en-US"/>
+              <a:t>5</a:t>
+            </a:fld>
+            <a:endParaRPr lang="en-US"/>
+          </a:p>
+        </p:txBody>
+      </p:sp>
+    </p:spTree>
+  </p:cSld>
+</p:notes>
+</file>
+
+<file path=ppt/notesSlides/notesSlide5.xml><?xml version="1.0" encoding="utf-8"?>
+<p:notes xmlns:a="http://schemas.openxmlformats.org/drawingml/2006/main" xmlns:r="http://schemas.openxmlformats.org/officeDocument/2006/relationships" xmlns:p="http://schemas.openxmlformats.org/presentationml/2006/main">
+  <p:cSld>
+    <p:spTree>
+      <p:nvGrpSpPr>
+        <p:cNvPr id="1" name=""/>
+        <p:cNvGrpSpPr/>
+        <p:nvPr/>
+      </p:nvGrpSpPr>
+      <p:grpSpPr>
+        <a:xfrm>
+          <a:off x="0" y="0"/>
+          <a:ext cx="0" cy="0"/>
+          <a:chOff x="0" y="0"/>
+          <a:chExt cx="0" cy="0"/>
+        </a:xfrm>
+      </p:grpSpPr>
+      <p:sp>
+        <p:nvSpPr>
+          <p:cNvPr id="2" name="Slide Image Placeholder 1"/>
+          <p:cNvSpPr>
+            <a:spLocks noGrp="1" noRot="1" noChangeAspect="1"/>
+          </p:cNvSpPr>
+          <p:nvPr>
+            <p:ph type="sldImg"/>
+          </p:nvPr>
+        </p:nvSpPr>
+        <p:spPr/>
+      </p:sp>
+      <p:sp>
+        <p:nvSpPr>
+          <p:cNvPr id="3" name="Notes Placeholder 2"/>
+          <p:cNvSpPr>
+            <a:spLocks noGrp="1"/>
+          </p:cNvSpPr>
+          <p:nvPr>
+            <p:ph type="body" idx="1"/>
+          </p:nvPr>
+        </p:nvSpPr>
+        <p:spPr/>
+        <p:txBody>
+          <a:bodyPr/>
+          <a:lstStyle/>
+          <a:p>
+            <a:pPr lvl="0" indent="0" marL="0">
+              <a:buNone/>
+            </a:pPr>
+            <a:r>
+              <a:rPr/>
+              <a:t>Target: 1:39. Section 4: connect everything to the final projects. This should feel energizing, not stressful. Students have done the work — now help them see it.</a:t>
+            </a:r>
+          </a:p>
+          <a:p>
+            <a:pPr lvl="0" indent="0" marL="0">
+              <a:buNone/>
+            </a:pPr>
+          </a:p>
+          <a:p>
+            <a:pPr lvl="0" indent="0" marL="0">
+              <a:buNone/>
+            </a:pPr>
+            <a:r>
+              <a:rPr/>
+              <a:t>Target: 1:41. Reassurance slide: students have done substantial work. The framing here is important: their memo work wasn’t just homework — it was the actual analytical pipeline. The final presentation is not a new task; it’s communicating what they’ve already done.</a:t>
+            </a:r>
+          </a:p>
+          <a:p>
+            <a:pPr lvl="0" indent="0" marL="0">
+              <a:buNone/>
+            </a:pPr>
+          </a:p>
+          <a:p>
+            <a:pPr lvl="0" indent="0" marL="0">
+              <a:buNone/>
+            </a:pPr>
+            <a:r>
+              <a:rPr/>
+              <a:t>Target: 1:43. This is the transition from “technical analysis” to “communication.” The executive briefing is a genre with its own conventions. The biggest mistake students make: leading with methods. No one cares. Lead with the decision. Lead with what’s at stake. Then bring in the evidence. “What could change your mind” is actually a sign of analytical sophistication, not weakness.</a:t>
+            </a:r>
+          </a:p>
+        </p:txBody>
+      </p:sp>
+      <p:sp>
+        <p:nvSpPr>
+          <p:cNvPr id="4" name="Slide Number Placeholder 3"/>
+          <p:cNvSpPr>
+            <a:spLocks noGrp="1"/>
+          </p:cNvSpPr>
+          <p:nvPr>
+            <p:ph type="sldNum" sz="quarter" idx="10"/>
+          </p:nvPr>
+        </p:nvSpPr>
+        <p:spPr/>
+        <p:txBody>
+          <a:bodyPr/>
+          <a:lstStyle/>
+          <a:p>
+            <a:fld id="{18BDFEC3-8487-43E8-A154-7C12CBC1FFF2}" type="slidenum">
+              <a:rPr lang="en-US"/>
+              <a:t>6</a:t>
+            </a:fld>
+            <a:endParaRPr lang="en-US"/>
+          </a:p>
+        </p:txBody>
+      </p:sp>
+    </p:spTree>
+  </p:cSld>
+</p:notes>
+</file>
+
+<file path=ppt/notesSlides/notesSlide6.xml><?xml version="1.0" encoding="utf-8"?>
+<p:notes xmlns:a="http://schemas.openxmlformats.org/drawingml/2006/main" xmlns:r="http://schemas.openxmlformats.org/officeDocument/2006/relationships" xmlns:p="http://schemas.openxmlformats.org/presentationml/2006/main">
+  <p:cSld>
+    <p:spTree>
+      <p:nvGrpSpPr>
+        <p:cNvPr id="1" name=""/>
+        <p:cNvGrpSpPr/>
+        <p:nvPr/>
+      </p:nvGrpSpPr>
+      <p:grpSpPr>
+        <a:xfrm>
+          <a:off x="0" y="0"/>
+          <a:ext cx="0" cy="0"/>
+          <a:chOff x="0" y="0"/>
+          <a:chExt cx="0" cy="0"/>
+        </a:xfrm>
+      </p:grpSpPr>
+      <p:sp>
+        <p:nvSpPr>
+          <p:cNvPr id="2" name="Slide Image Placeholder 1"/>
+          <p:cNvSpPr>
+            <a:spLocks noGrp="1" noRot="1" noChangeAspect="1"/>
+          </p:cNvSpPr>
+          <p:nvPr>
+            <p:ph type="sldImg"/>
+          </p:nvPr>
+        </p:nvSpPr>
+        <p:spPr/>
+      </p:sp>
+      <p:sp>
+        <p:nvSpPr>
+          <p:cNvPr id="3" name="Notes Placeholder 2"/>
+          <p:cNvSpPr>
+            <a:spLocks noGrp="1"/>
+          </p:cNvSpPr>
+          <p:nvPr>
+            <p:ph type="body" idx="1"/>
+          </p:nvPr>
+        </p:nvSpPr>
+        <p:spPr/>
+        <p:txBody>
+          <a:bodyPr/>
+          <a:lstStyle/>
+          <a:p>
+            <a:pPr lvl="0" indent="0" marL="0">
+              <a:buNone/>
+            </a:pPr>
+            <a:r>
+              <a:rPr/>
+              <a:t>Target: 1:45. Practical slide structure advice. 7 slides for 15 minutes is about right — roughly 2 minutes per slide. “Cut ruthlessly” is the key message. Most students try to show everything they did. The presentation is not a summary of your work; it’s a persuasive argument for a recommendation. Practice out loud: this is not optional. Timing matters, and you can’t know your timing without actually speaking.</a:t>
+            </a:r>
+          </a:p>
+          <a:p>
+            <a:pPr lvl="0" indent="0" marL="0">
+              <a:buNone/>
+            </a:pPr>
+          </a:p>
+          <a:p>
+            <a:pPr lvl="0" indent="0" marL="0">
+              <a:buNone/>
+            </a:pPr>
+            <a:r>
+              <a:rPr/>
+              <a:t>Target: 1:47. Give students 60 seconds of actual silence to think. This is a design exercise: what is the load-bearing finding? If they can’t answer in 60 seconds, their narrative isn’t clear yet — and that’s a signal to work on. After the pause, cold call 2–3 students to share their one key finding. This doubles as a preview of what presentations will cover next week.</a:t>
+            </a:r>
+          </a:p>
+        </p:txBody>
+      </p:sp>
+      <p:sp>
+        <p:nvSpPr>
+          <p:cNvPr id="4" name="Slide Number Placeholder 3"/>
+          <p:cNvSpPr>
+            <a:spLocks noGrp="1"/>
+          </p:cNvSpPr>
+          <p:nvPr>
+            <p:ph type="sldNum" sz="quarter" idx="10"/>
+          </p:nvPr>
+        </p:nvSpPr>
+        <p:spPr/>
+        <p:txBody>
+          <a:bodyPr/>
+          <a:lstStyle/>
+          <a:p>
+            <a:fld id="{18BDFEC3-8487-43E8-A154-7C12CBC1FFF2}" type="slidenum">
+              <a:rPr lang="en-US"/>
+              <a:t>7</a:t>
+            </a:fld>
+            <a:endParaRPr lang="en-US"/>
+          </a:p>
+        </p:txBody>
+      </p:sp>
+    </p:spTree>
+  </p:cSld>
+</p:notes>
+</file>
+
+<file path=ppt/notesSlides/notesSlide7.xml><?xml version="1.0" encoding="utf-8"?>
+<p:notes xmlns:a="http://schemas.openxmlformats.org/drawingml/2006/main" xmlns:r="http://schemas.openxmlformats.org/officeDocument/2006/relationships" xmlns:p="http://schemas.openxmlformats.org/presentationml/2006/main">
+  <p:cSld>
+    <p:spTree>
+      <p:nvGrpSpPr>
+        <p:cNvPr id="1" name=""/>
+        <p:cNvGrpSpPr/>
+        <p:nvPr/>
+      </p:nvGrpSpPr>
+      <p:grpSpPr>
+        <a:xfrm>
+          <a:off x="0" y="0"/>
+          <a:ext cx="0" cy="0"/>
+          <a:chOff x="0" y="0"/>
+          <a:chExt cx="0" cy="0"/>
+        </a:xfrm>
+      </p:grpSpPr>
+      <p:sp>
+        <p:nvSpPr>
+          <p:cNvPr id="2" name="Slide Image Placeholder 1"/>
+          <p:cNvSpPr>
+            <a:spLocks noGrp="1" noRot="1" noChangeAspect="1"/>
+          </p:cNvSpPr>
+          <p:nvPr>
+            <p:ph type="sldImg"/>
+          </p:nvPr>
+        </p:nvSpPr>
+        <p:spPr/>
+      </p:sp>
+      <p:sp>
+        <p:nvSpPr>
+          <p:cNvPr id="3" name="Notes Placeholder 2"/>
+          <p:cNvSpPr>
+            <a:spLocks noGrp="1"/>
+          </p:cNvSpPr>
+          <p:nvPr>
+            <p:ph type="body" idx="1"/>
+          </p:nvPr>
+        </p:nvSpPr>
+        <p:spPr/>
+        <p:txBody>
+          <a:bodyPr/>
+          <a:lstStyle/>
+          <a:p>
+            <a:pPr lvl="0" indent="0" marL="0">
+              <a:buNone/>
+            </a:pPr>
+            <a:r>
+              <a:rPr/>
+              <a:t>Target: 1:48. Closing section — brief.</a:t>
+            </a:r>
+          </a:p>
+          <a:p>
+            <a:pPr lvl="0" indent="0" marL="0">
+              <a:buNone/>
+            </a:pPr>
+          </a:p>
+          <a:p>
+            <a:pPr lvl="0" indent="0" marL="0">
+              <a:buNone/>
+            </a:pPr>
+            <a:r>
+              <a:rPr/>
+              <a:t>Target: 1:50. Close with genuine warmth — this is the last lecture. The final line (“everything from here is yours to use”) is the send-off. The toolkit they’ve built — Monte Carlo, robustness, scenario discovery, multi-objective trade-offs — is genuinely useful in the world. That’s worth saying out loud. Optional: brief acknowledgment that you’ve enjoyed the semester, invite questions in office hours, etc.</a:t>
+            </a:r>
+          </a:p>
+        </p:txBody>
+      </p:sp>
+      <p:sp>
+        <p:nvSpPr>
+          <p:cNvPr id="4" name="Slide Number Placeholder 3"/>
+          <p:cNvSpPr>
+            <a:spLocks noGrp="1"/>
+          </p:cNvSpPr>
+          <p:nvPr>
+            <p:ph type="sldNum" sz="quarter" idx="10"/>
+          </p:nvPr>
+        </p:nvSpPr>
+        <p:spPr/>
+        <p:txBody>
+          <a:bodyPr/>
+          <a:lstStyle/>
+          <a:p>
+            <a:fld id="{18BDFEC3-8487-43E8-A154-7C12CBC1FFF2}" type="slidenum">
+              <a:rPr lang="en-US"/>
+              <a:t>8</a:t>
+            </a:fld>
+            <a:endParaRPr lang="en-US"/>
+          </a:p>
+        </p:txBody>
+      </p:sp>
+    </p:spTree>
+  </p:cSld>
+</p:notes>
 </file>
 
 <file path=ppt/slideLayouts/slideLayout1.xml><?xml version="1.0" encoding="utf-8"?>
@@ -3154,7 +4308,7 @@
             <a:br/>
             <a:r>
               <a:rPr/>
-              <a:t>Dr. James Doss-Gollin</a:t>
+              <a:t>James Doss-Gollin</a:t>
             </a:r>
           </a:p>
         </p:txBody>
@@ -3233,6 +4387,111 @@
               <a:t> This content is under development and subject to change.</a:t>
             </a:r>
           </a:p>
+          <a:p>
+            <a:pPr lvl="0" indent="0" marL="0">
+              <a:spcBef>
+                <a:spcPts val="3000"/>
+              </a:spcBef>
+              <a:buNone/>
+            </a:pPr>
+            <a:r>
+              <a:rPr b="1"/>
+              <a:t>The Problem with Perfect Plans</a:t>
+            </a:r>
+          </a:p>
+          <a:p>
+            <a:pPr lvl="0" indent="0" marL="0">
+              <a:buNone/>
+            </a:pPr>
+            <a:r>
+              <a:rPr/>
+              <a:t>In 1953, catastrophic flooding killed over 1,800 people in the Netherlands.</a:t>
+            </a:r>
+          </a:p>
+          <a:p>
+            <a:pPr lvl="0" indent="0" marL="0">
+              <a:buNone/>
+            </a:pPr>
+            <a:r>
+              <a:rPr/>
+              <a:t>The Dutch response: the Delta Works — a massive system of dams, sluices, and storm surge barriers.</a:t>
+            </a:r>
+          </a:p>
+          <a:p>
+            <a:pPr lvl="0" indent="0" marL="0">
+              <a:buNone/>
+            </a:pPr>
+            <a:r>
+              <a:rPr/>
+              <a:t>Designed to last 200 years.</a:t>
+            </a:r>
+          </a:p>
+          <a:p>
+            <a:pPr lvl="0" indent="0" marL="0">
+              <a:spcBef>
+                <a:spcPts val="3000"/>
+              </a:spcBef>
+              <a:buNone/>
+            </a:pPr>
+            <a:r>
+              <a:rPr b="1"/>
+              <a:t>You’ve Spent 13 Weeks Building a Toolkit</a:t>
+            </a:r>
+          </a:p>
+          <a:p>
+            <a:pPr lvl="0" indent="0" marL="0">
+              <a:buNone/>
+            </a:pPr>
+            <a:r>
+              <a:rPr/>
+              <a:t>. . .</a:t>
+            </a:r>
+          </a:p>
+          <a:p>
+            <a:pPr lvl="0" indent="0" marL="0">
+              <a:buNone/>
+            </a:pPr>
+            <a:r>
+              <a:rPr/>
+              <a:t>Today we look at how someone actually used it.</a:t>
+            </a:r>
+          </a:p>
+          <a:p>
+            <a:pPr lvl="0" indent="0" marL="0">
+              <a:buNone/>
+            </a:pPr>
+            <a:r>
+              <a:rPr/>
+              <a:t>. . .</a:t>
+            </a:r>
+          </a:p>
+          <a:p>
+            <a:pPr lvl="0" indent="0" marL="0">
+              <a:buNone/>
+            </a:pPr>
+            <a:r>
+              <a:rPr/>
+              <a:t>A real case study of climate adaptation planning in the Netherlands — one that’s become a model for coastal cities around the world.</a:t>
+            </a:r>
+          </a:p>
+          <a:p>
+            <a:pPr lvl="0" indent="0" marL="0">
+              <a:buNone/>
+            </a:pPr>
+            <a:r>
+              <a:rPr/>
+              <a:t>. . .</a:t>
+            </a:r>
+          </a:p>
+          <a:p>
+            <a:pPr lvl="0" indent="0" marL="0">
+              <a:buNone/>
+            </a:pPr>
+            <a:r>
+              <a:rPr/>
+              <a:t>Then we turn the lens on your own projects.</a:t>
+            </a:r>
+          </a:p>
         </p:txBody>
       </p:sp>
     </p:spTree>
@@ -3267,7 +4526,12 @@
             <p:ph type="title"/>
           </p:nvPr>
         </p:nvSpPr>
-        <p:spPr/>
+        <p:spPr>
+          <a:xfrm>
+            <a:off x="457201" y="204787"/>
+            <a:ext cx="3008313" cy="871538"/>
+          </a:xfrm>
+        </p:spPr>
         <p:txBody>
           <a:bodyPr/>
           <a:lstStyle/>
@@ -3277,19 +4541,19 @@
             </a:pPr>
             <a:r>
               <a:rPr/>
-              <a:t>Coming Soon</a:t>
-            </a:r>
-          </a:p>
-        </p:txBody>
-      </p:sp>
-      <p:sp>
-        <p:nvSpPr>
-          <p:cNvPr id="3" name="Content Placeholder 2"/>
-          <p:cNvSpPr>
-            <a:spLocks noGrp="1"/>
-          </p:cNvSpPr>
-          <p:nvPr>
-            <p:ph idx="1"/>
+              <a:t>The Adaptive Pathways Approach</a:t>
+            </a:r>
+          </a:p>
+        </p:txBody>
+      </p:sp>
+      <p:sp>
+        <p:nvSpPr>
+          <p:cNvPr id="4" name="Text Placeholder 3"/>
+          <p:cNvSpPr>
+            <a:spLocks noGrp="1"/>
+          </p:cNvSpPr>
+          <p:nvPr>
+            <p:ph idx="2" sz="half" type="body"/>
           </p:nvPr>
         </p:nvSpPr>
         <p:spPr/>
@@ -3298,54 +4562,809 @@
           <a:lstStyle/>
           <a:p>
             <a:pPr lvl="0" indent="0" marL="0">
-              <a:buNone/>
-            </a:pPr>
-            <a:r>
-              <a:rPr/>
-              <a:t>This lecture is under development.</a:t>
-            </a:r>
-          </a:p>
-          <a:p>
-            <a:pPr lvl="0" indent="0" marL="0">
-              <a:buNone/>
-            </a:pPr>
-            <a:r>
-              <a:rPr/>
-              <a:t>Possible content:</a:t>
+              <a:spcBef>
+                <a:spcPts val="3000"/>
+              </a:spcBef>
+              <a:buNone/>
+            </a:pPr>
+            <a:r>
+              <a:rPr b="1"/>
+              <a:t>The Core Challenge</a:t>
+            </a:r>
+          </a:p>
+          <a:p>
+            <a:pPr lvl="0" indent="0" marL="0">
+              <a:buNone/>
+            </a:pPr>
+            <a:r>
+              <a:rPr/>
+              <a:t>The Netherlands faces deep uncertainty about:</a:t>
             </a:r>
           </a:p>
           <a:p>
             <a:pPr lvl="0"/>
             <a:r>
               <a:rPr/>
-              <a:t>Real-world climate adaptation case studies</a:t>
+              <a:t>How much sea level will rise (and when)</a:t>
             </a:r>
           </a:p>
           <a:p>
             <a:pPr lvl="0"/>
             <a:r>
               <a:rPr/>
-              <a:t>Integration of risk analysis, decision analysis, and optimization</a:t>
+              <a:t>How socioeconomic conditions will change</a:t>
             </a:r>
           </a:p>
           <a:p>
             <a:pPr lvl="0"/>
             <a:r>
               <a:rPr/>
-              <a:t>Lessons learned from practice</a:t>
+              <a:t>Whether existing infrastructure will be adequate in 50 or 100 years</a:t>
+            </a:r>
+          </a:p>
+          <a:p>
+            <a:pPr lvl="0" indent="0" marL="0">
+              <a:buNone/>
+            </a:pPr>
+            <a:r>
+              <a:rPr/>
+              <a:t>. . .</a:t>
+            </a:r>
+          </a:p>
+          <a:p>
+            <a:pPr lvl="0" indent="0" marL="0">
+              <a:buNone/>
+            </a:pPr>
+            <a:r>
+              <a:rPr/>
+              <a:t>Large infrastructure investments have </a:t>
+            </a:r>
+            <a:r>
+              <a:rPr b="1"/>
+              <a:t>very long lifetimes</a:t>
+            </a:r>
+            <a:r>
+              <a:rPr/>
+              <a:t> and </a:t>
+            </a:r>
+            <a:r>
+              <a:rPr b="1"/>
+              <a:t>high lock-in</a:t>
+            </a:r>
+            <a:r>
+              <a:rPr/>
+              <a:t>.</a:t>
+            </a:r>
+          </a:p>
+          <a:p>
+            <a:pPr lvl="0" indent="0" marL="0">
+              <a:spcBef>
+                <a:spcPts val="3000"/>
+              </a:spcBef>
+              <a:buNone/>
+            </a:pPr>
+            <a:r>
+              <a:rPr b="1"/>
+              <a:t>The Key Insight</a:t>
+            </a:r>
+          </a:p>
+          <a:p>
+            <a:pPr lvl="0" indent="0" marL="0">
+              <a:buNone/>
+            </a:pPr>
+            <a:r>
+              <a:rPr/>
+              <a:t>There is no single “optimal” plan under deep uncertainty.</a:t>
+            </a:r>
+          </a:p>
+          <a:p>
+            <a:pPr lvl="0" indent="0" marL="0">
+              <a:buNone/>
+            </a:pPr>
+            <a:r>
+              <a:rPr/>
+              <a:t>. . .</a:t>
+            </a:r>
+          </a:p>
+          <a:p>
+            <a:pPr lvl="0" indent="0" marL="0">
+              <a:buNone/>
+            </a:pPr>
+            <a:r>
+              <a:rPr/>
+              <a:t>Instead: design </a:t>
+            </a:r>
+            <a:r>
+              <a:rPr b="1"/>
+              <a:t>pathways</a:t>
+            </a:r>
+            <a:r>
+              <a:rPr/>
+              <a:t> — sequences of actions that can be adjusted as we learn.</a:t>
+            </a:r>
+          </a:p>
+          <a:p>
+            <a:pPr lvl="0" indent="0" marL="0">
+              <a:buNone/>
+            </a:pPr>
+            <a:r>
+              <a:rPr/>
+              <a:t>. . .</a:t>
+            </a:r>
+          </a:p>
+          <a:p>
+            <a:pPr lvl="0" indent="0" marL="0">
+              <a:buNone/>
+            </a:pPr>
+            <a:r>
+              <a:rPr/>
+              <a:t>A pathway is a sequence of decisions where transitions are triggered by </a:t>
+            </a:r>
+            <a:r>
+              <a:rPr b="1"/>
+              <a:t>observable conditions</a:t>
+            </a:r>
+            <a:r>
+              <a:rPr/>
+              <a:t>.</a:t>
+            </a:r>
+          </a:p>
+          <a:p>
+            <a:pPr lvl="0" indent="0" marL="0">
+              <a:spcBef>
+                <a:spcPts val="3000"/>
+              </a:spcBef>
+              <a:buNone/>
+            </a:pPr>
+            <a:r>
+              <a:rPr b="1"/>
+              <a:t>A Pathway Map</a:t>
+            </a:r>
+          </a:p>
+          <a:p>
+            <a:pPr lvl="0" indent="0" marL="1270000">
+              <a:buNone/>
+            </a:pPr>
+            <a:r>
+              <a:rPr sz="2000" b="1"/>
+              <a:t>Note</a:t>
+            </a:r>
+          </a:p>
+          <a:p>
+            <a:pPr lvl="0" indent="0" marL="1270000">
+              <a:buNone/>
+            </a:pPr>
+            <a:r>
+              <a:rPr sz="2000" b="1"/>
+              <a:t>Pathway Map</a:t>
+            </a:r>
+            <a:r>
+              <a:rPr sz="2000"/>
+              <a:t> — a diagram showing possible sequences of actions across time, with transitions triggered by observed conditions.</a:t>
             </a:r>
           </a:p>
           <a:p>
             <a:pPr lvl="0"/>
             <a:r>
               <a:rPr/>
-              <a:t>Preparation for final project presentations</a:t>
-            </a:r>
-          </a:p>
-        </p:txBody>
-      </p:sp>
+              <a:t>Each path represents a sequence of policy decisions</a:t>
+            </a:r>
+          </a:p>
+          <a:p>
+            <a:pPr lvl="0"/>
+            <a:r>
+              <a:rPr b="1"/>
+              <a:t>Trigger conditions</a:t>
+            </a:r>
+            <a:r>
+              <a:rPr/>
+              <a:t> mark when to switch from one action to another</a:t>
+            </a:r>
+          </a:p>
+          <a:p>
+            <a:pPr lvl="0"/>
+            <a:r>
+              <a:rPr/>
+              <a:t>Multiple paths accommodate multiple possible futures</a:t>
+            </a:r>
+          </a:p>
+          <a:p>
+            <a:pPr lvl="0"/>
+            <a:r>
+              <a:rPr/>
+              <a:t>No single path is “the plan” — the map </a:t>
+            </a:r>
+            <a:r>
+              <a:rPr i="1"/>
+              <a:t>is</a:t>
+            </a:r>
+            <a:r>
+              <a:rPr/>
+              <a:t> the plan</a:t>
+            </a:r>
+          </a:p>
+          <a:p>
+            <a:pPr lvl="0" indent="0" marL="0">
+              <a:spcBef>
+                <a:spcPts val="3000"/>
+              </a:spcBef>
+              <a:buNone/>
+            </a:pPr>
+            <a:r>
+              <a:rPr b="1"/>
+              <a:t>What Makes Pathways Different</a:t>
+            </a:r>
+          </a:p>
+        </p:txBody>
+      </p:sp>
+      <p:graphicFrame>
+        <p:nvGraphicFramePr>
+          <p:cNvPr id="6" name="Content Placeholder 5"/>
+          <p:cNvGraphicFramePr>
+            <a:graphicFrameLocks noGrp="1"/>
+          </p:cNvGraphicFramePr>
+          <p:nvPr>
+            <p:ph idx="1"/>
+          </p:nvPr>
+        </p:nvGraphicFramePr>
+        <p:xfrm>
+          <a:off x="3568700" y="203200"/>
+          <a:ext cx="5105400" cy="4381500"/>
+        </p:xfrm>
+        <a:graphic>
+          <a:graphicData uri="http://schemas.openxmlformats.org/drawingml/2006/table">
+            <a:tbl>
+              <a:tblPr firstRow="1" bandRow="1">
+                <a:tableStyleId>{5C22544A-7EE6-4342-B048-85BDC9FD1C3A}</a:tableStyleId>
+              </a:tblPr>
+              <a:tblGrid>
+                <a:gridCol w="2552700"/>
+                <a:gridCol w="2552700"/>
+              </a:tblGrid>
+              <a:tr h="0">
+                <a:tc>
+                  <a:txBody>
+                    <a:bodyPr/>
+                    <a:lstStyle/>
+                    <a:p>
+                      <a:pPr lvl="0" indent="0" marL="0">
+                        <a:buNone/>
+                      </a:pPr>
+                      <a:r>
+                        <a:rPr/>
+                        <a:t>Traditional Approach</a:t>
+                      </a:r>
+                    </a:p>
+                  </a:txBody>
+                  <a:tcPr/>
+                </a:tc>
+                <a:tc>
+                  <a:txBody>
+                    <a:bodyPr/>
+                    <a:lstStyle/>
+                    <a:p>
+                      <a:pPr lvl="0" indent="0" marL="0">
+                        <a:buNone/>
+                      </a:pPr>
+                      <a:r>
+                        <a:rPr/>
+                        <a:t>Adaptive Pathways</a:t>
+                      </a:r>
+                    </a:p>
+                  </a:txBody>
+                  <a:tcPr/>
+                </a:tc>
+              </a:tr>
+              <a:tr h="0">
+                <a:tc>
+                  <a:txBody>
+                    <a:bodyPr/>
+                    <a:lstStyle/>
+                    <a:p>
+                      <a:pPr lvl="0" indent="0" marL="0">
+                        <a:buNone/>
+                      </a:pPr>
+                      <a:r>
+                        <a:rPr/>
+                        <a:t>Optimize for one scenario</a:t>
+                      </a:r>
+                    </a:p>
+                  </a:txBody>
+                </a:tc>
+                <a:tc>
+                  <a:txBody>
+                    <a:bodyPr/>
+                    <a:lstStyle/>
+                    <a:p>
+                      <a:pPr lvl="0" indent="0" marL="0">
+                        <a:buNone/>
+                      </a:pPr>
+                      <a:r>
+                        <a:rPr/>
+                        <a:t>Perform under many scenarios</a:t>
+                      </a:r>
+                    </a:p>
+                  </a:txBody>
+                </a:tc>
+              </a:tr>
+              <a:tr h="0">
+                <a:tc>
+                  <a:txBody>
+                    <a:bodyPr/>
+                    <a:lstStyle/>
+                    <a:p>
+                      <a:pPr lvl="0" indent="0" marL="0">
+                        <a:buNone/>
+                      </a:pPr>
+                      <a:r>
+                        <a:rPr/>
+                        <a:t>Static plan</a:t>
+                      </a:r>
+                    </a:p>
+                  </a:txBody>
+                </a:tc>
+                <a:tc>
+                  <a:txBody>
+                    <a:bodyPr/>
+                    <a:lstStyle/>
+                    <a:p>
+                      <a:pPr lvl="0" indent="0" marL="0">
+                        <a:buNone/>
+                      </a:pPr>
+                      <a:r>
+                        <a:rPr/>
+                        <a:t>Triggers for adaptation</a:t>
+                      </a:r>
+                    </a:p>
+                  </a:txBody>
+                </a:tc>
+              </a:tr>
+              <a:tr h="0">
+                <a:tc>
+                  <a:txBody>
+                    <a:bodyPr/>
+                    <a:lstStyle/>
+                    <a:p>
+                      <a:pPr lvl="0" indent="0" marL="0">
+                        <a:buNone/>
+                      </a:pPr>
+                      <a:r>
+                        <a:rPr/>
+                        <a:t>Single recommendation</a:t>
+                      </a:r>
+                    </a:p>
+                  </a:txBody>
+                </a:tc>
+                <a:tc>
+                  <a:txBody>
+                    <a:bodyPr/>
+                    <a:lstStyle/>
+                    <a:p>
+                      <a:pPr lvl="0" indent="0" marL="0">
+                        <a:buNone/>
+                      </a:pPr>
+                      <a:r>
+                        <a:rPr/>
+                        <a:t>Menu of options</a:t>
+                      </a:r>
+                    </a:p>
+                  </a:txBody>
+                </a:tc>
+              </a:tr>
+              <a:tr h="0">
+                <a:tc>
+                  <a:txBody>
+                    <a:bodyPr/>
+                    <a:lstStyle/>
+                    <a:p>
+                      <a:pPr lvl="0" indent="0" marL="0">
+                        <a:buNone/>
+                      </a:pPr>
+                      <a:r>
+                        <a:rPr/>
+                        <a:t>Uncertainty as risk</a:t>
+                      </a:r>
+                    </a:p>
+                  </a:txBody>
+                </a:tc>
+                <a:tc>
+                  <a:txBody>
+                    <a:bodyPr/>
+                    <a:lstStyle/>
+                    <a:p>
+                      <a:pPr lvl="0" indent="0" marL="0">
+                        <a:buNone/>
+                      </a:pPr>
+                      <a:r>
+                        <a:rPr/>
+                        <a:t>Uncertainty as driver of design</a:t>
+                      </a:r>
+                    </a:p>
+                  </a:txBody>
+                </a:tc>
+              </a:tr>
+            </a:tbl>
+          </a:graphicData>
+        </a:graphic>
+      </p:graphicFrame>
     </p:spTree>
   </p:cSld>
+  <p:timing>
+    <p:tnLst>
+      <p:par>
+        <p:cTn id="1" dur="indefinite" restart="never" nodeType="tmRoot">
+          <p:childTnLst>
+            <p:seq concurrent="1" nextAc="seek">
+              <p:cTn id="2" dur="indefinite" nodeType="mainSeq">
+                <p:childTnLst>
+                  <p:par>
+                    <p:cTn id="3" fill="hold">
+                      <p:stCondLst>
+                        <p:cond delay="indefinite"/>
+                      </p:stCondLst>
+                      <p:childTnLst>
+                        <p:par>
+                          <p:cTn id="4" fill="hold">
+                            <p:stCondLst>
+                              <p:cond delay="0"/>
+                            </p:stCondLst>
+                            <p:childTnLst>
+                              <p:par>
+                                <p:cTn id="5" presetID="1" presetClass="entr" presetSubtype="0" fill="hold" grpId="0" nodeType="clickEffect">
+                                  <p:stCondLst>
+                                    <p:cond delay="0"/>
+                                  </p:stCondLst>
+                                  <p:childTnLst>
+                                    <p:set>
+                                      <p:cBhvr>
+                                        <p:cTn id="6" dur="1" fill="hold">
+                                          <p:stCondLst>
+                                            <p:cond delay="0"/>
+                                          </p:stCondLst>
+                                        </p:cTn>
+                                        <p:tgtEl>
+                                          <p:spTgt spid="4">
+                                            <p:txEl>
+                                              <p:pRg st="2" end="2"/>
+                                            </p:txEl>
+                                          </p:spTgt>
+                                        </p:tgtEl>
+                                        <p:attrNameLst>
+                                          <p:attrName>style.visibility</p:attrName>
+                                        </p:attrNameLst>
+                                      </p:cBhvr>
+                                      <p:to>
+                                        <p:strVal val="visible"/>
+                                      </p:to>
+                                    </p:set>
+                                  </p:childTnLst>
+                                </p:cTn>
+                              </p:par>
+                            </p:childTnLst>
+                          </p:cTn>
+                        </p:par>
+                      </p:childTnLst>
+                    </p:cTn>
+                  </p:par>
+                  <p:par>
+                    <p:cTn id="7" fill="hold">
+                      <p:stCondLst>
+                        <p:cond delay="indefinite"/>
+                      </p:stCondLst>
+                      <p:childTnLst>
+                        <p:par>
+                          <p:cTn id="8" fill="hold">
+                            <p:stCondLst>
+                              <p:cond delay="0"/>
+                            </p:stCondLst>
+                            <p:childTnLst>
+                              <p:par>
+                                <p:cTn id="9" presetID="1" presetClass="entr" presetSubtype="0" fill="hold" grpId="0" nodeType="clickEffect">
+                                  <p:stCondLst>
+                                    <p:cond delay="0"/>
+                                  </p:stCondLst>
+                                  <p:childTnLst>
+                                    <p:set>
+                                      <p:cBhvr>
+                                        <p:cTn id="10" dur="1" fill="hold">
+                                          <p:stCondLst>
+                                            <p:cond delay="0"/>
+                                          </p:stCondLst>
+                                        </p:cTn>
+                                        <p:tgtEl>
+                                          <p:spTgt spid="4">
+                                            <p:txEl>
+                                              <p:pRg st="3" end="3"/>
+                                            </p:txEl>
+                                          </p:spTgt>
+                                        </p:tgtEl>
+                                        <p:attrNameLst>
+                                          <p:attrName>style.visibility</p:attrName>
+                                        </p:attrNameLst>
+                                      </p:cBhvr>
+                                      <p:to>
+                                        <p:strVal val="visible"/>
+                                      </p:to>
+                                    </p:set>
+                                  </p:childTnLst>
+                                </p:cTn>
+                              </p:par>
+                            </p:childTnLst>
+                          </p:cTn>
+                        </p:par>
+                      </p:childTnLst>
+                    </p:cTn>
+                  </p:par>
+                  <p:par>
+                    <p:cTn id="11" fill="hold">
+                      <p:stCondLst>
+                        <p:cond delay="indefinite"/>
+                      </p:stCondLst>
+                      <p:childTnLst>
+                        <p:par>
+                          <p:cTn id="12" fill="hold">
+                            <p:stCondLst>
+                              <p:cond delay="0"/>
+                            </p:stCondLst>
+                            <p:childTnLst>
+                              <p:par>
+                                <p:cTn id="13" presetID="1" presetClass="entr" presetSubtype="0" fill="hold" grpId="0" nodeType="clickEffect">
+                                  <p:stCondLst>
+                                    <p:cond delay="0"/>
+                                  </p:stCondLst>
+                                  <p:childTnLst>
+                                    <p:set>
+                                      <p:cBhvr>
+                                        <p:cTn id="14" dur="1" fill="hold">
+                                          <p:stCondLst>
+                                            <p:cond delay="0"/>
+                                          </p:stCondLst>
+                                        </p:cTn>
+                                        <p:tgtEl>
+                                          <p:spTgt spid="4">
+                                            <p:txEl>
+                                              <p:pRg st="4" end="4"/>
+                                            </p:txEl>
+                                          </p:spTgt>
+                                        </p:tgtEl>
+                                        <p:attrNameLst>
+                                          <p:attrName>style.visibility</p:attrName>
+                                        </p:attrNameLst>
+                                      </p:cBhvr>
+                                      <p:to>
+                                        <p:strVal val="visible"/>
+                                      </p:to>
+                                    </p:set>
+                                  </p:childTnLst>
+                                </p:cTn>
+                              </p:par>
+                            </p:childTnLst>
+                          </p:cTn>
+                        </p:par>
+                      </p:childTnLst>
+                    </p:cTn>
+                  </p:par>
+                  <p:par>
+                    <p:cTn id="15" fill="hold">
+                      <p:stCondLst>
+                        <p:cond delay="indefinite"/>
+                      </p:stCondLst>
+                      <p:childTnLst>
+                        <p:par>
+                          <p:cTn id="16" fill="hold">
+                            <p:stCondLst>
+                              <p:cond delay="0"/>
+                            </p:stCondLst>
+                            <p:childTnLst>
+                              <p:par>
+                                <p:cTn id="17" presetID="1" presetClass="entr" presetSubtype="0" fill="hold" grpId="0" nodeType="clickEffect">
+                                  <p:stCondLst>
+                                    <p:cond delay="0"/>
+                                  </p:stCondLst>
+                                  <p:childTnLst>
+                                    <p:set>
+                                      <p:cBhvr>
+                                        <p:cTn id="18" dur="1" fill="hold">
+                                          <p:stCondLst>
+                                            <p:cond delay="0"/>
+                                          </p:stCondLst>
+                                        </p:cTn>
+                                        <p:tgtEl>
+                                          <p:spTgt spid="4">
+                                            <p:txEl>
+                                              <p:pRg st="16" end="16"/>
+                                            </p:txEl>
+                                          </p:spTgt>
+                                        </p:tgtEl>
+                                        <p:attrNameLst>
+                                          <p:attrName>style.visibility</p:attrName>
+                                        </p:attrNameLst>
+                                      </p:cBhvr>
+                                      <p:to>
+                                        <p:strVal val="visible"/>
+                                      </p:to>
+                                    </p:set>
+                                  </p:childTnLst>
+                                </p:cTn>
+                              </p:par>
+                            </p:childTnLst>
+                          </p:cTn>
+                        </p:par>
+                      </p:childTnLst>
+                    </p:cTn>
+                  </p:par>
+                  <p:par>
+                    <p:cTn id="19" fill="hold">
+                      <p:stCondLst>
+                        <p:cond delay="indefinite"/>
+                      </p:stCondLst>
+                      <p:childTnLst>
+                        <p:par>
+                          <p:cTn id="20" fill="hold">
+                            <p:stCondLst>
+                              <p:cond delay="0"/>
+                            </p:stCondLst>
+                            <p:childTnLst>
+                              <p:par>
+                                <p:cTn id="21" presetID="1" presetClass="entr" presetSubtype="0" fill="hold" grpId="0" nodeType="clickEffect">
+                                  <p:stCondLst>
+                                    <p:cond delay="0"/>
+                                  </p:stCondLst>
+                                  <p:childTnLst>
+                                    <p:set>
+                                      <p:cBhvr>
+                                        <p:cTn id="22" dur="1" fill="hold">
+                                          <p:stCondLst>
+                                            <p:cond delay="0"/>
+                                          </p:stCondLst>
+                                        </p:cTn>
+                                        <p:tgtEl>
+                                          <p:spTgt spid="4">
+                                            <p:txEl>
+                                              <p:pRg st="17" end="17"/>
+                                            </p:txEl>
+                                          </p:spTgt>
+                                        </p:tgtEl>
+                                        <p:attrNameLst>
+                                          <p:attrName>style.visibility</p:attrName>
+                                        </p:attrNameLst>
+                                      </p:cBhvr>
+                                      <p:to>
+                                        <p:strVal val="visible"/>
+                                      </p:to>
+                                    </p:set>
+                                  </p:childTnLst>
+                                </p:cTn>
+                              </p:par>
+                            </p:childTnLst>
+                          </p:cTn>
+                        </p:par>
+                      </p:childTnLst>
+                    </p:cTn>
+                  </p:par>
+                  <p:par>
+                    <p:cTn id="23" fill="hold">
+                      <p:stCondLst>
+                        <p:cond delay="indefinite"/>
+                      </p:stCondLst>
+                      <p:childTnLst>
+                        <p:par>
+                          <p:cTn id="24" fill="hold">
+                            <p:stCondLst>
+                              <p:cond delay="0"/>
+                            </p:stCondLst>
+                            <p:childTnLst>
+                              <p:par>
+                                <p:cTn id="25" presetID="1" presetClass="entr" presetSubtype="0" fill="hold" grpId="0" nodeType="clickEffect">
+                                  <p:stCondLst>
+                                    <p:cond delay="0"/>
+                                  </p:stCondLst>
+                                  <p:childTnLst>
+                                    <p:set>
+                                      <p:cBhvr>
+                                        <p:cTn id="26" dur="1" fill="hold">
+                                          <p:stCondLst>
+                                            <p:cond delay="0"/>
+                                          </p:stCondLst>
+                                        </p:cTn>
+                                        <p:tgtEl>
+                                          <p:spTgt spid="4">
+                                            <p:txEl>
+                                              <p:pRg st="18" end="18"/>
+                                            </p:txEl>
+                                          </p:spTgt>
+                                        </p:tgtEl>
+                                        <p:attrNameLst>
+                                          <p:attrName>style.visibility</p:attrName>
+                                        </p:attrNameLst>
+                                      </p:cBhvr>
+                                      <p:to>
+                                        <p:strVal val="visible"/>
+                                      </p:to>
+                                    </p:set>
+                                  </p:childTnLst>
+                                </p:cTn>
+                              </p:par>
+                            </p:childTnLst>
+                          </p:cTn>
+                        </p:par>
+                      </p:childTnLst>
+                    </p:cTn>
+                  </p:par>
+                  <p:par>
+                    <p:cTn id="27" fill="hold">
+                      <p:stCondLst>
+                        <p:cond delay="indefinite"/>
+                      </p:stCondLst>
+                      <p:childTnLst>
+                        <p:par>
+                          <p:cTn id="28" fill="hold">
+                            <p:stCondLst>
+                              <p:cond delay="0"/>
+                            </p:stCondLst>
+                            <p:childTnLst>
+                              <p:par>
+                                <p:cTn id="29" presetID="1" presetClass="entr" presetSubtype="0" fill="hold" grpId="0" nodeType="clickEffect">
+                                  <p:stCondLst>
+                                    <p:cond delay="0"/>
+                                  </p:stCondLst>
+                                  <p:childTnLst>
+                                    <p:set>
+                                      <p:cBhvr>
+                                        <p:cTn id="30" dur="1" fill="hold">
+                                          <p:stCondLst>
+                                            <p:cond delay="0"/>
+                                          </p:stCondLst>
+                                        </p:cTn>
+                                        <p:tgtEl>
+                                          <p:spTgt spid="4">
+                                            <p:txEl>
+                                              <p:pRg st="19" end="19"/>
+                                            </p:txEl>
+                                          </p:spTgt>
+                                        </p:tgtEl>
+                                        <p:attrNameLst>
+                                          <p:attrName>style.visibility</p:attrName>
+                                        </p:attrNameLst>
+                                      </p:cBhvr>
+                                      <p:to>
+                                        <p:strVal val="visible"/>
+                                      </p:to>
+                                    </p:set>
+                                  </p:childTnLst>
+                                </p:cTn>
+                              </p:par>
+                            </p:childTnLst>
+                          </p:cTn>
+                        </p:par>
+                      </p:childTnLst>
+                    </p:cTn>
+                  </p:par>
+                </p:childTnLst>
+              </p:cTn>
+              <p:prevCondLst>
+                <p:cond evt="onPrev" delay="0">
+                  <p:tgtEl>
+                    <p:sldTgt/>
+                  </p:tgtEl>
+                </p:cond>
+              </p:prevCondLst>
+              <p:nextCondLst>
+                <p:cond evt="onNext" delay="0">
+                  <p:tgtEl>
+                    <p:sldTgt/>
+                  </p:tgtEl>
+                </p:cond>
+              </p:nextCondLst>
+            </p:seq>
+          </p:childTnLst>
+        </p:cTn>
+      </p:par>
+    </p:tnLst>
+    <p:bldLst>
+      <p:bldP spid="4" grpId="0" uiExpand="1" build="p"/>
+    </p:bldLst>
+  </p:timing>
 </p:sld>
 </file>
 
@@ -3386,13 +5405,2822 @@
             </a:pPr>
             <a:r>
               <a:rPr/>
-              <a:t>References</a:t>
+              <a:t>Methods in the Wild</a:t>
+            </a:r>
+          </a:p>
+        </p:txBody>
+      </p:sp>
+      <p:sp>
+        <p:nvSpPr>
+          <p:cNvPr id="3" name="Content Placeholder 2"/>
+          <p:cNvSpPr>
+            <a:spLocks noGrp="1"/>
+          </p:cNvSpPr>
+          <p:nvPr>
+            <p:ph idx="1"/>
+          </p:nvPr>
+        </p:nvSpPr>
+        <p:spPr/>
+        <p:txBody>
+          <a:bodyPr/>
+          <a:lstStyle/>
+          <a:p>
+            <a:pPr lvl="0" indent="0" marL="0">
+              <a:spcBef>
+                <a:spcPts val="3000"/>
+              </a:spcBef>
+              <a:buNone/>
+            </a:pPr>
+            <a:r>
+              <a:rPr b="1"/>
+              <a:t>Exploratory Modeling → Identify the Landscape</a:t>
+            </a:r>
+          </a:p>
+          <a:p>
+            <a:pPr lvl="0" indent="0" marL="0">
+              <a:buNone/>
+            </a:pPr>
+            <a:r>
+              <a:rPr/>
+              <a:t>Run the system model across a large ensemble of futures:</a:t>
+            </a:r>
+          </a:p>
+          <a:p>
+            <a:pPr lvl="0"/>
+            <a:r>
+              <a:rPr/>
+              <a:t>Vary: sea-level rise trajectories, precipitation, demand, socioeconomic growth</a:t>
+            </a:r>
+          </a:p>
+          <a:p>
+            <a:pPr lvl="0"/>
+            <a:r>
+              <a:rPr b="1"/>
+              <a:t>Not</a:t>
+            </a:r>
+            <a:r>
+              <a:rPr/>
+              <a:t>: calibrate to a single best estimate</a:t>
+            </a:r>
+          </a:p>
+          <a:p>
+            <a:pPr lvl="0"/>
+            <a:r>
+              <a:rPr/>
+              <a:t>Goal: map out </a:t>
+            </a:r>
+            <a:r>
+              <a:rPr i="1"/>
+              <a:t>where</a:t>
+            </a:r>
+            <a:r>
+              <a:rPr/>
+              <a:t> current strategies succeed and </a:t>
+            </a:r>
+            <a:r>
+              <a:rPr i="1"/>
+              <a:t>where</a:t>
+            </a:r>
+            <a:r>
+              <a:rPr/>
+              <a:t> they fail</a:t>
+            </a:r>
+          </a:p>
+          <a:p>
+            <a:pPr lvl="0" indent="0" marL="0">
+              <a:spcBef>
+                <a:spcPts val="3000"/>
+              </a:spcBef>
+              <a:buNone/>
+            </a:pPr>
+            <a:r>
+              <a:rPr b="1"/>
+              <a:t>Scenario Discovery → Find the Triggers</a:t>
+            </a:r>
+          </a:p>
+          <a:p>
+            <a:pPr lvl="0" indent="0" marL="0">
+              <a:buNone/>
+            </a:pPr>
+            <a:r>
+              <a:rPr/>
+              <a:t>Use PRIM or similar to find:</a:t>
+            </a:r>
+          </a:p>
+          <a:p>
+            <a:pPr lvl="0" indent="0" marL="1270000">
+              <a:buNone/>
+            </a:pPr>
+            <a:r>
+              <a:rPr sz="2000"/>
+              <a:t>“Under what combinations of future conditions does the current strategy become inadequate?”</a:t>
+            </a:r>
+          </a:p>
+          <a:p>
+            <a:pPr lvl="0" indent="0" marL="0">
+              <a:buNone/>
+            </a:pPr>
+            <a:r>
+              <a:rPr/>
+              <a:t>. . .</a:t>
+            </a:r>
+          </a:p>
+          <a:p>
+            <a:pPr lvl="0" indent="0" marL="0">
+              <a:buNone/>
+            </a:pPr>
+            <a:r>
+              <a:rPr/>
+              <a:t>Those failure conditions become the </a:t>
+            </a:r>
+            <a:r>
+              <a:rPr b="1"/>
+              <a:t>trigger thresholds</a:t>
+            </a:r>
+            <a:r>
+              <a:rPr/>
+              <a:t> in the pathway map.</a:t>
+            </a:r>
+          </a:p>
+          <a:p>
+            <a:pPr lvl="0" indent="0" marL="0">
+              <a:spcBef>
+                <a:spcPts val="3000"/>
+              </a:spcBef>
+              <a:buNone/>
+            </a:pPr>
+            <a:r>
+              <a:rPr b="1"/>
+              <a:t>Sequential Decisions → Design the Pathways</a:t>
+            </a:r>
+          </a:p>
+          <a:p>
+            <a:pPr lvl="0" indent="0" marL="0">
+              <a:buNone/>
+            </a:pPr>
+            <a:r>
+              <a:rPr/>
+              <a:t>Once you know the triggers, design the sequences:</a:t>
+            </a:r>
+          </a:p>
+          <a:p>
+            <a:pPr lvl="0"/>
+            <a:r>
+              <a:rPr/>
+              <a:t>What actions are available at each decision point?</a:t>
+            </a:r>
+          </a:p>
+          <a:p>
+            <a:pPr lvl="0"/>
+            <a:r>
+              <a:rPr/>
+              <a:t>What are the path dependencies? (some options foreclose others)</a:t>
+            </a:r>
+          </a:p>
+          <a:p>
+            <a:pPr lvl="0"/>
+            <a:r>
+              <a:rPr/>
+              <a:t>Which sequences are robust across many futures?</a:t>
+            </a:r>
+          </a:p>
+          <a:p>
+            <a:pPr lvl="0" indent="0" marL="0">
+              <a:buNone/>
+            </a:pPr>
+            <a:r>
+              <a:rPr/>
+              <a:t>. . .</a:t>
+            </a:r>
+          </a:p>
+          <a:p>
+            <a:pPr lvl="0" indent="0" marL="0">
+              <a:buNone/>
+            </a:pPr>
+            <a:r>
+              <a:rPr/>
+              <a:t>This is Week 11 content applied at the </a:t>
+            </a:r>
+            <a:r>
+              <a:rPr b="1"/>
+              <a:t>portfolio level</a:t>
+            </a:r>
+            <a:r>
+              <a:rPr/>
+              <a:t>, not just the individual decision level.</a:t>
+            </a:r>
+          </a:p>
+          <a:p>
+            <a:pPr lvl="0" indent="0" marL="0">
+              <a:spcBef>
+                <a:spcPts val="3000"/>
+              </a:spcBef>
+              <a:buNone/>
+            </a:pPr>
+            <a:r>
+              <a:rPr b="1"/>
+              <a:t>Multi-Objective → Evaluate the Pathways</a:t>
+            </a:r>
+          </a:p>
+          <a:p>
+            <a:pPr lvl="0" indent="0" marL="0">
+              <a:buNone/>
+            </a:pPr>
+            <a:r>
+              <a:rPr/>
+              <a:t>Pathways are evaluated on multiple objectives simultaneously:</a:t>
+            </a:r>
+          </a:p>
+          <a:p>
+            <a:pPr lvl="0"/>
+            <a:r>
+              <a:rPr b="1"/>
+              <a:t>Cost</a:t>
+            </a:r>
+            <a:r>
+              <a:rPr/>
+              <a:t>: upfront and lifecycle</a:t>
+            </a:r>
+          </a:p>
+          <a:p>
+            <a:pPr lvl="0"/>
+            <a:r>
+              <a:rPr b="1"/>
+              <a:t>Safety</a:t>
+            </a:r>
+            <a:r>
+              <a:rPr/>
+              <a:t>: flood risk reduction across scenarios</a:t>
+            </a:r>
+          </a:p>
+          <a:p>
+            <a:pPr lvl="0"/>
+            <a:r>
+              <a:rPr b="1"/>
+              <a:t>Flexibility</a:t>
+            </a:r>
+            <a:r>
+              <a:rPr/>
+              <a:t>: how many options remain open?</a:t>
+            </a:r>
+          </a:p>
+          <a:p>
+            <a:pPr lvl="0"/>
+            <a:r>
+              <a:rPr b="1"/>
+              <a:t>Co-benefits</a:t>
+            </a:r>
+            <a:r>
+              <a:rPr/>
+              <a:t>: ecosystem services, recreation, equity</a:t>
+            </a:r>
+          </a:p>
+          <a:p>
+            <a:pPr lvl="0" indent="0" marL="0">
+              <a:buNone/>
+            </a:pPr>
+            <a:r>
+              <a:rPr/>
+              <a:t>. . .</a:t>
+            </a:r>
+          </a:p>
+          <a:p>
+            <a:pPr lvl="0" indent="0" marL="0">
+              <a:buNone/>
+            </a:pPr>
+            <a:r>
+              <a:rPr/>
+              <a:t>No single pathway dominates on all objectives → trade-off visualization (Week 12).</a:t>
+            </a:r>
+          </a:p>
+          <a:p>
+            <a:pPr lvl="0" indent="0" marL="0">
+              <a:spcBef>
+                <a:spcPts val="3000"/>
+              </a:spcBef>
+              <a:buNone/>
+            </a:pPr>
+            <a:r>
+              <a:rPr b="1"/>
+              <a:t>The Integrated Analysis Pipeline</a:t>
+            </a:r>
+          </a:p>
+          <a:p>
+            <a:pPr lvl="0" indent="0">
+              <a:buNone/>
+            </a:pPr>
+            <a:r>
+              <a:rPr>
+                <a:latin typeface="Courier"/>
+              </a:rPr>
+              <a:t>Exploratory Modeling
+        ↓
+  large ensemble of futures
+Scenario Discovery
+        ↓
+  trigger conditions (when to adapt)
+Sequential Decision Design
+        ↓
+  pathway sequences (what to do)
+Multi-Objective Evaluation
+        ↓
+  pathway trade-offs (which to recommend)</a:t>
             </a:r>
           </a:p>
         </p:txBody>
       </p:sp>
     </p:spTree>
   </p:cSld>
+  <p:timing>
+    <p:tnLst>
+      <p:par>
+        <p:cTn id="1" dur="indefinite" restart="never" nodeType="tmRoot">
+          <p:childTnLst>
+            <p:seq concurrent="1" nextAc="seek">
+              <p:cTn id="2" dur="indefinite" nodeType="mainSeq">
+                <p:childTnLst>
+                  <p:par>
+                    <p:cTn id="3" fill="hold">
+                      <p:stCondLst>
+                        <p:cond delay="indefinite"/>
+                      </p:stCondLst>
+                      <p:childTnLst>
+                        <p:par>
+                          <p:cTn id="4" fill="hold">
+                            <p:stCondLst>
+                              <p:cond delay="0"/>
+                            </p:stCondLst>
+                            <p:childTnLst>
+                              <p:par>
+                                <p:cTn id="5" presetID="1" presetClass="entr" presetSubtype="0" fill="hold" grpId="0" nodeType="clickEffect">
+                                  <p:stCondLst>
+                                    <p:cond delay="0"/>
+                                  </p:stCondLst>
+                                  <p:childTnLst>
+                                    <p:set>
+                                      <p:cBhvr>
+                                        <p:cTn id="6" dur="1" fill="hold">
+                                          <p:stCondLst>
+                                            <p:cond delay="0"/>
+                                          </p:stCondLst>
+                                        </p:cTn>
+                                        <p:tgtEl>
+                                          <p:spTgt spid="3">
+                                            <p:txEl>
+                                              <p:pRg st="2" end="2"/>
+                                            </p:txEl>
+                                          </p:spTgt>
+                                        </p:tgtEl>
+                                        <p:attrNameLst>
+                                          <p:attrName>style.visibility</p:attrName>
+                                        </p:attrNameLst>
+                                      </p:cBhvr>
+                                      <p:to>
+                                        <p:strVal val="visible"/>
+                                      </p:to>
+                                    </p:set>
+                                  </p:childTnLst>
+                                </p:cTn>
+                              </p:par>
+                            </p:childTnLst>
+                          </p:cTn>
+                        </p:par>
+                      </p:childTnLst>
+                    </p:cTn>
+                  </p:par>
+                  <p:par>
+                    <p:cTn id="7" fill="hold">
+                      <p:stCondLst>
+                        <p:cond delay="indefinite"/>
+                      </p:stCondLst>
+                      <p:childTnLst>
+                        <p:par>
+                          <p:cTn id="8" fill="hold">
+                            <p:stCondLst>
+                              <p:cond delay="0"/>
+                            </p:stCondLst>
+                            <p:childTnLst>
+                              <p:par>
+                                <p:cTn id="9" presetID="1" presetClass="entr" presetSubtype="0" fill="hold" grpId="0" nodeType="clickEffect">
+                                  <p:stCondLst>
+                                    <p:cond delay="0"/>
+                                  </p:stCondLst>
+                                  <p:childTnLst>
+                                    <p:set>
+                                      <p:cBhvr>
+                                        <p:cTn id="10" dur="1" fill="hold">
+                                          <p:stCondLst>
+                                            <p:cond delay="0"/>
+                                          </p:stCondLst>
+                                        </p:cTn>
+                                        <p:tgtEl>
+                                          <p:spTgt spid="3">
+                                            <p:txEl>
+                                              <p:pRg st="3" end="3"/>
+                                            </p:txEl>
+                                          </p:spTgt>
+                                        </p:tgtEl>
+                                        <p:attrNameLst>
+                                          <p:attrName>style.visibility</p:attrName>
+                                        </p:attrNameLst>
+                                      </p:cBhvr>
+                                      <p:to>
+                                        <p:strVal val="visible"/>
+                                      </p:to>
+                                    </p:set>
+                                  </p:childTnLst>
+                                </p:cTn>
+                              </p:par>
+                            </p:childTnLst>
+                          </p:cTn>
+                        </p:par>
+                      </p:childTnLst>
+                    </p:cTn>
+                  </p:par>
+                  <p:par>
+                    <p:cTn id="11" fill="hold">
+                      <p:stCondLst>
+                        <p:cond delay="indefinite"/>
+                      </p:stCondLst>
+                      <p:childTnLst>
+                        <p:par>
+                          <p:cTn id="12" fill="hold">
+                            <p:stCondLst>
+                              <p:cond delay="0"/>
+                            </p:stCondLst>
+                            <p:childTnLst>
+                              <p:par>
+                                <p:cTn id="13" presetID="1" presetClass="entr" presetSubtype="0" fill="hold" grpId="0" nodeType="clickEffect">
+                                  <p:stCondLst>
+                                    <p:cond delay="0"/>
+                                  </p:stCondLst>
+                                  <p:childTnLst>
+                                    <p:set>
+                                      <p:cBhvr>
+                                        <p:cTn id="14" dur="1" fill="hold">
+                                          <p:stCondLst>
+                                            <p:cond delay="0"/>
+                                          </p:stCondLst>
+                                        </p:cTn>
+                                        <p:tgtEl>
+                                          <p:spTgt spid="3">
+                                            <p:txEl>
+                                              <p:pRg st="4" end="4"/>
+                                            </p:txEl>
+                                          </p:spTgt>
+                                        </p:tgtEl>
+                                        <p:attrNameLst>
+                                          <p:attrName>style.visibility</p:attrName>
+                                        </p:attrNameLst>
+                                      </p:cBhvr>
+                                      <p:to>
+                                        <p:strVal val="visible"/>
+                                      </p:to>
+                                    </p:set>
+                                  </p:childTnLst>
+                                </p:cTn>
+                              </p:par>
+                            </p:childTnLst>
+                          </p:cTn>
+                        </p:par>
+                      </p:childTnLst>
+                    </p:cTn>
+                  </p:par>
+                  <p:par>
+                    <p:cTn id="15" fill="hold">
+                      <p:stCondLst>
+                        <p:cond delay="indefinite"/>
+                      </p:stCondLst>
+                      <p:childTnLst>
+                        <p:par>
+                          <p:cTn id="16" fill="hold">
+                            <p:stCondLst>
+                              <p:cond delay="0"/>
+                            </p:stCondLst>
+                            <p:childTnLst>
+                              <p:par>
+                                <p:cTn id="17" presetID="1" presetClass="entr" presetSubtype="0" fill="hold" grpId="0" nodeType="clickEffect">
+                                  <p:stCondLst>
+                                    <p:cond delay="0"/>
+                                  </p:stCondLst>
+                                  <p:childTnLst>
+                                    <p:set>
+                                      <p:cBhvr>
+                                        <p:cTn id="18" dur="1" fill="hold">
+                                          <p:stCondLst>
+                                            <p:cond delay="0"/>
+                                          </p:stCondLst>
+                                        </p:cTn>
+                                        <p:tgtEl>
+                                          <p:spTgt spid="3">
+                                            <p:txEl>
+                                              <p:pRg st="12" end="12"/>
+                                            </p:txEl>
+                                          </p:spTgt>
+                                        </p:tgtEl>
+                                        <p:attrNameLst>
+                                          <p:attrName>style.visibility</p:attrName>
+                                        </p:attrNameLst>
+                                      </p:cBhvr>
+                                      <p:to>
+                                        <p:strVal val="visible"/>
+                                      </p:to>
+                                    </p:set>
+                                  </p:childTnLst>
+                                </p:cTn>
+                              </p:par>
+                            </p:childTnLst>
+                          </p:cTn>
+                        </p:par>
+                      </p:childTnLst>
+                    </p:cTn>
+                  </p:par>
+                  <p:par>
+                    <p:cTn id="19" fill="hold">
+                      <p:stCondLst>
+                        <p:cond delay="indefinite"/>
+                      </p:stCondLst>
+                      <p:childTnLst>
+                        <p:par>
+                          <p:cTn id="20" fill="hold">
+                            <p:stCondLst>
+                              <p:cond delay="0"/>
+                            </p:stCondLst>
+                            <p:childTnLst>
+                              <p:par>
+                                <p:cTn id="21" presetID="1" presetClass="entr" presetSubtype="0" fill="hold" grpId="0" nodeType="clickEffect">
+                                  <p:stCondLst>
+                                    <p:cond delay="0"/>
+                                  </p:stCondLst>
+                                  <p:childTnLst>
+                                    <p:set>
+                                      <p:cBhvr>
+                                        <p:cTn id="22" dur="1" fill="hold">
+                                          <p:stCondLst>
+                                            <p:cond delay="0"/>
+                                          </p:stCondLst>
+                                        </p:cTn>
+                                        <p:tgtEl>
+                                          <p:spTgt spid="3">
+                                            <p:txEl>
+                                              <p:pRg st="13" end="13"/>
+                                            </p:txEl>
+                                          </p:spTgt>
+                                        </p:tgtEl>
+                                        <p:attrNameLst>
+                                          <p:attrName>style.visibility</p:attrName>
+                                        </p:attrNameLst>
+                                      </p:cBhvr>
+                                      <p:to>
+                                        <p:strVal val="visible"/>
+                                      </p:to>
+                                    </p:set>
+                                  </p:childTnLst>
+                                </p:cTn>
+                              </p:par>
+                            </p:childTnLst>
+                          </p:cTn>
+                        </p:par>
+                      </p:childTnLst>
+                    </p:cTn>
+                  </p:par>
+                  <p:par>
+                    <p:cTn id="23" fill="hold">
+                      <p:stCondLst>
+                        <p:cond delay="indefinite"/>
+                      </p:stCondLst>
+                      <p:childTnLst>
+                        <p:par>
+                          <p:cTn id="24" fill="hold">
+                            <p:stCondLst>
+                              <p:cond delay="0"/>
+                            </p:stCondLst>
+                            <p:childTnLst>
+                              <p:par>
+                                <p:cTn id="25" presetID="1" presetClass="entr" presetSubtype="0" fill="hold" grpId="0" nodeType="clickEffect">
+                                  <p:stCondLst>
+                                    <p:cond delay="0"/>
+                                  </p:stCondLst>
+                                  <p:childTnLst>
+                                    <p:set>
+                                      <p:cBhvr>
+                                        <p:cTn id="26" dur="1" fill="hold">
+                                          <p:stCondLst>
+                                            <p:cond delay="0"/>
+                                          </p:stCondLst>
+                                        </p:cTn>
+                                        <p:tgtEl>
+                                          <p:spTgt spid="3">
+                                            <p:txEl>
+                                              <p:pRg st="14" end="14"/>
+                                            </p:txEl>
+                                          </p:spTgt>
+                                        </p:tgtEl>
+                                        <p:attrNameLst>
+                                          <p:attrName>style.visibility</p:attrName>
+                                        </p:attrNameLst>
+                                      </p:cBhvr>
+                                      <p:to>
+                                        <p:strVal val="visible"/>
+                                      </p:to>
+                                    </p:set>
+                                  </p:childTnLst>
+                                </p:cTn>
+                              </p:par>
+                            </p:childTnLst>
+                          </p:cTn>
+                        </p:par>
+                      </p:childTnLst>
+                    </p:cTn>
+                  </p:par>
+                  <p:par>
+                    <p:cTn id="27" fill="hold">
+                      <p:stCondLst>
+                        <p:cond delay="indefinite"/>
+                      </p:stCondLst>
+                      <p:childTnLst>
+                        <p:par>
+                          <p:cTn id="28" fill="hold">
+                            <p:stCondLst>
+                              <p:cond delay="0"/>
+                            </p:stCondLst>
+                            <p:childTnLst>
+                              <p:par>
+                                <p:cTn id="29" presetID="1" presetClass="entr" presetSubtype="0" fill="hold" grpId="0" nodeType="clickEffect">
+                                  <p:stCondLst>
+                                    <p:cond delay="0"/>
+                                  </p:stCondLst>
+                                  <p:childTnLst>
+                                    <p:set>
+                                      <p:cBhvr>
+                                        <p:cTn id="30" dur="1" fill="hold">
+                                          <p:stCondLst>
+                                            <p:cond delay="0"/>
+                                          </p:stCondLst>
+                                        </p:cTn>
+                                        <p:tgtEl>
+                                          <p:spTgt spid="3">
+                                            <p:txEl>
+                                              <p:pRg st="19" end="19"/>
+                                            </p:txEl>
+                                          </p:spTgt>
+                                        </p:tgtEl>
+                                        <p:attrNameLst>
+                                          <p:attrName>style.visibility</p:attrName>
+                                        </p:attrNameLst>
+                                      </p:cBhvr>
+                                      <p:to>
+                                        <p:strVal val="visible"/>
+                                      </p:to>
+                                    </p:set>
+                                  </p:childTnLst>
+                                </p:cTn>
+                              </p:par>
+                            </p:childTnLst>
+                          </p:cTn>
+                        </p:par>
+                      </p:childTnLst>
+                    </p:cTn>
+                  </p:par>
+                  <p:par>
+                    <p:cTn id="31" fill="hold">
+                      <p:stCondLst>
+                        <p:cond delay="indefinite"/>
+                      </p:stCondLst>
+                      <p:childTnLst>
+                        <p:par>
+                          <p:cTn id="32" fill="hold">
+                            <p:stCondLst>
+                              <p:cond delay="0"/>
+                            </p:stCondLst>
+                            <p:childTnLst>
+                              <p:par>
+                                <p:cTn id="33" presetID="1" presetClass="entr" presetSubtype="0" fill="hold" grpId="0" nodeType="clickEffect">
+                                  <p:stCondLst>
+                                    <p:cond delay="0"/>
+                                  </p:stCondLst>
+                                  <p:childTnLst>
+                                    <p:set>
+                                      <p:cBhvr>
+                                        <p:cTn id="34" dur="1" fill="hold">
+                                          <p:stCondLst>
+                                            <p:cond delay="0"/>
+                                          </p:stCondLst>
+                                        </p:cTn>
+                                        <p:tgtEl>
+                                          <p:spTgt spid="3">
+                                            <p:txEl>
+                                              <p:pRg st="20" end="20"/>
+                                            </p:txEl>
+                                          </p:spTgt>
+                                        </p:tgtEl>
+                                        <p:attrNameLst>
+                                          <p:attrName>style.visibility</p:attrName>
+                                        </p:attrNameLst>
+                                      </p:cBhvr>
+                                      <p:to>
+                                        <p:strVal val="visible"/>
+                                      </p:to>
+                                    </p:set>
+                                  </p:childTnLst>
+                                </p:cTn>
+                              </p:par>
+                            </p:childTnLst>
+                          </p:cTn>
+                        </p:par>
+                      </p:childTnLst>
+                    </p:cTn>
+                  </p:par>
+                  <p:par>
+                    <p:cTn id="35" fill="hold">
+                      <p:stCondLst>
+                        <p:cond delay="indefinite"/>
+                      </p:stCondLst>
+                      <p:childTnLst>
+                        <p:par>
+                          <p:cTn id="36" fill="hold">
+                            <p:stCondLst>
+                              <p:cond delay="0"/>
+                            </p:stCondLst>
+                            <p:childTnLst>
+                              <p:par>
+                                <p:cTn id="37" presetID="1" presetClass="entr" presetSubtype="0" fill="hold" grpId="0" nodeType="clickEffect">
+                                  <p:stCondLst>
+                                    <p:cond delay="0"/>
+                                  </p:stCondLst>
+                                  <p:childTnLst>
+                                    <p:set>
+                                      <p:cBhvr>
+                                        <p:cTn id="38" dur="1" fill="hold">
+                                          <p:stCondLst>
+                                            <p:cond delay="0"/>
+                                          </p:stCondLst>
+                                        </p:cTn>
+                                        <p:tgtEl>
+                                          <p:spTgt spid="3">
+                                            <p:txEl>
+                                              <p:pRg st="21" end="21"/>
+                                            </p:txEl>
+                                          </p:spTgt>
+                                        </p:tgtEl>
+                                        <p:attrNameLst>
+                                          <p:attrName>style.visibility</p:attrName>
+                                        </p:attrNameLst>
+                                      </p:cBhvr>
+                                      <p:to>
+                                        <p:strVal val="visible"/>
+                                      </p:to>
+                                    </p:set>
+                                  </p:childTnLst>
+                                </p:cTn>
+                              </p:par>
+                            </p:childTnLst>
+                          </p:cTn>
+                        </p:par>
+                      </p:childTnLst>
+                    </p:cTn>
+                  </p:par>
+                  <p:par>
+                    <p:cTn id="39" fill="hold">
+                      <p:stCondLst>
+                        <p:cond delay="indefinite"/>
+                      </p:stCondLst>
+                      <p:childTnLst>
+                        <p:par>
+                          <p:cTn id="40" fill="hold">
+                            <p:stCondLst>
+                              <p:cond delay="0"/>
+                            </p:stCondLst>
+                            <p:childTnLst>
+                              <p:par>
+                                <p:cTn id="41" presetID="1" presetClass="entr" presetSubtype="0" fill="hold" grpId="0" nodeType="clickEffect">
+                                  <p:stCondLst>
+                                    <p:cond delay="0"/>
+                                  </p:stCondLst>
+                                  <p:childTnLst>
+                                    <p:set>
+                                      <p:cBhvr>
+                                        <p:cTn id="42" dur="1" fill="hold">
+                                          <p:stCondLst>
+                                            <p:cond delay="0"/>
+                                          </p:stCondLst>
+                                        </p:cTn>
+                                        <p:tgtEl>
+                                          <p:spTgt spid="3">
+                                            <p:txEl>
+                                              <p:pRg st="22" end="22"/>
+                                            </p:txEl>
+                                          </p:spTgt>
+                                        </p:tgtEl>
+                                        <p:attrNameLst>
+                                          <p:attrName>style.visibility</p:attrName>
+                                        </p:attrNameLst>
+                                      </p:cBhvr>
+                                      <p:to>
+                                        <p:strVal val="visible"/>
+                                      </p:to>
+                                    </p:set>
+                                  </p:childTnLst>
+                                </p:cTn>
+                              </p:par>
+                            </p:childTnLst>
+                          </p:cTn>
+                        </p:par>
+                      </p:childTnLst>
+                    </p:cTn>
+                  </p:par>
+                </p:childTnLst>
+              </p:cTn>
+              <p:prevCondLst>
+                <p:cond evt="onPrev" delay="0">
+                  <p:tgtEl>
+                    <p:sldTgt/>
+                  </p:tgtEl>
+                </p:cond>
+              </p:prevCondLst>
+              <p:nextCondLst>
+                <p:cond evt="onNext" delay="0">
+                  <p:tgtEl>
+                    <p:sldTgt/>
+                  </p:tgtEl>
+                </p:cond>
+              </p:nextCondLst>
+            </p:seq>
+          </p:childTnLst>
+        </p:cTn>
+      </p:par>
+    </p:tnLst>
+    <p:bldLst>
+      <p:bldP spid="3" grpId="0" uiExpand="1" build="p"/>
+    </p:bldLst>
+  </p:timing>
+</p:sld>
+</file>
+
+<file path=ppt/slides/slide5.xml><?xml version="1.0" encoding="utf-8"?>
+<p:sld xmlns:a="http://schemas.openxmlformats.org/drawingml/2006/main" xmlns:r="http://schemas.openxmlformats.org/officeDocument/2006/relationships" xmlns:p="http://schemas.openxmlformats.org/presentationml/2006/main">
+  <p:cSld>
+    <p:spTree>
+      <p:nvGrpSpPr>
+        <p:cNvPr id="1" name=""/>
+        <p:cNvGrpSpPr/>
+        <p:nvPr/>
+      </p:nvGrpSpPr>
+      <p:grpSpPr>
+        <a:xfrm>
+          <a:off x="0" y="0"/>
+          <a:ext cx="0" cy="0"/>
+          <a:chOff x="0" y="0"/>
+          <a:chExt cx="0" cy="0"/>
+        </a:xfrm>
+      </p:grpSpPr>
+      <p:sp>
+        <p:nvSpPr>
+          <p:cNvPr id="2" name="Title 1"/>
+          <p:cNvSpPr>
+            <a:spLocks noGrp="1"/>
+          </p:cNvSpPr>
+          <p:nvPr>
+            <p:ph type="title"/>
+          </p:nvPr>
+        </p:nvSpPr>
+        <p:spPr/>
+        <p:txBody>
+          <a:bodyPr/>
+          <a:lstStyle/>
+          <a:p>
+            <a:pPr lvl="0" indent="0" marL="0">
+              <a:buNone/>
+            </a:pPr>
+            <a:r>
+              <a:rPr/>
+              <a:t>Reading a Case Study</a:t>
+            </a:r>
+          </a:p>
+        </p:txBody>
+      </p:sp>
+      <p:sp>
+        <p:nvSpPr>
+          <p:cNvPr id="3" name="Content Placeholder 2"/>
+          <p:cNvSpPr>
+            <a:spLocks noGrp="1"/>
+          </p:cNvSpPr>
+          <p:nvPr>
+            <p:ph idx="1"/>
+          </p:nvPr>
+        </p:nvSpPr>
+        <p:spPr/>
+        <p:txBody>
+          <a:bodyPr/>
+          <a:lstStyle/>
+          <a:p>
+            <a:pPr lvl="0" indent="0" marL="0">
+              <a:spcBef>
+                <a:spcPts val="3000"/>
+              </a:spcBef>
+              <a:buNone/>
+            </a:pPr>
+            <a:r>
+              <a:rPr b="1"/>
+              <a:t>Five Questions for Any Case Study</a:t>
+            </a:r>
+          </a:p>
+          <a:p>
+            <a:pPr lvl="0" indent="-342900" marL="342900">
+              <a:buAutoNum type="arabicPeriod"/>
+            </a:pPr>
+            <a:r>
+              <a:rPr b="1"/>
+              <a:t>Decision context</a:t>
+            </a:r>
+            <a:r>
+              <a:rPr/>
+              <a:t>: Who decides? What’s at stake? What are the constraints?</a:t>
+            </a:r>
+          </a:p>
+          <a:p>
+            <a:pPr lvl="0" indent="-342900" marL="342900">
+              <a:buAutoNum type="arabicPeriod"/>
+            </a:pPr>
+            <a:r>
+              <a:rPr b="1"/>
+              <a:t>System model</a:t>
+            </a:r>
+            <a:r>
+              <a:rPr/>
+              <a:t>: What’s captured? What’s left out?</a:t>
+            </a:r>
+          </a:p>
+          <a:p>
+            <a:pPr lvl="0" indent="-342900" marL="342900">
+              <a:buAutoNum type="arabicPeriod"/>
+            </a:pPr>
+            <a:r>
+              <a:rPr b="1"/>
+              <a:t>Uncertainty characterization</a:t>
+            </a:r>
+            <a:r>
+              <a:rPr/>
+              <a:t>: Deep or well-characterized? How sampled?</a:t>
+            </a:r>
+          </a:p>
+          <a:p>
+            <a:pPr lvl="0" indent="-342900" marL="342900">
+              <a:buAutoNum type="arabicPeriod"/>
+            </a:pPr>
+            <a:r>
+              <a:rPr b="1"/>
+              <a:t>Decision framework</a:t>
+            </a:r>
+            <a:r>
+              <a:rPr/>
+              <a:t>: Static or adaptive? Single or multi-objective?</a:t>
+            </a:r>
+          </a:p>
+          <a:p>
+            <a:pPr lvl="0" indent="-342900" marL="342900">
+              <a:buAutoNum type="arabicPeriod"/>
+            </a:pPr>
+            <a:r>
+              <a:rPr b="1"/>
+              <a:t>Limits</a:t>
+            </a:r>
+            <a:r>
+              <a:rPr/>
+              <a:t>: What does this analysis NOT answer?</a:t>
+            </a:r>
+          </a:p>
+          <a:p>
+            <a:pPr lvl="0" indent="0" marL="0">
+              <a:spcBef>
+                <a:spcPts val="3000"/>
+              </a:spcBef>
+              <a:buNone/>
+            </a:pPr>
+            <a:r>
+              <a:rPr b="1"/>
+              <a:t>Discussion Prep: Haasnoot et al. (2012)</a:t>
+            </a:r>
+          </a:p>
+          <a:p>
+            <a:pPr lvl="0" indent="0" marL="0">
+              <a:buNone/>
+            </a:pPr>
+            <a:r>
+              <a:rPr b="1"/>
+              <a:t>For Wednesday:</a:t>
+            </a:r>
+            <a:r>
+              <a:rPr/>
+              <a:t> Dongwook leads discussion on Haasnoot et al. (2012)</a:t>
+            </a:r>
+          </a:p>
+          <a:p>
+            <a:pPr lvl="0" indent="0" marL="0">
+              <a:buNone/>
+            </a:pPr>
+            <a:r>
+              <a:rPr/>
+              <a:t>Come ready to address:</a:t>
+            </a:r>
+          </a:p>
+          <a:p>
+            <a:pPr lvl="0"/>
+            <a:r>
+              <a:rPr/>
+              <a:t>What is the </a:t>
+            </a:r>
+            <a:r>
+              <a:rPr i="1"/>
+              <a:t>specific</a:t>
+            </a:r>
+            <a:r>
+              <a:rPr/>
+              <a:t> decision the pathways are designed for?</a:t>
+            </a:r>
+          </a:p>
+          <a:p>
+            <a:pPr lvl="0"/>
+            <a:r>
+              <a:rPr/>
+              <a:t>What triggers are proposed, and how were they derived?</a:t>
+            </a:r>
+          </a:p>
+          <a:p>
+            <a:pPr lvl="0"/>
+            <a:r>
+              <a:rPr/>
+              <a:t>What trade-offs does the paper surface — and which does it leave aside?</a:t>
+            </a:r>
+          </a:p>
+          <a:p>
+            <a:pPr lvl="0"/>
+            <a:r>
+              <a:rPr/>
+              <a:t>How would you apply this approach somewhere other than the Netherlands?</a:t>
+            </a:r>
+          </a:p>
+        </p:txBody>
+      </p:sp>
+    </p:spTree>
+  </p:cSld>
+  <p:timing>
+    <p:tnLst>
+      <p:par>
+        <p:cTn id="1" dur="indefinite" restart="never" nodeType="tmRoot">
+          <p:childTnLst>
+            <p:seq concurrent="1" nextAc="seek">
+              <p:cTn id="2" dur="indefinite" nodeType="mainSeq">
+                <p:childTnLst>
+                  <p:par>
+                    <p:cTn id="3" fill="hold">
+                      <p:stCondLst>
+                        <p:cond delay="indefinite"/>
+                      </p:stCondLst>
+                      <p:childTnLst>
+                        <p:par>
+                          <p:cTn id="4" fill="hold">
+                            <p:stCondLst>
+                              <p:cond delay="0"/>
+                            </p:stCondLst>
+                            <p:childTnLst>
+                              <p:par>
+                                <p:cTn id="5" presetID="1" presetClass="entr" presetSubtype="0" fill="hold" grpId="0" nodeType="clickEffect">
+                                  <p:stCondLst>
+                                    <p:cond delay="0"/>
+                                  </p:stCondLst>
+                                  <p:childTnLst>
+                                    <p:set>
+                                      <p:cBhvr>
+                                        <p:cTn id="6" dur="1" fill="hold">
+                                          <p:stCondLst>
+                                            <p:cond delay="0"/>
+                                          </p:stCondLst>
+                                        </p:cTn>
+                                        <p:tgtEl>
+                                          <p:spTgt spid="3">
+                                            <p:txEl>
+                                              <p:pRg st="1" end="1"/>
+                                            </p:txEl>
+                                          </p:spTgt>
+                                        </p:tgtEl>
+                                        <p:attrNameLst>
+                                          <p:attrName>style.visibility</p:attrName>
+                                        </p:attrNameLst>
+                                      </p:cBhvr>
+                                      <p:to>
+                                        <p:strVal val="visible"/>
+                                      </p:to>
+                                    </p:set>
+                                  </p:childTnLst>
+                                </p:cTn>
+                              </p:par>
+                            </p:childTnLst>
+                          </p:cTn>
+                        </p:par>
+                      </p:childTnLst>
+                    </p:cTn>
+                  </p:par>
+                  <p:par>
+                    <p:cTn id="7" fill="hold">
+                      <p:stCondLst>
+                        <p:cond delay="indefinite"/>
+                      </p:stCondLst>
+                      <p:childTnLst>
+                        <p:par>
+                          <p:cTn id="8" fill="hold">
+                            <p:stCondLst>
+                              <p:cond delay="0"/>
+                            </p:stCondLst>
+                            <p:childTnLst>
+                              <p:par>
+                                <p:cTn id="9" presetID="1" presetClass="entr" presetSubtype="0" fill="hold" grpId="0" nodeType="clickEffect">
+                                  <p:stCondLst>
+                                    <p:cond delay="0"/>
+                                  </p:stCondLst>
+                                  <p:childTnLst>
+                                    <p:set>
+                                      <p:cBhvr>
+                                        <p:cTn id="10" dur="1" fill="hold">
+                                          <p:stCondLst>
+                                            <p:cond delay="0"/>
+                                          </p:stCondLst>
+                                        </p:cTn>
+                                        <p:tgtEl>
+                                          <p:spTgt spid="3">
+                                            <p:txEl>
+                                              <p:pRg st="2" end="2"/>
+                                            </p:txEl>
+                                          </p:spTgt>
+                                        </p:tgtEl>
+                                        <p:attrNameLst>
+                                          <p:attrName>style.visibility</p:attrName>
+                                        </p:attrNameLst>
+                                      </p:cBhvr>
+                                      <p:to>
+                                        <p:strVal val="visible"/>
+                                      </p:to>
+                                    </p:set>
+                                  </p:childTnLst>
+                                </p:cTn>
+                              </p:par>
+                            </p:childTnLst>
+                          </p:cTn>
+                        </p:par>
+                      </p:childTnLst>
+                    </p:cTn>
+                  </p:par>
+                  <p:par>
+                    <p:cTn id="11" fill="hold">
+                      <p:stCondLst>
+                        <p:cond delay="indefinite"/>
+                      </p:stCondLst>
+                      <p:childTnLst>
+                        <p:par>
+                          <p:cTn id="12" fill="hold">
+                            <p:stCondLst>
+                              <p:cond delay="0"/>
+                            </p:stCondLst>
+                            <p:childTnLst>
+                              <p:par>
+                                <p:cTn id="13" presetID="1" presetClass="entr" presetSubtype="0" fill="hold" grpId="0" nodeType="clickEffect">
+                                  <p:stCondLst>
+                                    <p:cond delay="0"/>
+                                  </p:stCondLst>
+                                  <p:childTnLst>
+                                    <p:set>
+                                      <p:cBhvr>
+                                        <p:cTn id="14" dur="1" fill="hold">
+                                          <p:stCondLst>
+                                            <p:cond delay="0"/>
+                                          </p:stCondLst>
+                                        </p:cTn>
+                                        <p:tgtEl>
+                                          <p:spTgt spid="3">
+                                            <p:txEl>
+                                              <p:pRg st="3" end="3"/>
+                                            </p:txEl>
+                                          </p:spTgt>
+                                        </p:tgtEl>
+                                        <p:attrNameLst>
+                                          <p:attrName>style.visibility</p:attrName>
+                                        </p:attrNameLst>
+                                      </p:cBhvr>
+                                      <p:to>
+                                        <p:strVal val="visible"/>
+                                      </p:to>
+                                    </p:set>
+                                  </p:childTnLst>
+                                </p:cTn>
+                              </p:par>
+                            </p:childTnLst>
+                          </p:cTn>
+                        </p:par>
+                      </p:childTnLst>
+                    </p:cTn>
+                  </p:par>
+                  <p:par>
+                    <p:cTn id="15" fill="hold">
+                      <p:stCondLst>
+                        <p:cond delay="indefinite"/>
+                      </p:stCondLst>
+                      <p:childTnLst>
+                        <p:par>
+                          <p:cTn id="16" fill="hold">
+                            <p:stCondLst>
+                              <p:cond delay="0"/>
+                            </p:stCondLst>
+                            <p:childTnLst>
+                              <p:par>
+                                <p:cTn id="17" presetID="1" presetClass="entr" presetSubtype="0" fill="hold" grpId="0" nodeType="clickEffect">
+                                  <p:stCondLst>
+                                    <p:cond delay="0"/>
+                                  </p:stCondLst>
+                                  <p:childTnLst>
+                                    <p:set>
+                                      <p:cBhvr>
+                                        <p:cTn id="18" dur="1" fill="hold">
+                                          <p:stCondLst>
+                                            <p:cond delay="0"/>
+                                          </p:stCondLst>
+                                        </p:cTn>
+                                        <p:tgtEl>
+                                          <p:spTgt spid="3">
+                                            <p:txEl>
+                                              <p:pRg st="4" end="4"/>
+                                            </p:txEl>
+                                          </p:spTgt>
+                                        </p:tgtEl>
+                                        <p:attrNameLst>
+                                          <p:attrName>style.visibility</p:attrName>
+                                        </p:attrNameLst>
+                                      </p:cBhvr>
+                                      <p:to>
+                                        <p:strVal val="visible"/>
+                                      </p:to>
+                                    </p:set>
+                                  </p:childTnLst>
+                                </p:cTn>
+                              </p:par>
+                            </p:childTnLst>
+                          </p:cTn>
+                        </p:par>
+                      </p:childTnLst>
+                    </p:cTn>
+                  </p:par>
+                  <p:par>
+                    <p:cTn id="19" fill="hold">
+                      <p:stCondLst>
+                        <p:cond delay="indefinite"/>
+                      </p:stCondLst>
+                      <p:childTnLst>
+                        <p:par>
+                          <p:cTn id="20" fill="hold">
+                            <p:stCondLst>
+                              <p:cond delay="0"/>
+                            </p:stCondLst>
+                            <p:childTnLst>
+                              <p:par>
+                                <p:cTn id="21" presetID="1" presetClass="entr" presetSubtype="0" fill="hold" grpId="0" nodeType="clickEffect">
+                                  <p:stCondLst>
+                                    <p:cond delay="0"/>
+                                  </p:stCondLst>
+                                  <p:childTnLst>
+                                    <p:set>
+                                      <p:cBhvr>
+                                        <p:cTn id="22" dur="1" fill="hold">
+                                          <p:stCondLst>
+                                            <p:cond delay="0"/>
+                                          </p:stCondLst>
+                                        </p:cTn>
+                                        <p:tgtEl>
+                                          <p:spTgt spid="3">
+                                            <p:txEl>
+                                              <p:pRg st="5" end="5"/>
+                                            </p:txEl>
+                                          </p:spTgt>
+                                        </p:tgtEl>
+                                        <p:attrNameLst>
+                                          <p:attrName>style.visibility</p:attrName>
+                                        </p:attrNameLst>
+                                      </p:cBhvr>
+                                      <p:to>
+                                        <p:strVal val="visible"/>
+                                      </p:to>
+                                    </p:set>
+                                  </p:childTnLst>
+                                </p:cTn>
+                              </p:par>
+                            </p:childTnLst>
+                          </p:cTn>
+                        </p:par>
+                      </p:childTnLst>
+                    </p:cTn>
+                  </p:par>
+                  <p:par>
+                    <p:cTn id="23" fill="hold">
+                      <p:stCondLst>
+                        <p:cond delay="indefinite"/>
+                      </p:stCondLst>
+                      <p:childTnLst>
+                        <p:par>
+                          <p:cTn id="24" fill="hold">
+                            <p:stCondLst>
+                              <p:cond delay="0"/>
+                            </p:stCondLst>
+                            <p:childTnLst>
+                              <p:par>
+                                <p:cTn id="25" presetID="1" presetClass="entr" presetSubtype="0" fill="hold" grpId="0" nodeType="clickEffect">
+                                  <p:stCondLst>
+                                    <p:cond delay="0"/>
+                                  </p:stCondLst>
+                                  <p:childTnLst>
+                                    <p:set>
+                                      <p:cBhvr>
+                                        <p:cTn id="26" dur="1" fill="hold">
+                                          <p:stCondLst>
+                                            <p:cond delay="0"/>
+                                          </p:stCondLst>
+                                        </p:cTn>
+                                        <p:tgtEl>
+                                          <p:spTgt spid="3">
+                                            <p:txEl>
+                                              <p:pRg st="9" end="9"/>
+                                            </p:txEl>
+                                          </p:spTgt>
+                                        </p:tgtEl>
+                                        <p:attrNameLst>
+                                          <p:attrName>style.visibility</p:attrName>
+                                        </p:attrNameLst>
+                                      </p:cBhvr>
+                                      <p:to>
+                                        <p:strVal val="visible"/>
+                                      </p:to>
+                                    </p:set>
+                                  </p:childTnLst>
+                                </p:cTn>
+                              </p:par>
+                            </p:childTnLst>
+                          </p:cTn>
+                        </p:par>
+                      </p:childTnLst>
+                    </p:cTn>
+                  </p:par>
+                  <p:par>
+                    <p:cTn id="27" fill="hold">
+                      <p:stCondLst>
+                        <p:cond delay="indefinite"/>
+                      </p:stCondLst>
+                      <p:childTnLst>
+                        <p:par>
+                          <p:cTn id="28" fill="hold">
+                            <p:stCondLst>
+                              <p:cond delay="0"/>
+                            </p:stCondLst>
+                            <p:childTnLst>
+                              <p:par>
+                                <p:cTn id="29" presetID="1" presetClass="entr" presetSubtype="0" fill="hold" grpId="0" nodeType="clickEffect">
+                                  <p:stCondLst>
+                                    <p:cond delay="0"/>
+                                  </p:stCondLst>
+                                  <p:childTnLst>
+                                    <p:set>
+                                      <p:cBhvr>
+                                        <p:cTn id="30" dur="1" fill="hold">
+                                          <p:stCondLst>
+                                            <p:cond delay="0"/>
+                                          </p:stCondLst>
+                                        </p:cTn>
+                                        <p:tgtEl>
+                                          <p:spTgt spid="3">
+                                            <p:txEl>
+                                              <p:pRg st="10" end="10"/>
+                                            </p:txEl>
+                                          </p:spTgt>
+                                        </p:tgtEl>
+                                        <p:attrNameLst>
+                                          <p:attrName>style.visibility</p:attrName>
+                                        </p:attrNameLst>
+                                      </p:cBhvr>
+                                      <p:to>
+                                        <p:strVal val="visible"/>
+                                      </p:to>
+                                    </p:set>
+                                  </p:childTnLst>
+                                </p:cTn>
+                              </p:par>
+                            </p:childTnLst>
+                          </p:cTn>
+                        </p:par>
+                      </p:childTnLst>
+                    </p:cTn>
+                  </p:par>
+                  <p:par>
+                    <p:cTn id="31" fill="hold">
+                      <p:stCondLst>
+                        <p:cond delay="indefinite"/>
+                      </p:stCondLst>
+                      <p:childTnLst>
+                        <p:par>
+                          <p:cTn id="32" fill="hold">
+                            <p:stCondLst>
+                              <p:cond delay="0"/>
+                            </p:stCondLst>
+                            <p:childTnLst>
+                              <p:par>
+                                <p:cTn id="33" presetID="1" presetClass="entr" presetSubtype="0" fill="hold" grpId="0" nodeType="clickEffect">
+                                  <p:stCondLst>
+                                    <p:cond delay="0"/>
+                                  </p:stCondLst>
+                                  <p:childTnLst>
+                                    <p:set>
+                                      <p:cBhvr>
+                                        <p:cTn id="34" dur="1" fill="hold">
+                                          <p:stCondLst>
+                                            <p:cond delay="0"/>
+                                          </p:stCondLst>
+                                        </p:cTn>
+                                        <p:tgtEl>
+                                          <p:spTgt spid="3">
+                                            <p:txEl>
+                                              <p:pRg st="11" end="11"/>
+                                            </p:txEl>
+                                          </p:spTgt>
+                                        </p:tgtEl>
+                                        <p:attrNameLst>
+                                          <p:attrName>style.visibility</p:attrName>
+                                        </p:attrNameLst>
+                                      </p:cBhvr>
+                                      <p:to>
+                                        <p:strVal val="visible"/>
+                                      </p:to>
+                                    </p:set>
+                                  </p:childTnLst>
+                                </p:cTn>
+                              </p:par>
+                            </p:childTnLst>
+                          </p:cTn>
+                        </p:par>
+                      </p:childTnLst>
+                    </p:cTn>
+                  </p:par>
+                  <p:par>
+                    <p:cTn id="35" fill="hold">
+                      <p:stCondLst>
+                        <p:cond delay="indefinite"/>
+                      </p:stCondLst>
+                      <p:childTnLst>
+                        <p:par>
+                          <p:cTn id="36" fill="hold">
+                            <p:stCondLst>
+                              <p:cond delay="0"/>
+                            </p:stCondLst>
+                            <p:childTnLst>
+                              <p:par>
+                                <p:cTn id="37" presetID="1" presetClass="entr" presetSubtype="0" fill="hold" grpId="0" nodeType="clickEffect">
+                                  <p:stCondLst>
+                                    <p:cond delay="0"/>
+                                  </p:stCondLst>
+                                  <p:childTnLst>
+                                    <p:set>
+                                      <p:cBhvr>
+                                        <p:cTn id="38" dur="1" fill="hold">
+                                          <p:stCondLst>
+                                            <p:cond delay="0"/>
+                                          </p:stCondLst>
+                                        </p:cTn>
+                                        <p:tgtEl>
+                                          <p:spTgt spid="3">
+                                            <p:txEl>
+                                              <p:pRg st="12" end="12"/>
+                                            </p:txEl>
+                                          </p:spTgt>
+                                        </p:tgtEl>
+                                        <p:attrNameLst>
+                                          <p:attrName>style.visibility</p:attrName>
+                                        </p:attrNameLst>
+                                      </p:cBhvr>
+                                      <p:to>
+                                        <p:strVal val="visible"/>
+                                      </p:to>
+                                    </p:set>
+                                  </p:childTnLst>
+                                </p:cTn>
+                              </p:par>
+                            </p:childTnLst>
+                          </p:cTn>
+                        </p:par>
+                      </p:childTnLst>
+                    </p:cTn>
+                  </p:par>
+                </p:childTnLst>
+              </p:cTn>
+              <p:prevCondLst>
+                <p:cond evt="onPrev" delay="0">
+                  <p:tgtEl>
+                    <p:sldTgt/>
+                  </p:tgtEl>
+                </p:cond>
+              </p:prevCondLst>
+              <p:nextCondLst>
+                <p:cond evt="onNext" delay="0">
+                  <p:tgtEl>
+                    <p:sldTgt/>
+                  </p:tgtEl>
+                </p:cond>
+              </p:nextCondLst>
+            </p:seq>
+          </p:childTnLst>
+        </p:cTn>
+      </p:par>
+    </p:tnLst>
+    <p:bldLst>
+      <p:bldP spid="3" grpId="0" uiExpand="1" build="p"/>
+    </p:bldLst>
+  </p:timing>
+</p:sld>
+</file>
+
+<file path=ppt/slides/slide6.xml><?xml version="1.0" encoding="utf-8"?>
+<p:sld xmlns:a="http://schemas.openxmlformats.org/drawingml/2006/main" xmlns:r="http://schemas.openxmlformats.org/officeDocument/2006/relationships" xmlns:p="http://schemas.openxmlformats.org/presentationml/2006/main">
+  <p:cSld>
+    <p:spTree>
+      <p:nvGrpSpPr>
+        <p:cNvPr id="1" name=""/>
+        <p:cNvGrpSpPr/>
+        <p:nvPr/>
+      </p:nvGrpSpPr>
+      <p:grpSpPr>
+        <a:xfrm>
+          <a:off x="0" y="0"/>
+          <a:ext cx="0" cy="0"/>
+          <a:chOff x="0" y="0"/>
+          <a:chExt cx="0" cy="0"/>
+        </a:xfrm>
+      </p:grpSpPr>
+      <p:sp>
+        <p:nvSpPr>
+          <p:cNvPr id="2" name="Title 1"/>
+          <p:cNvSpPr>
+            <a:spLocks noGrp="1"/>
+          </p:cNvSpPr>
+          <p:nvPr>
+            <p:ph type="title"/>
+          </p:nvPr>
+        </p:nvSpPr>
+        <p:spPr>
+          <a:xfrm>
+            <a:off x="457201" y="204787"/>
+            <a:ext cx="3008313" cy="871538"/>
+          </a:xfrm>
+        </p:spPr>
+        <p:txBody>
+          <a:bodyPr/>
+          <a:lstStyle/>
+          <a:p>
+            <a:pPr lvl="0" indent="0" marL="0">
+              <a:buNone/>
+            </a:pPr>
+            <a:r>
+              <a:rPr/>
+              <a:t>Your Final Projects</a:t>
+            </a:r>
+          </a:p>
+        </p:txBody>
+      </p:sp>
+      <p:sp>
+        <p:nvSpPr>
+          <p:cNvPr id="4" name="Text Placeholder 3"/>
+          <p:cNvSpPr>
+            <a:spLocks noGrp="1"/>
+          </p:cNvSpPr>
+          <p:nvPr>
+            <p:ph idx="2" sz="half" type="body"/>
+          </p:nvPr>
+        </p:nvSpPr>
+        <p:spPr/>
+        <p:txBody>
+          <a:bodyPr/>
+          <a:lstStyle/>
+          <a:p>
+            <a:pPr lvl="0" indent="0" marL="0">
+              <a:spcBef>
+                <a:spcPts val="3000"/>
+              </a:spcBef>
+              <a:buNone/>
+            </a:pPr>
+            <a:r>
+              <a:rPr b="1"/>
+              <a:t>You’ve Already Done the Analysis</a:t>
+            </a:r>
+          </a:p>
+          <a:p>
+            <a:pPr lvl="0" indent="0" marL="0">
+              <a:buNone/>
+            </a:pPr>
+            <a:r>
+              <a:rPr/>
+              <a:t>Your project follows the same logic as Haasnoot et al.:</a:t>
+            </a:r>
+          </a:p>
+          <a:p>
+            <a:pPr lvl="0"/>
+            <a:r>
+              <a:rPr b="1"/>
+              <a:t>Memo 1</a:t>
+            </a:r>
+            <a:r>
+              <a:rPr/>
+              <a:t>: Characterized uncertainties (X) and levers (L); built your model (R) and chose metrics (M)</a:t>
+            </a:r>
+          </a:p>
+          <a:p>
+            <a:pPr lvl="0"/>
+            <a:r>
+              <a:rPr b="1"/>
+              <a:t>Memo 2</a:t>
+            </a:r>
+            <a:r>
+              <a:rPr/>
+              <a:t>: Evaluated evidence and robustness across scenarios</a:t>
+            </a:r>
+          </a:p>
+          <a:p>
+            <a:pPr lvl="0"/>
+            <a:r>
+              <a:rPr b="1"/>
+              <a:t>Now</a:t>
+            </a:r>
+            <a:r>
+              <a:rPr/>
+              <a:t>: Synthesize into a coherent recommendation (or structured trade-offs)</a:t>
+            </a:r>
+          </a:p>
+          <a:p>
+            <a:pPr lvl="0" indent="0" marL="0">
+              <a:buNone/>
+            </a:pPr>
+            <a:r>
+              <a:rPr/>
+              <a:t>. . .</a:t>
+            </a:r>
+          </a:p>
+          <a:p>
+            <a:pPr lvl="0" indent="0" marL="0">
+              <a:buNone/>
+            </a:pPr>
+            <a:r>
+              <a:rPr/>
+              <a:t>The pipeline you’ve built </a:t>
+            </a:r>
+            <a:r>
+              <a:rPr i="1"/>
+              <a:t>is</a:t>
+            </a:r>
+            <a:r>
+              <a:rPr/>
+              <a:t> the analysis. The presentation is how you communicate it.</a:t>
+            </a:r>
+          </a:p>
+          <a:p>
+            <a:pPr lvl="0" indent="0" marL="0">
+              <a:spcBef>
+                <a:spcPts val="3000"/>
+              </a:spcBef>
+              <a:buNone/>
+            </a:pPr>
+            <a:r>
+              <a:rPr b="1"/>
+              <a:t>The Executive Briefing Challenge</a:t>
+            </a:r>
+          </a:p>
+          <a:p>
+            <a:pPr lvl="0" indent="0" marL="0">
+              <a:buNone/>
+            </a:pPr>
+            <a:r>
+              <a:rPr/>
+              <a:t>A decision-maker doesn’t want to hear about your methodology.</a:t>
+            </a:r>
+          </a:p>
+          <a:p>
+            <a:pPr lvl="0" indent="0" marL="0">
+              <a:buNone/>
+            </a:pPr>
+            <a:r>
+              <a:rPr/>
+              <a:t>. . .</a:t>
+            </a:r>
+          </a:p>
+          <a:p>
+            <a:pPr lvl="0" indent="0" marL="0">
+              <a:buNone/>
+            </a:pPr>
+            <a:r>
+              <a:rPr/>
+              <a:t>They want to know:</a:t>
+            </a:r>
+          </a:p>
+          <a:p>
+            <a:pPr lvl="0"/>
+            <a:r>
+              <a:rPr b="1"/>
+              <a:t>What’s at stake</a:t>
+            </a:r>
+            <a:r>
+              <a:rPr/>
+              <a:t> — why should they care?</a:t>
+            </a:r>
+          </a:p>
+          <a:p>
+            <a:pPr lvl="0"/>
+            <a:r>
+              <a:rPr b="1"/>
+              <a:t>What you found</a:t>
+            </a:r>
+            <a:r>
+              <a:rPr/>
+              <a:t> — what does the evidence say?</a:t>
+            </a:r>
+          </a:p>
+          <a:p>
+            <a:pPr lvl="0"/>
+            <a:r>
+              <a:rPr b="1"/>
+              <a:t>What to do</a:t>
+            </a:r>
+            <a:r>
+              <a:rPr/>
+              <a:t> — your recommendation, even if hedged</a:t>
+            </a:r>
+          </a:p>
+          <a:p>
+            <a:pPr lvl="0"/>
+            <a:r>
+              <a:rPr b="1"/>
+              <a:t>What could change your mind</a:t>
+            </a:r>
+            <a:r>
+              <a:rPr/>
+              <a:t> — the key uncertainties</a:t>
+            </a:r>
+          </a:p>
+          <a:p>
+            <a:pPr lvl="0" indent="0" marL="0">
+              <a:spcBef>
+                <a:spcPts val="3000"/>
+              </a:spcBef>
+              <a:buNone/>
+            </a:pPr>
+            <a:r>
+              <a:rPr b="1"/>
+              <a:t>Slide Structure Suggestion</a:t>
+            </a:r>
+          </a:p>
+        </p:txBody>
+      </p:sp>
+      <p:graphicFrame>
+        <p:nvGraphicFramePr>
+          <p:cNvPr id="6" name="Content Placeholder 5"/>
+          <p:cNvGraphicFramePr>
+            <a:graphicFrameLocks noGrp="1"/>
+          </p:cNvGraphicFramePr>
+          <p:nvPr>
+            <p:ph idx="1"/>
+          </p:nvPr>
+        </p:nvGraphicFramePr>
+        <p:xfrm>
+          <a:off x="3568700" y="203200"/>
+          <a:ext cx="5105400" cy="4381500"/>
+        </p:xfrm>
+        <a:graphic>
+          <a:graphicData uri="http://schemas.openxmlformats.org/drawingml/2006/table">
+            <a:tbl>
+              <a:tblPr firstRow="1" bandRow="1">
+                <a:tableStyleId>{5C22544A-7EE6-4342-B048-85BDC9FD1C3A}</a:tableStyleId>
+              </a:tblPr>
+              <a:tblGrid>
+                <a:gridCol w="2552700"/>
+                <a:gridCol w="2552700"/>
+              </a:tblGrid>
+              <a:tr h="0">
+                <a:tc>
+                  <a:txBody>
+                    <a:bodyPr/>
+                    <a:lstStyle/>
+                    <a:p>
+                      <a:pPr lvl="0" indent="0" marL="0">
+                        <a:buNone/>
+                      </a:pPr>
+                      <a:r>
+                        <a:rPr/>
+                        <a:t>Slide</a:t>
+                      </a:r>
+                    </a:p>
+                  </a:txBody>
+                  <a:tcPr/>
+                </a:tc>
+                <a:tc>
+                  <a:txBody>
+                    <a:bodyPr/>
+                    <a:lstStyle/>
+                    <a:p>
+                      <a:pPr lvl="0" indent="0" marL="0">
+                        <a:buNone/>
+                      </a:pPr>
+                      <a:r>
+                        <a:rPr/>
+                        <a:t>Content</a:t>
+                      </a:r>
+                    </a:p>
+                  </a:txBody>
+                  <a:tcPr/>
+                </a:tc>
+              </a:tr>
+              <a:tr h="0">
+                <a:tc>
+                  <a:txBody>
+                    <a:bodyPr/>
+                    <a:lstStyle/>
+                    <a:p>
+                      <a:pPr lvl="0" indent="0" marL="0">
+                        <a:buNone/>
+                      </a:pPr>
+                      <a:r>
+                        <a:rPr/>
+                        <a:t>1</a:t>
+                      </a:r>
+                    </a:p>
+                  </a:txBody>
+                </a:tc>
+                <a:tc>
+                  <a:txBody>
+                    <a:bodyPr/>
+                    <a:lstStyle/>
+                    <a:p>
+                      <a:pPr lvl="0" indent="0" marL="0">
+                        <a:buNone/>
+                      </a:pPr>
+                      <a:r>
+                        <a:rPr b="1"/>
+                        <a:t>What’s at stake</a:t>
+                      </a:r>
+                      <a:r>
+                        <a:rPr/>
+                        <a:t> — the decision, the stakes</a:t>
+                      </a:r>
+                    </a:p>
+                  </a:txBody>
+                </a:tc>
+              </a:tr>
+              <a:tr h="0">
+                <a:tc>
+                  <a:txBody>
+                    <a:bodyPr/>
+                    <a:lstStyle/>
+                    <a:p>
+                      <a:pPr lvl="0" indent="0" marL="0">
+                        <a:buNone/>
+                      </a:pPr>
+                      <a:r>
+                        <a:rPr/>
+                        <a:t>2</a:t>
+                      </a:r>
+                    </a:p>
+                  </a:txBody>
+                </a:tc>
+                <a:tc>
+                  <a:txBody>
+                    <a:bodyPr/>
+                    <a:lstStyle/>
+                    <a:p>
+                      <a:pPr lvl="0" indent="0" marL="0">
+                        <a:buNone/>
+                      </a:pPr>
+                      <a:r>
+                        <a:rPr b="1"/>
+                        <a:t>The key uncertainty</a:t>
+                      </a:r>
+                      <a:r>
+                        <a:rPr/>
+                        <a:t> — what you don’t know and why it matters</a:t>
+                      </a:r>
+                    </a:p>
+                  </a:txBody>
+                </a:tc>
+              </a:tr>
+              <a:tr h="0">
+                <a:tc>
+                  <a:txBody>
+                    <a:bodyPr/>
+                    <a:lstStyle/>
+                    <a:p>
+                      <a:pPr lvl="0" indent="0" marL="0">
+                        <a:buNone/>
+                      </a:pPr>
+                      <a:r>
+                        <a:rPr/>
+                        <a:t>3–5</a:t>
+                      </a:r>
+                    </a:p>
+                  </a:txBody>
+                </a:tc>
+                <a:tc>
+                  <a:txBody>
+                    <a:bodyPr/>
+                    <a:lstStyle/>
+                    <a:p>
+                      <a:pPr lvl="0" indent="0" marL="0">
+                        <a:buNone/>
+                      </a:pPr>
+                      <a:r>
+                        <a:rPr b="1"/>
+                        <a:t>What you found</a:t>
+                      </a:r>
+                      <a:r>
+                        <a:rPr/>
+                        <a:t> — your main results</a:t>
+                      </a:r>
+                    </a:p>
+                  </a:txBody>
+                </a:tc>
+              </a:tr>
+              <a:tr h="0">
+                <a:tc>
+                  <a:txBody>
+                    <a:bodyPr/>
+                    <a:lstStyle/>
+                    <a:p>
+                      <a:pPr lvl="0" indent="0" marL="0">
+                        <a:buNone/>
+                      </a:pPr>
+                      <a:r>
+                        <a:rPr/>
+                        <a:t>6–7</a:t>
+                      </a:r>
+                    </a:p>
+                  </a:txBody>
+                </a:tc>
+                <a:tc>
+                  <a:txBody>
+                    <a:bodyPr/>
+                    <a:lstStyle/>
+                    <a:p>
+                      <a:pPr lvl="0" indent="0" marL="0">
+                        <a:buNone/>
+                      </a:pPr>
+                      <a:r>
+                        <a:rPr b="1"/>
+                        <a:t>Recommendation</a:t>
+                      </a:r>
+                      <a:r>
+                        <a:rPr/>
+                        <a:t> — what to do, with conditions and limits</a:t>
+                      </a:r>
+                    </a:p>
+                  </a:txBody>
+                </a:tc>
+              </a:tr>
+            </a:tbl>
+          </a:graphicData>
+        </a:graphic>
+      </p:graphicFrame>
+    </p:spTree>
+  </p:cSld>
+  <p:timing>
+    <p:tnLst>
+      <p:par>
+        <p:cTn id="1" dur="indefinite" restart="never" nodeType="tmRoot">
+          <p:childTnLst>
+            <p:seq concurrent="1" nextAc="seek">
+              <p:cTn id="2" dur="indefinite" nodeType="mainSeq">
+                <p:childTnLst>
+                  <p:par>
+                    <p:cTn id="3" fill="hold">
+                      <p:stCondLst>
+                        <p:cond delay="indefinite"/>
+                      </p:stCondLst>
+                      <p:childTnLst>
+                        <p:par>
+                          <p:cTn id="4" fill="hold">
+                            <p:stCondLst>
+                              <p:cond delay="0"/>
+                            </p:stCondLst>
+                            <p:childTnLst>
+                              <p:par>
+                                <p:cTn id="5" presetID="1" presetClass="entr" presetSubtype="0" fill="hold" grpId="0" nodeType="clickEffect">
+                                  <p:stCondLst>
+                                    <p:cond delay="0"/>
+                                  </p:stCondLst>
+                                  <p:childTnLst>
+                                    <p:set>
+                                      <p:cBhvr>
+                                        <p:cTn id="6" dur="1" fill="hold">
+                                          <p:stCondLst>
+                                            <p:cond delay="0"/>
+                                          </p:stCondLst>
+                                        </p:cTn>
+                                        <p:tgtEl>
+                                          <p:spTgt spid="4">
+                                            <p:txEl>
+                                              <p:pRg st="2" end="2"/>
+                                            </p:txEl>
+                                          </p:spTgt>
+                                        </p:tgtEl>
+                                        <p:attrNameLst>
+                                          <p:attrName>style.visibility</p:attrName>
+                                        </p:attrNameLst>
+                                      </p:cBhvr>
+                                      <p:to>
+                                        <p:strVal val="visible"/>
+                                      </p:to>
+                                    </p:set>
+                                  </p:childTnLst>
+                                </p:cTn>
+                              </p:par>
+                            </p:childTnLst>
+                          </p:cTn>
+                        </p:par>
+                      </p:childTnLst>
+                    </p:cTn>
+                  </p:par>
+                  <p:par>
+                    <p:cTn id="7" fill="hold">
+                      <p:stCondLst>
+                        <p:cond delay="indefinite"/>
+                      </p:stCondLst>
+                      <p:childTnLst>
+                        <p:par>
+                          <p:cTn id="8" fill="hold">
+                            <p:stCondLst>
+                              <p:cond delay="0"/>
+                            </p:stCondLst>
+                            <p:childTnLst>
+                              <p:par>
+                                <p:cTn id="9" presetID="1" presetClass="entr" presetSubtype="0" fill="hold" grpId="0" nodeType="clickEffect">
+                                  <p:stCondLst>
+                                    <p:cond delay="0"/>
+                                  </p:stCondLst>
+                                  <p:childTnLst>
+                                    <p:set>
+                                      <p:cBhvr>
+                                        <p:cTn id="10" dur="1" fill="hold">
+                                          <p:stCondLst>
+                                            <p:cond delay="0"/>
+                                          </p:stCondLst>
+                                        </p:cTn>
+                                        <p:tgtEl>
+                                          <p:spTgt spid="4">
+                                            <p:txEl>
+                                              <p:pRg st="3" end="3"/>
+                                            </p:txEl>
+                                          </p:spTgt>
+                                        </p:tgtEl>
+                                        <p:attrNameLst>
+                                          <p:attrName>style.visibility</p:attrName>
+                                        </p:attrNameLst>
+                                      </p:cBhvr>
+                                      <p:to>
+                                        <p:strVal val="visible"/>
+                                      </p:to>
+                                    </p:set>
+                                  </p:childTnLst>
+                                </p:cTn>
+                              </p:par>
+                            </p:childTnLst>
+                          </p:cTn>
+                        </p:par>
+                      </p:childTnLst>
+                    </p:cTn>
+                  </p:par>
+                  <p:par>
+                    <p:cTn id="11" fill="hold">
+                      <p:stCondLst>
+                        <p:cond delay="indefinite"/>
+                      </p:stCondLst>
+                      <p:childTnLst>
+                        <p:par>
+                          <p:cTn id="12" fill="hold">
+                            <p:stCondLst>
+                              <p:cond delay="0"/>
+                            </p:stCondLst>
+                            <p:childTnLst>
+                              <p:par>
+                                <p:cTn id="13" presetID="1" presetClass="entr" presetSubtype="0" fill="hold" grpId="0" nodeType="clickEffect">
+                                  <p:stCondLst>
+                                    <p:cond delay="0"/>
+                                  </p:stCondLst>
+                                  <p:childTnLst>
+                                    <p:set>
+                                      <p:cBhvr>
+                                        <p:cTn id="14" dur="1" fill="hold">
+                                          <p:stCondLst>
+                                            <p:cond delay="0"/>
+                                          </p:stCondLst>
+                                        </p:cTn>
+                                        <p:tgtEl>
+                                          <p:spTgt spid="4">
+                                            <p:txEl>
+                                              <p:pRg st="4" end="4"/>
+                                            </p:txEl>
+                                          </p:spTgt>
+                                        </p:tgtEl>
+                                        <p:attrNameLst>
+                                          <p:attrName>style.visibility</p:attrName>
+                                        </p:attrNameLst>
+                                      </p:cBhvr>
+                                      <p:to>
+                                        <p:strVal val="visible"/>
+                                      </p:to>
+                                    </p:set>
+                                  </p:childTnLst>
+                                </p:cTn>
+                              </p:par>
+                            </p:childTnLst>
+                          </p:cTn>
+                        </p:par>
+                      </p:childTnLst>
+                    </p:cTn>
+                  </p:par>
+                  <p:par>
+                    <p:cTn id="15" fill="hold">
+                      <p:stCondLst>
+                        <p:cond delay="indefinite"/>
+                      </p:stCondLst>
+                      <p:childTnLst>
+                        <p:par>
+                          <p:cTn id="16" fill="hold">
+                            <p:stCondLst>
+                              <p:cond delay="0"/>
+                            </p:stCondLst>
+                            <p:childTnLst>
+                              <p:par>
+                                <p:cTn id="17" presetID="1" presetClass="entr" presetSubtype="0" fill="hold" grpId="0" nodeType="clickEffect">
+                                  <p:stCondLst>
+                                    <p:cond delay="0"/>
+                                  </p:stCondLst>
+                                  <p:childTnLst>
+                                    <p:set>
+                                      <p:cBhvr>
+                                        <p:cTn id="18" dur="1" fill="hold">
+                                          <p:stCondLst>
+                                            <p:cond delay="0"/>
+                                          </p:stCondLst>
+                                        </p:cTn>
+                                        <p:tgtEl>
+                                          <p:spTgt spid="4">
+                                            <p:txEl>
+                                              <p:pRg st="11" end="11"/>
+                                            </p:txEl>
+                                          </p:spTgt>
+                                        </p:tgtEl>
+                                        <p:attrNameLst>
+                                          <p:attrName>style.visibility</p:attrName>
+                                        </p:attrNameLst>
+                                      </p:cBhvr>
+                                      <p:to>
+                                        <p:strVal val="visible"/>
+                                      </p:to>
+                                    </p:set>
+                                  </p:childTnLst>
+                                </p:cTn>
+                              </p:par>
+                            </p:childTnLst>
+                          </p:cTn>
+                        </p:par>
+                      </p:childTnLst>
+                    </p:cTn>
+                  </p:par>
+                  <p:par>
+                    <p:cTn id="19" fill="hold">
+                      <p:stCondLst>
+                        <p:cond delay="indefinite"/>
+                      </p:stCondLst>
+                      <p:childTnLst>
+                        <p:par>
+                          <p:cTn id="20" fill="hold">
+                            <p:stCondLst>
+                              <p:cond delay="0"/>
+                            </p:stCondLst>
+                            <p:childTnLst>
+                              <p:par>
+                                <p:cTn id="21" presetID="1" presetClass="entr" presetSubtype="0" fill="hold" grpId="0" nodeType="clickEffect">
+                                  <p:stCondLst>
+                                    <p:cond delay="0"/>
+                                  </p:stCondLst>
+                                  <p:childTnLst>
+                                    <p:set>
+                                      <p:cBhvr>
+                                        <p:cTn id="22" dur="1" fill="hold">
+                                          <p:stCondLst>
+                                            <p:cond delay="0"/>
+                                          </p:stCondLst>
+                                        </p:cTn>
+                                        <p:tgtEl>
+                                          <p:spTgt spid="4">
+                                            <p:txEl>
+                                              <p:pRg st="12" end="12"/>
+                                            </p:txEl>
+                                          </p:spTgt>
+                                        </p:tgtEl>
+                                        <p:attrNameLst>
+                                          <p:attrName>style.visibility</p:attrName>
+                                        </p:attrNameLst>
+                                      </p:cBhvr>
+                                      <p:to>
+                                        <p:strVal val="visible"/>
+                                      </p:to>
+                                    </p:set>
+                                  </p:childTnLst>
+                                </p:cTn>
+                              </p:par>
+                            </p:childTnLst>
+                          </p:cTn>
+                        </p:par>
+                      </p:childTnLst>
+                    </p:cTn>
+                  </p:par>
+                  <p:par>
+                    <p:cTn id="23" fill="hold">
+                      <p:stCondLst>
+                        <p:cond delay="indefinite"/>
+                      </p:stCondLst>
+                      <p:childTnLst>
+                        <p:par>
+                          <p:cTn id="24" fill="hold">
+                            <p:stCondLst>
+                              <p:cond delay="0"/>
+                            </p:stCondLst>
+                            <p:childTnLst>
+                              <p:par>
+                                <p:cTn id="25" presetID="1" presetClass="entr" presetSubtype="0" fill="hold" grpId="0" nodeType="clickEffect">
+                                  <p:stCondLst>
+                                    <p:cond delay="0"/>
+                                  </p:stCondLst>
+                                  <p:childTnLst>
+                                    <p:set>
+                                      <p:cBhvr>
+                                        <p:cTn id="26" dur="1" fill="hold">
+                                          <p:stCondLst>
+                                            <p:cond delay="0"/>
+                                          </p:stCondLst>
+                                        </p:cTn>
+                                        <p:tgtEl>
+                                          <p:spTgt spid="4">
+                                            <p:txEl>
+                                              <p:pRg st="13" end="13"/>
+                                            </p:txEl>
+                                          </p:spTgt>
+                                        </p:tgtEl>
+                                        <p:attrNameLst>
+                                          <p:attrName>style.visibility</p:attrName>
+                                        </p:attrNameLst>
+                                      </p:cBhvr>
+                                      <p:to>
+                                        <p:strVal val="visible"/>
+                                      </p:to>
+                                    </p:set>
+                                  </p:childTnLst>
+                                </p:cTn>
+                              </p:par>
+                            </p:childTnLst>
+                          </p:cTn>
+                        </p:par>
+                      </p:childTnLst>
+                    </p:cTn>
+                  </p:par>
+                  <p:par>
+                    <p:cTn id="27" fill="hold">
+                      <p:stCondLst>
+                        <p:cond delay="indefinite"/>
+                      </p:stCondLst>
+                      <p:childTnLst>
+                        <p:par>
+                          <p:cTn id="28" fill="hold">
+                            <p:stCondLst>
+                              <p:cond delay="0"/>
+                            </p:stCondLst>
+                            <p:childTnLst>
+                              <p:par>
+                                <p:cTn id="29" presetID="1" presetClass="entr" presetSubtype="0" fill="hold" grpId="0" nodeType="clickEffect">
+                                  <p:stCondLst>
+                                    <p:cond delay="0"/>
+                                  </p:stCondLst>
+                                  <p:childTnLst>
+                                    <p:set>
+                                      <p:cBhvr>
+                                        <p:cTn id="30" dur="1" fill="hold">
+                                          <p:stCondLst>
+                                            <p:cond delay="0"/>
+                                          </p:stCondLst>
+                                        </p:cTn>
+                                        <p:tgtEl>
+                                          <p:spTgt spid="4">
+                                            <p:txEl>
+                                              <p:pRg st="14" end="14"/>
+                                            </p:txEl>
+                                          </p:spTgt>
+                                        </p:tgtEl>
+                                        <p:attrNameLst>
+                                          <p:attrName>style.visibility</p:attrName>
+                                        </p:attrNameLst>
+                                      </p:cBhvr>
+                                      <p:to>
+                                        <p:strVal val="visible"/>
+                                      </p:to>
+                                    </p:set>
+                                  </p:childTnLst>
+                                </p:cTn>
+                              </p:par>
+                            </p:childTnLst>
+                          </p:cTn>
+                        </p:par>
+                      </p:childTnLst>
+                    </p:cTn>
+                  </p:par>
+                </p:childTnLst>
+              </p:cTn>
+              <p:prevCondLst>
+                <p:cond evt="onPrev" delay="0">
+                  <p:tgtEl>
+                    <p:sldTgt/>
+                  </p:tgtEl>
+                </p:cond>
+              </p:prevCondLst>
+              <p:nextCondLst>
+                <p:cond evt="onNext" delay="0">
+                  <p:tgtEl>
+                    <p:sldTgt/>
+                  </p:tgtEl>
+                </p:cond>
+              </p:nextCondLst>
+            </p:seq>
+          </p:childTnLst>
+        </p:cTn>
+      </p:par>
+    </p:tnLst>
+    <p:bldLst>
+      <p:bldP spid="4" grpId="0" uiExpand="1" build="p"/>
+    </p:bldLst>
+  </p:timing>
+</p:sld>
+</file>
+
+<file path=ppt/slides/slide7.xml><?xml version="1.0" encoding="utf-8"?>
+<p:sld xmlns:a="http://schemas.openxmlformats.org/drawingml/2006/main" xmlns:r="http://schemas.openxmlformats.org/officeDocument/2006/relationships" xmlns:p="http://schemas.openxmlformats.org/presentationml/2006/main">
+  <p:cSld>
+    <p:spTree>
+      <p:nvGrpSpPr>
+        <p:cNvPr id="1" name=""/>
+        <p:cNvGrpSpPr/>
+        <p:nvPr/>
+      </p:nvGrpSpPr>
+      <p:grpSpPr>
+        <a:xfrm>
+          <a:off x="0" y="0"/>
+          <a:ext cx="0" cy="0"/>
+          <a:chOff x="0" y="0"/>
+          <a:chExt cx="0" cy="0"/>
+        </a:xfrm>
+      </p:grpSpPr>
+      <p:sp>
+        <p:nvSpPr>
+          <p:cNvPr id="3" name="Content Placeholder 2"/>
+          <p:cNvSpPr>
+            <a:spLocks noGrp="1"/>
+          </p:cNvSpPr>
+          <p:nvPr>
+            <p:ph idx="1"/>
+          </p:nvPr>
+        </p:nvSpPr>
+        <p:spPr/>
+        <p:txBody>
+          <a:bodyPr/>
+          <a:lstStyle/>
+          <a:p>
+            <a:pPr lvl="0" indent="0" marL="0">
+              <a:buNone/>
+            </a:pPr>
+            <a:r>
+              <a:rPr/>
+              <a:t>. . .</a:t>
+            </a:r>
+          </a:p>
+          <a:p>
+            <a:pPr lvl="0" indent="0" marL="0">
+              <a:buNone/>
+            </a:pPr>
+            <a:r>
+              <a:rPr/>
+              <a:t>15 minutes goes fast. Cut ruthlessly. Practice out loud.</a:t>
+            </a:r>
+          </a:p>
+          <a:p>
+            <a:pPr lvl="0" indent="0" marL="0">
+              <a:spcBef>
+                <a:spcPts val="3000"/>
+              </a:spcBef>
+              <a:buNone/>
+            </a:pPr>
+            <a:r>
+              <a:rPr b="1"/>
+              <a:t>One Reflection Prompt</a:t>
+            </a:r>
+          </a:p>
+          <a:p>
+            <a:pPr lvl="0" indent="0" marL="0">
+              <a:buNone/>
+            </a:pPr>
+            <a:r>
+              <a:rPr b="1"/>
+              <a:t>Think about your project for 60 seconds:</a:t>
+            </a:r>
+          </a:p>
+          <a:p>
+            <a:pPr lvl="0" indent="0" marL="1270000">
+              <a:buNone/>
+            </a:pPr>
+            <a:r>
+              <a:rPr sz="2000"/>
+              <a:t>What is the single most important figure or finding you want your audience to remember after they leave the room?</a:t>
+            </a:r>
+          </a:p>
+          <a:p>
+            <a:pPr lvl="0" indent="0" marL="0">
+              <a:buNone/>
+            </a:pPr>
+            <a:r>
+              <a:rPr/>
+              <a:t>. . .</a:t>
+            </a:r>
+          </a:p>
+          <a:p>
+            <a:pPr lvl="0" indent="0" marL="0">
+              <a:buNone/>
+            </a:pPr>
+            <a:r>
+              <a:rPr/>
+              <a:t>That figure should be on slide 3 or 4. Everything else supports it.</a:t>
+            </a:r>
+          </a:p>
+        </p:txBody>
+      </p:sp>
+    </p:spTree>
+  </p:cSld>
+</p:sld>
+</file>
+
+<file path=ppt/slides/slide8.xml><?xml version="1.0" encoding="utf-8"?>
+<p:sld xmlns:a="http://schemas.openxmlformats.org/drawingml/2006/main" xmlns:r="http://schemas.openxmlformats.org/officeDocument/2006/relationships" xmlns:p="http://schemas.openxmlformats.org/presentationml/2006/main">
+  <p:cSld>
+    <p:spTree>
+      <p:nvGrpSpPr>
+        <p:cNvPr id="1" name=""/>
+        <p:cNvGrpSpPr/>
+        <p:nvPr/>
+      </p:nvGrpSpPr>
+      <p:grpSpPr>
+        <a:xfrm>
+          <a:off x="0" y="0"/>
+          <a:ext cx="0" cy="0"/>
+          <a:chOff x="0" y="0"/>
+          <a:chExt cx="0" cy="0"/>
+        </a:xfrm>
+      </p:grpSpPr>
+      <p:sp>
+        <p:nvSpPr>
+          <p:cNvPr id="2" name="Title 1"/>
+          <p:cNvSpPr>
+            <a:spLocks noGrp="1"/>
+          </p:cNvSpPr>
+          <p:nvPr>
+            <p:ph type="title"/>
+          </p:nvPr>
+        </p:nvSpPr>
+        <p:spPr/>
+        <p:txBody>
+          <a:bodyPr/>
+          <a:lstStyle/>
+          <a:p>
+            <a:pPr lvl="0" indent="0" marL="0">
+              <a:buNone/>
+            </a:pPr>
+            <a:r>
+              <a:rPr/>
+              <a:t>Looking Ahead</a:t>
+            </a:r>
+          </a:p>
+        </p:txBody>
+      </p:sp>
+      <p:sp>
+        <p:nvSpPr>
+          <p:cNvPr id="3" name="Content Placeholder 2"/>
+          <p:cNvSpPr>
+            <a:spLocks noGrp="1"/>
+          </p:cNvSpPr>
+          <p:nvPr>
+            <p:ph idx="1"/>
+          </p:nvPr>
+        </p:nvSpPr>
+        <p:spPr/>
+        <p:txBody>
+          <a:bodyPr/>
+          <a:lstStyle/>
+          <a:p>
+            <a:pPr lvl="0" indent="0" marL="0">
+              <a:spcBef>
+                <a:spcPts val="3000"/>
+              </a:spcBef>
+              <a:buNone/>
+            </a:pPr>
+            <a:r>
+              <a:rPr b="1"/>
+              <a:t>This Week and Next</a:t>
+            </a:r>
+          </a:p>
+          <a:p>
+            <a:pPr lvl="0"/>
+            <a:r>
+              <a:rPr b="1"/>
+              <a:t>Wednesday</a:t>
+            </a:r>
+            <a:r>
+              <a:rPr/>
+              <a:t>: Dongwook leads discussion of Haasnoot et al. (2012) — Come with your five questions answered</a:t>
+            </a:r>
+          </a:p>
+          <a:p>
+            <a:pPr lvl="0"/>
+            <a:r>
+              <a:rPr b="1"/>
+              <a:t>Friday, Apr 17</a:t>
+            </a:r>
+            <a:r>
+              <a:rPr/>
+              <a:t>: Slides due — Treat this deadline seriously; practice requires finished slides</a:t>
+            </a:r>
+          </a:p>
+          <a:p>
+            <a:pPr lvl="0"/>
+            <a:r>
+              <a:rPr b="1"/>
+              <a:t>Week 14 (Apr 20–24)</a:t>
+            </a:r>
+            <a:r>
+              <a:rPr/>
+              <a:t>: Executive Briefings — Treat it like a real client presentation</a:t>
+            </a:r>
+          </a:p>
+          <a:p>
+            <a:pPr lvl="0" indent="0" marL="0">
+              <a:buNone/>
+            </a:pPr>
+            <a:r>
+              <a:rPr/>
+              <a:t>. . .</a:t>
+            </a:r>
+          </a:p>
+          <a:p>
+            <a:pPr lvl="0" indent="0" marL="0">
+              <a:buNone/>
+            </a:pPr>
+            <a:r>
+              <a:rPr/>
+              <a:t>This is the end of the formal curriculum.</a:t>
+            </a:r>
+          </a:p>
+          <a:p>
+            <a:pPr lvl="0" indent="0" marL="0">
+              <a:buNone/>
+            </a:pPr>
+            <a:r>
+              <a:rPr/>
+              <a:t>Everything from here is yours to use.</a:t>
+            </a:r>
+          </a:p>
+          <a:p>
+            <a:pPr lvl="0" indent="0" marL="0">
+              <a:spcBef>
+                <a:spcPts val="3000"/>
+              </a:spcBef>
+              <a:buNone/>
+            </a:pPr>
+            <a:r>
+              <a:rPr b="1"/>
+              <a:t>References</a:t>
+            </a:r>
+          </a:p>
+          <a:p>
+            <a:pPr lvl="0" indent="0" marL="0">
+              <a:buNone/>
+            </a:pPr>
+            <a:r>
+              <a:rPr/>
+              <a:t>Haasnoot, Marjolijn, Hans Middelkoop, Astrid Offermans, Eelco van Beek, and Willem P. A. van Deursen. 2012. “Exploring Pathways for Sustainable Water Management in River Deltas in a Changing Environment.” </a:t>
+            </a:r>
+            <a:r>
+              <a:rPr i="1"/>
+              <a:t>Climatic Change</a:t>
+            </a:r>
+            <a:r>
+              <a:rPr/>
+              <a:t> 115 (3): 795–819. </a:t>
+            </a:r>
+            <a:r>
+              <a:rPr>
+                <a:hlinkClick r:id="rId3"/>
+              </a:rPr>
+              <a:t>https://doi.org/10.1007/s10584-012-0444-2</a:t>
+            </a:r>
+            <a:r>
+              <a:rPr/>
+              <a:t>.</a:t>
+            </a:r>
+          </a:p>
+        </p:txBody>
+      </p:sp>
+    </p:spTree>
+  </p:cSld>
+  <p:timing>
+    <p:tnLst>
+      <p:par>
+        <p:cTn id="1" dur="indefinite" restart="never" nodeType="tmRoot">
+          <p:childTnLst>
+            <p:seq concurrent="1" nextAc="seek">
+              <p:cTn id="2" dur="indefinite" nodeType="mainSeq">
+                <p:childTnLst>
+                  <p:par>
+                    <p:cTn id="3" fill="hold">
+                      <p:stCondLst>
+                        <p:cond delay="indefinite"/>
+                      </p:stCondLst>
+                      <p:childTnLst>
+                        <p:par>
+                          <p:cTn id="4" fill="hold">
+                            <p:stCondLst>
+                              <p:cond delay="0"/>
+                            </p:stCondLst>
+                            <p:childTnLst>
+                              <p:par>
+                                <p:cTn id="5" presetID="1" presetClass="entr" presetSubtype="0" fill="hold" grpId="0" nodeType="clickEffect">
+                                  <p:stCondLst>
+                                    <p:cond delay="0"/>
+                                  </p:stCondLst>
+                                  <p:childTnLst>
+                                    <p:set>
+                                      <p:cBhvr>
+                                        <p:cTn id="6" dur="1" fill="hold">
+                                          <p:stCondLst>
+                                            <p:cond delay="0"/>
+                                          </p:stCondLst>
+                                        </p:cTn>
+                                        <p:tgtEl>
+                                          <p:spTgt spid="3">
+                                            <p:txEl>
+                                              <p:pRg st="1" end="1"/>
+                                            </p:txEl>
+                                          </p:spTgt>
+                                        </p:tgtEl>
+                                        <p:attrNameLst>
+                                          <p:attrName>style.visibility</p:attrName>
+                                        </p:attrNameLst>
+                                      </p:cBhvr>
+                                      <p:to>
+                                        <p:strVal val="visible"/>
+                                      </p:to>
+                                    </p:set>
+                                  </p:childTnLst>
+                                </p:cTn>
+                              </p:par>
+                            </p:childTnLst>
+                          </p:cTn>
+                        </p:par>
+                      </p:childTnLst>
+                    </p:cTn>
+                  </p:par>
+                  <p:par>
+                    <p:cTn id="7" fill="hold">
+                      <p:stCondLst>
+                        <p:cond delay="indefinite"/>
+                      </p:stCondLst>
+                      <p:childTnLst>
+                        <p:par>
+                          <p:cTn id="8" fill="hold">
+                            <p:stCondLst>
+                              <p:cond delay="0"/>
+                            </p:stCondLst>
+                            <p:childTnLst>
+                              <p:par>
+                                <p:cTn id="9" presetID="1" presetClass="entr" presetSubtype="0" fill="hold" grpId="0" nodeType="clickEffect">
+                                  <p:stCondLst>
+                                    <p:cond delay="0"/>
+                                  </p:stCondLst>
+                                  <p:childTnLst>
+                                    <p:set>
+                                      <p:cBhvr>
+                                        <p:cTn id="10" dur="1" fill="hold">
+                                          <p:stCondLst>
+                                            <p:cond delay="0"/>
+                                          </p:stCondLst>
+                                        </p:cTn>
+                                        <p:tgtEl>
+                                          <p:spTgt spid="3">
+                                            <p:txEl>
+                                              <p:pRg st="2" end="2"/>
+                                            </p:txEl>
+                                          </p:spTgt>
+                                        </p:tgtEl>
+                                        <p:attrNameLst>
+                                          <p:attrName>style.visibility</p:attrName>
+                                        </p:attrNameLst>
+                                      </p:cBhvr>
+                                      <p:to>
+                                        <p:strVal val="visible"/>
+                                      </p:to>
+                                    </p:set>
+                                  </p:childTnLst>
+                                </p:cTn>
+                              </p:par>
+                            </p:childTnLst>
+                          </p:cTn>
+                        </p:par>
+                      </p:childTnLst>
+                    </p:cTn>
+                  </p:par>
+                  <p:par>
+                    <p:cTn id="11" fill="hold">
+                      <p:stCondLst>
+                        <p:cond delay="indefinite"/>
+                      </p:stCondLst>
+                      <p:childTnLst>
+                        <p:par>
+                          <p:cTn id="12" fill="hold">
+                            <p:stCondLst>
+                              <p:cond delay="0"/>
+                            </p:stCondLst>
+                            <p:childTnLst>
+                              <p:par>
+                                <p:cTn id="13" presetID="1" presetClass="entr" presetSubtype="0" fill="hold" grpId="0" nodeType="clickEffect">
+                                  <p:stCondLst>
+                                    <p:cond delay="0"/>
+                                  </p:stCondLst>
+                                  <p:childTnLst>
+                                    <p:set>
+                                      <p:cBhvr>
+                                        <p:cTn id="14" dur="1" fill="hold">
+                                          <p:stCondLst>
+                                            <p:cond delay="0"/>
+                                          </p:stCondLst>
+                                        </p:cTn>
+                                        <p:tgtEl>
+                                          <p:spTgt spid="3">
+                                            <p:txEl>
+                                              <p:pRg st="3" end="3"/>
+                                            </p:txEl>
+                                          </p:spTgt>
+                                        </p:tgtEl>
+                                        <p:attrNameLst>
+                                          <p:attrName>style.visibility</p:attrName>
+                                        </p:attrNameLst>
+                                      </p:cBhvr>
+                                      <p:to>
+                                        <p:strVal val="visible"/>
+                                      </p:to>
+                                    </p:set>
+                                  </p:childTnLst>
+                                </p:cTn>
+                              </p:par>
+                            </p:childTnLst>
+                          </p:cTn>
+                        </p:par>
+                      </p:childTnLst>
+                    </p:cTn>
+                  </p:par>
+                </p:childTnLst>
+              </p:cTn>
+              <p:prevCondLst>
+                <p:cond evt="onPrev" delay="0">
+                  <p:tgtEl>
+                    <p:sldTgt/>
+                  </p:tgtEl>
+                </p:cond>
+              </p:prevCondLst>
+              <p:nextCondLst>
+                <p:cond evt="onNext" delay="0">
+                  <p:tgtEl>
+                    <p:sldTgt/>
+                  </p:tgtEl>
+                </p:cond>
+              </p:nextCondLst>
+            </p:seq>
+          </p:childTnLst>
+        </p:cTn>
+      </p:par>
+    </p:tnLst>
+    <p:bldLst>
+      <p:bldP spid="3" grpId="0" uiExpand="1" build="p"/>
+    </p:bldLst>
+  </p:timing>
 </p:sld>
 </file>
 

--- a/lectures/week-13/index.pptx
+++ b/lectures/week-13/index.pptx
@@ -5,7 +5,7 @@
     <p:sldMasterId id="2147483648" r:id="rId1"/>
   </p:sldMasterIdLst>
   <p:notesMasterIdLst>
-    <p:notesMasterId r:id="rId10"/>
+    <p:notesMasterId r:id="rId18"/>
   </p:notesMasterIdLst>
   <p:sldIdLst>
     <p:sldId id="256" r:id="rId2"/>
@@ -16,6 +16,14 @@
     <p:sldId id="261" r:id="rId7"/>
     <p:sldId id="262" r:id="rId8"/>
     <p:sldId id="263" r:id="rId9"/>
+    <p:sldId id="264" r:id="rId10"/>
+    <p:sldId id="265" r:id="rId11"/>
+    <p:sldId id="266" r:id="rId12"/>
+    <p:sldId id="267" r:id="rId13"/>
+    <p:sldId id="268" r:id="rId14"/>
+    <p:sldId id="269" r:id="rId15"/>
+    <p:sldId id="270" r:id="rId16"/>
+    <p:sldId id="271" r:id="rId17"/>
   </p:sldIdLst>
   <p:sldSz cx="9144000" cy="5143500" type="screen16x9"/>
   <p:notesSz cx="6858000" cy="9144000"/>
@@ -531,21 +539,21 @@
             </a:pPr>
             <a:r>
               <a:rPr/>
-              <a:t>Target: 1:02. Open with the hook — no framing yet, just the story. The Delta Works are an engineering marvel. But they were designed under a paradigm of “find the optimal solution and build it.” What happens when the assumptions behind that solution change? Sea-level rise projections in 1953 looked very different from today’s. Let the students sit with the tension: you can’t just optimize once for infrastructure that lasts centuries.</a:t>
-            </a:r>
-          </a:p>
-          <a:p>
-            <a:pPr lvl="0" indent="0" marL="0">
-              <a:buNone/>
-            </a:pPr>
-          </a:p>
-          <a:p>
-            <a:pPr lvl="0" indent="0" marL="0">
-              <a:buNone/>
-            </a:pPr>
-            <a:r>
-              <a:rPr/>
-              <a:t>Target: 1:05. This is the hook and framing slide. Keep it brief. The point: students have been learning methods in isolation. Today is about synthesis. Emphasize the celebration: they have actually built a serious toolkit. That’s worth acknowledging.</a:t>
+              <a:t>Target: 1:00. Part 1: ~10 min.</a:t>
+            </a:r>
+          </a:p>
+          <a:p>
+            <a:pPr lvl="0" indent="0" marL="0">
+              <a:buNone/>
+            </a:pPr>
+          </a:p>
+          <a:p>
+            <a:pPr lvl="0" indent="0" marL="0">
+              <a:buNone/>
+            </a:pPr>
+            <a:r>
+              <a:rPr/>
+              <a:t>Target: 1:02. Orient students. Dark blue = below sea level. Light blue = flood-prone from rivers. Note the dike rings and storm surge barriers marked on the map.</a:t>
             </a:r>
           </a:p>
         </p:txBody>
@@ -568,6 +576,322 @@
             <a:fld id="{18BDFEC3-8487-43E8-A154-7C12CBC1FFF2}" type="slidenum">
               <a:rPr lang="en-US"/>
               <a:t>2</a:t>
+            </a:fld>
+            <a:endParaRPr lang="en-US"/>
+          </a:p>
+        </p:txBody>
+      </p:sp>
+    </p:spTree>
+  </p:cSld>
+</p:notes>
+</file>
+
+<file path=ppt/notesSlides/notesSlide10.xml><?xml version="1.0" encoding="utf-8"?>
+<p:notes xmlns:a="http://schemas.openxmlformats.org/drawingml/2006/main" xmlns:r="http://schemas.openxmlformats.org/officeDocument/2006/relationships" xmlns:p="http://schemas.openxmlformats.org/presentationml/2006/main">
+  <p:cSld>
+    <p:spTree>
+      <p:nvGrpSpPr>
+        <p:cNvPr id="1" name=""/>
+        <p:cNvGrpSpPr/>
+        <p:nvPr/>
+      </p:nvGrpSpPr>
+      <p:grpSpPr>
+        <a:xfrm>
+          <a:off x="0" y="0"/>
+          <a:ext cx="0" cy="0"/>
+          <a:chOff x="0" y="0"/>
+          <a:chExt cx="0" cy="0"/>
+        </a:xfrm>
+      </p:grpSpPr>
+      <p:sp>
+        <p:nvSpPr>
+          <p:cNvPr id="2" name="Slide Image Placeholder 1"/>
+          <p:cNvSpPr>
+            <a:spLocks noGrp="1" noRot="1" noChangeAspect="1"/>
+          </p:cNvSpPr>
+          <p:nvPr>
+            <p:ph type="sldImg"/>
+          </p:nvPr>
+        </p:nvSpPr>
+        <p:spPr/>
+      </p:sp>
+      <p:sp>
+        <p:nvSpPr>
+          <p:cNvPr id="3" name="Notes Placeholder 2"/>
+          <p:cNvSpPr>
+            <a:spLocks noGrp="1"/>
+          </p:cNvSpPr>
+          <p:nvPr>
+            <p:ph type="body" idx="1"/>
+          </p:nvPr>
+        </p:nvSpPr>
+        <p:spPr/>
+        <p:txBody>
+          <a:bodyPr/>
+          <a:lstStyle/>
+          <a:p>
+            <a:pPr lvl="0" indent="0" marL="0">
+              <a:buNone/>
+            </a:pPr>
+            <a:r>
+              <a:rPr/>
+              <a:t>Target: 1:34. Part 4: ~8 min.</a:t>
+            </a:r>
+          </a:p>
+          <a:p>
+            <a:pPr lvl="0" indent="0" marL="0">
+              <a:buNone/>
+            </a:pPr>
+          </a:p>
+          <a:p>
+            <a:pPr lvl="0" indent="0" marL="0">
+              <a:buNone/>
+            </a:pPr>
+            <a:r>
+              <a:rPr/>
+              <a:t>Target: 1:37. ATPs bridge scenario discovery (Week 10) and sequential decisions (Week 11). Numbers are illustrative.</a:t>
+            </a:r>
+          </a:p>
+          <a:p>
+            <a:pPr lvl="0" indent="0" marL="0">
+              <a:buNone/>
+            </a:pPr>
+          </a:p>
+          <a:p>
+            <a:pPr lvl="0" indent="0" marL="0">
+              <a:buNone/>
+            </a:pPr>
+            <a:r>
+              <a:rPr/>
+              <a:t>Target: 1:39. Triggers must be observable, not predicted.</a:t>
+            </a:r>
+          </a:p>
+          <a:p>
+            <a:pPr lvl="0" indent="0" marL="0">
+              <a:buNone/>
+            </a:pPr>
+          </a:p>
+          <a:p>
+            <a:pPr lvl="0" indent="0" marL="0">
+              <a:buNone/>
+            </a:pPr>
+            <a:r>
+              <a:rPr/>
+              <a:t>Target: 1:42. Walk through the figure: x-axis = time. Colored lines = adaptation options. Circles = transfer stations. Vertical bars = ATPs. Bottom rows = two scenarios. The map IS the plan.</a:t>
+            </a:r>
+          </a:p>
+        </p:txBody>
+      </p:sp>
+      <p:sp>
+        <p:nvSpPr>
+          <p:cNvPr id="4" name="Slide Number Placeholder 3"/>
+          <p:cNvSpPr>
+            <a:spLocks noGrp="1"/>
+          </p:cNvSpPr>
+          <p:nvPr>
+            <p:ph type="sldNum" sz="quarter" idx="10"/>
+          </p:nvPr>
+        </p:nvSpPr>
+        <p:spPr/>
+        <p:txBody>
+          <a:bodyPr/>
+          <a:lstStyle/>
+          <a:p>
+            <a:fld id="{18BDFEC3-8487-43E8-A154-7C12CBC1FFF2}" type="slidenum">
+              <a:rPr lang="en-US"/>
+              <a:t>14</a:t>
+            </a:fld>
+            <a:endParaRPr lang="en-US"/>
+          </a:p>
+        </p:txBody>
+      </p:sp>
+    </p:spTree>
+  </p:cSld>
+</p:notes>
+</file>
+
+<file path=ppt/notesSlides/notesSlide11.xml><?xml version="1.0" encoding="utf-8"?>
+<p:notes xmlns:a="http://schemas.openxmlformats.org/drawingml/2006/main" xmlns:r="http://schemas.openxmlformats.org/officeDocument/2006/relationships" xmlns:p="http://schemas.openxmlformats.org/presentationml/2006/main">
+  <p:cSld>
+    <p:spTree>
+      <p:nvGrpSpPr>
+        <p:cNvPr id="1" name=""/>
+        <p:cNvGrpSpPr/>
+        <p:nvPr/>
+      </p:nvGrpSpPr>
+      <p:grpSpPr>
+        <a:xfrm>
+          <a:off x="0" y="0"/>
+          <a:ext cx="0" cy="0"/>
+          <a:chOff x="0" y="0"/>
+          <a:chExt cx="0" cy="0"/>
+        </a:xfrm>
+      </p:grpSpPr>
+      <p:sp>
+        <p:nvSpPr>
+          <p:cNvPr id="2" name="Slide Image Placeholder 1"/>
+          <p:cNvSpPr>
+            <a:spLocks noGrp="1" noRot="1" noChangeAspect="1"/>
+          </p:cNvSpPr>
+          <p:nvPr>
+            <p:ph type="sldImg"/>
+          </p:nvPr>
+        </p:nvSpPr>
+        <p:spPr/>
+      </p:sp>
+      <p:sp>
+        <p:nvSpPr>
+          <p:cNvPr id="3" name="Notes Placeholder 2"/>
+          <p:cNvSpPr>
+            <a:spLocks noGrp="1"/>
+          </p:cNvSpPr>
+          <p:nvPr>
+            <p:ph type="body" idx="1"/>
+          </p:nvPr>
+        </p:nvSpPr>
+        <p:spPr/>
+        <p:txBody>
+          <a:bodyPr/>
+          <a:lstStyle/>
+          <a:p>
+            <a:pPr lvl="0" indent="0" marL="0">
+              <a:buNone/>
+            </a:pPr>
+            <a:r>
+              <a:rPr/>
+              <a:t>Target: 1:44. Bottom row is key: uncertainty drives the design, not just the analysis.</a:t>
+            </a:r>
+          </a:p>
+        </p:txBody>
+      </p:sp>
+      <p:sp>
+        <p:nvSpPr>
+          <p:cNvPr id="4" name="Slide Number Placeholder 3"/>
+          <p:cNvSpPr>
+            <a:spLocks noGrp="1"/>
+          </p:cNvSpPr>
+          <p:nvPr>
+            <p:ph type="sldNum" sz="quarter" idx="10"/>
+          </p:nvPr>
+        </p:nvSpPr>
+        <p:spPr/>
+        <p:txBody>
+          <a:bodyPr/>
+          <a:lstStyle/>
+          <a:p>
+            <a:fld id="{18BDFEC3-8487-43E8-A154-7C12CBC1FFF2}" type="slidenum">
+              <a:rPr lang="en-US"/>
+              <a:t>15</a:t>
+            </a:fld>
+            <a:endParaRPr lang="en-US"/>
+          </a:p>
+        </p:txBody>
+      </p:sp>
+    </p:spTree>
+  </p:cSld>
+</p:notes>
+</file>
+
+<file path=ppt/notesSlides/notesSlide12.xml><?xml version="1.0" encoding="utf-8"?>
+<p:notes xmlns:a="http://schemas.openxmlformats.org/drawingml/2006/main" xmlns:r="http://schemas.openxmlformats.org/officeDocument/2006/relationships" xmlns:p="http://schemas.openxmlformats.org/presentationml/2006/main">
+  <p:cSld>
+    <p:spTree>
+      <p:nvGrpSpPr>
+        <p:cNvPr id="1" name=""/>
+        <p:cNvGrpSpPr/>
+        <p:nvPr/>
+      </p:nvGrpSpPr>
+      <p:grpSpPr>
+        <a:xfrm>
+          <a:off x="0" y="0"/>
+          <a:ext cx="0" cy="0"/>
+          <a:chOff x="0" y="0"/>
+          <a:chExt cx="0" cy="0"/>
+        </a:xfrm>
+      </p:grpSpPr>
+      <p:sp>
+        <p:nvSpPr>
+          <p:cNvPr id="2" name="Slide Image Placeholder 1"/>
+          <p:cNvSpPr>
+            <a:spLocks noGrp="1" noRot="1" noChangeAspect="1"/>
+          </p:cNvSpPr>
+          <p:nvPr>
+            <p:ph type="sldImg"/>
+          </p:nvPr>
+        </p:nvSpPr>
+        <p:spPr/>
+      </p:sp>
+      <p:sp>
+        <p:nvSpPr>
+          <p:cNvPr id="3" name="Notes Placeholder 2"/>
+          <p:cNvSpPr>
+            <a:spLocks noGrp="1"/>
+          </p:cNvSpPr>
+          <p:nvPr>
+            <p:ph type="body" idx="1"/>
+          </p:nvPr>
+        </p:nvSpPr>
+        <p:spPr/>
+        <p:txBody>
+          <a:bodyPr/>
+          <a:lstStyle/>
+          <a:p>
+            <a:pPr lvl="0" indent="0" marL="0">
+              <a:buNone/>
+            </a:pPr>
+            <a:r>
+              <a:rPr/>
+              <a:t>Target: 1:44. Part 5: ~6 min.</a:t>
+            </a:r>
+          </a:p>
+          <a:p>
+            <a:pPr lvl="0" indent="0" marL="0">
+              <a:buNone/>
+            </a:pPr>
+          </a:p>
+          <a:p>
+            <a:pPr lvl="0" indent="0" marL="0">
+              <a:buNone/>
+            </a:pPr>
+            <a:r>
+              <a:rPr/>
+              <a:t>Target: 1:49. 60s silence. Then cold-call 2-3.</a:t>
+            </a:r>
+          </a:p>
+          <a:p>
+            <a:pPr lvl="0" indent="0" marL="0">
+              <a:buNone/>
+            </a:pPr>
+          </a:p>
+          <a:p>
+            <a:pPr lvl="0" indent="0" marL="0">
+              <a:buNone/>
+            </a:pPr>
+            <a:r>
+              <a:rPr/>
+              <a:t>Target: 1:49. Scaffold for Wednesday. Question 5 is the most revealing.</a:t>
+            </a:r>
+          </a:p>
+        </p:txBody>
+      </p:sp>
+      <p:sp>
+        <p:nvSpPr>
+          <p:cNvPr id="4" name="Slide Number Placeholder 3"/>
+          <p:cNvSpPr>
+            <a:spLocks noGrp="1"/>
+          </p:cNvSpPr>
+          <p:nvPr>
+            <p:ph type="sldNum" sz="quarter" idx="10"/>
+          </p:nvPr>
+        </p:nvSpPr>
+        <p:spPr/>
+        <p:txBody>
+          <a:bodyPr/>
+          <a:lstStyle/>
+          <a:p>
+            <a:fld id="{18BDFEC3-8487-43E8-A154-7C12CBC1FFF2}" type="slidenum">
+              <a:rPr lang="en-US"/>
+              <a:t>16</a:t>
             </a:fld>
             <a:endParaRPr lang="en-US"/>
           </a:p>
@@ -627,63 +951,21 @@
             </a:pPr>
             <a:r>
               <a:rPr/>
-              <a:t>Target: 1:06. Section break. Transition to the Haasnoot case study.</a:t>
-            </a:r>
-          </a:p>
-          <a:p>
-            <a:pPr lvl="0" indent="0" marL="0">
-              <a:buNone/>
-            </a:pPr>
-          </a:p>
-          <a:p>
-            <a:pPr lvl="0" indent="0" marL="0">
-              <a:buNone/>
-            </a:pPr>
-            <a:r>
-              <a:rPr/>
-              <a:t>Target: 1:09. This motivates why standard optimization fails here. Lock-in is key: once you build a dike to a certain height, you can’t easily unbuild it. The decision is irreversible (or very costly to reverse), and the uncertainty is deep. Connect to Week 8: this is precisely the setting where robustness frameworks matter most.</a:t>
-            </a:r>
-          </a:p>
-          <a:p>
-            <a:pPr lvl="0" indent="0" marL="0">
-              <a:buNone/>
-            </a:pPr>
-          </a:p>
-          <a:p>
-            <a:pPr lvl="0" indent="0" marL="0">
-              <a:buNone/>
-            </a:pPr>
-            <a:r>
-              <a:rPr/>
-              <a:t>Target: 1:12. This is the conceptual core of the lecture. Pathway = sequence of actions + adaptive triggers. The trigger might be: “when observed sea level rise exceeds X cm” or “when flood frequency exceeds Y per decade.” The key word is “observable” — the trigger has to be something you can actually measure. Draw this on the board if helpful: a timeline with decision points branching into multiple futures.</a:t>
-            </a:r>
-          </a:p>
-          <a:p>
-            <a:pPr lvl="0" indent="0" marL="0">
-              <a:buNone/>
-            </a:pPr>
-          </a:p>
-          <a:p>
-            <a:pPr lvl="0" indent="0" marL="0">
-              <a:buNone/>
-            </a:pPr>
-            <a:r>
-              <a:rPr/>
-              <a:t>Target: 1:15. The pathway map is the central deliverable in Haasnoot et al. Walk through what it looks like: a horizontal timeline, branching action sequences, trigger thresholds marked. Key conceptual shift: the output of the analysis is not a recommendation but a structured menu of options with conditions for choosing among them. This is very different from “find the optimal policy.”</a:t>
-            </a:r>
-          </a:p>
-          <a:p>
-            <a:pPr lvl="0" indent="0" marL="0">
-              <a:buNone/>
-            </a:pPr>
-          </a:p>
-          <a:p>
-            <a:pPr lvl="0" indent="0" marL="0">
-              <a:buNone/>
-            </a:pPr>
-            <a:r>
-              <a:rPr/>
-              <a:t>Target: 1:17. A quick contrast to anchor the idea. Don’t dwell — students should see this as a synthesis of ideas they already know. The bottom row is the most important: uncertainty isn’t something to minimize or quantify — it’s the thing that shapes how you design the system.</a:t>
+              <a:t>Target: 1:04. The point: 1953 wasn’t a surprise. Warnings went back decades. WWII, competing priorities, and years without major flooding reduced urgency. Source: MIT.</a:t>
+            </a:r>
+          </a:p>
+          <a:p>
+            <a:pPr lvl="0" indent="0" marL="0">
+              <a:buNone/>
+            </a:pPr>
+          </a:p>
+          <a:p>
+            <a:pPr lvl="0" indent="0" marL="0">
+              <a:buNone/>
+            </a:pPr>
+            <a:r>
+              <a:rPr/>
+              <a:t>Target: 1:06. Let the image sit. 1,836 dead. 72,000 evacuated. 200,000 hectares flooded. Dikes breached in 150+ locations.</a:t>
             </a:r>
           </a:p>
         </p:txBody>
@@ -765,77 +1047,21 @@
             </a:pPr>
             <a:r>
               <a:rPr/>
-              <a:t>Target: 1:18. Section 2: show how this case study uses each Module 3 tool. The goal is for students to see their course content as an integrated pipeline, not a list of separate methods.</a:t>
-            </a:r>
-          </a:p>
-          <a:p>
-            <a:pPr lvl="0" indent="0" marL="0">
-              <a:buNone/>
-            </a:pPr>
-          </a:p>
-          <a:p>
-            <a:pPr lvl="0" indent="0" marL="0">
-              <a:buNone/>
-            </a:pPr>
-            <a:r>
-              <a:rPr/>
-              <a:t>Target: 1:21. This is Week 10 content: exploratory modeling. The emphasis is on mapping the performance landscape, not finding the optimal solution. Key framing: you’re not asking “what’s the best plan?” — you’re asking “under what conditions does any given plan fail?”</a:t>
-            </a:r>
-          </a:p>
-          <a:p>
-            <a:pPr lvl="0" indent="0" marL="0">
-              <a:buNone/>
-            </a:pPr>
-          </a:p>
-          <a:p>
-            <a:pPr lvl="0" indent="0" marL="0">
-              <a:buNone/>
-            </a:pPr>
-            <a:r>
-              <a:rPr/>
-              <a:t>Target: 1:24. This is Week 10 content: PRIM / scenario discovery. The connection is direct: scenario discovery finds the conditions that define decision points. Example: “Strategy A fails when SLR &gt; 40 cm AND population growth &gt; 1.5%/year.” That box-shaped region in scenario space becomes a trigger: “switch to Strategy B when you observe these conditions.” This is a beautiful integration — scenario discovery literally generates the adaptive triggers.</a:t>
-            </a:r>
-          </a:p>
-          <a:p>
-            <a:pPr lvl="0" indent="0" marL="0">
-              <a:buNone/>
-            </a:pPr>
-          </a:p>
-          <a:p>
-            <a:pPr lvl="0" indent="0" marL="0">
-              <a:buNone/>
-            </a:pPr>
-            <a:r>
-              <a:rPr/>
-              <a:t>Target: 1:27. Week 11: sequential decision making. Path dependencies are important: if you build a very tall dike now, you may foreclose the option to later convert to managed retreat. The pathway map visualizes these dependencies explicitly. “Portfolio level”: instead of optimizing one sequence, you design a set of sequences that together cover many futures.</a:t>
-            </a:r>
-          </a:p>
-          <a:p>
-            <a:pPr lvl="0" indent="0" marL="0">
-              <a:buNone/>
-            </a:pPr>
-          </a:p>
-          <a:p>
-            <a:pPr lvl="0" indent="0" marL="0">
-              <a:buNone/>
-            </a:pPr>
-            <a:r>
-              <a:rPr/>
-              <a:t>Target: 1:30. Week 12: multi-objective optimization. The pathway map doesn’t produce a single recommendation — it produces a Pareto front of pathways. Decision-makers can then navigate trade-offs explicitly: “do we want the cheapest pathway, or the one that keeps the most options open?” Flexibility is worth calling out: this is a genuine objective, not just a constraint. Some pathways are more reversible than others, and that has real value under deep uncertainty.</a:t>
-            </a:r>
-          </a:p>
-          <a:p>
-            <a:pPr lvl="0" indent="0" marL="0">
-              <a:buNone/>
-            </a:pPr>
-          </a:p>
-          <a:p>
-            <a:pPr lvl="0" indent="0" marL="0">
-              <a:buNone/>
-            </a:pPr>
-            <a:r>
-              <a:rPr/>
-              <a:t>Target: 1:32. This is the key synthesis slide of the lecture. The pipeline shows how the four Module 3 methods connect into a coherent workflow. Take a moment here: ask students if they can trace their own project through this pipeline. Not every project will use all four stages, but most will touch at least three.</a:t>
+              <a:t>Target: 1:08. Failure floods the Randstad (Amsterdam, Rotterdam, The Hague). Political commitment, not just engineering.</a:t>
+            </a:r>
+          </a:p>
+          <a:p>
+            <a:pPr lvl="0" indent="0" marL="0">
+              <a:buNone/>
+            </a:pPr>
+          </a:p>
+          <a:p>
+            <a:pPr lvl="0" indent="0" marL="0">
+              <a:buNone/>
+            </a:pPr>
+            <a:r>
+              <a:rPr/>
+              <a:t>Target: 1:09. Maeslantkering = one of the largest moving structures on Earth. 40 years, billions of euros. 1-in-10,000 year design standard.</a:t>
             </a:r>
           </a:p>
         </p:txBody>
@@ -917,35 +1143,7 @@
             </a:pPr>
             <a:r>
               <a:rPr/>
-              <a:t>Target: 1:33. Section 3: prepare students for Wednesday’s discussion with Dongwook. Give them analytical vocabulary to bring to the paper.</a:t>
-            </a:r>
-          </a:p>
-          <a:p>
-            <a:pPr lvl="0" indent="0" marL="0">
-              <a:buNone/>
-            </a:pPr>
-          </a:p>
-          <a:p>
-            <a:pPr lvl="0" indent="0" marL="0">
-              <a:buNone/>
-            </a:pPr>
-            <a:r>
-              <a:rPr/>
-              <a:t>Target: 1:36. These five questions give students a scaffold for Wednesday’s discussion. They should arrive having thought through each of these for Haasnoot et al. Question 5 is often the most revealing: good papers are honest about what they can’t answer. For Haasnoot: what’s NOT captured? Implementation costs? Political feasibility? Equity across communities? Encourage students to push on the limits — that’s where the interesting science lives.</a:t>
-            </a:r>
-          </a:p>
-          <a:p>
-            <a:pPr lvl="0" indent="0" marL="0">
-              <a:buNone/>
-            </a:pPr>
-          </a:p>
-          <a:p>
-            <a:pPr lvl="0" indent="0" marL="0">
-              <a:buNone/>
-            </a:pPr>
-            <a:r>
-              <a:rPr/>
-              <a:t>Target: 1:38. Specific prep questions for Wednesday. Dongwook will lead — your job is to set the stage so students come prepared. The last question (transferability) is particularly interesting: the Netherlands has specific institutional capacity, data quality, and political will. Does the method transfer to, say, a small island developing state? Don’t answer these here — just plant the questions.</a:t>
+              <a:t>Target: 1:12. 60s think, 30s pair, cold-call 2-3. Open-ended on purpose — let students generate the concerns from course material. Don’t resolve. Collect answers, then transition to the video.</a:t>
             </a:r>
           </a:p>
         </p:txBody>
@@ -1027,35 +1225,35 @@
             </a:pPr>
             <a:r>
               <a:rPr/>
-              <a:t>Target: 1:39. Section 4: connect everything to the final projects. This should feel energizing, not stressful. Students have done the work — now help them see it.</a:t>
-            </a:r>
-          </a:p>
-          <a:p>
-            <a:pPr lvl="0" indent="0" marL="0">
-              <a:buNone/>
-            </a:pPr>
-          </a:p>
-          <a:p>
-            <a:pPr lvl="0" indent="0" marL="0">
-              <a:buNone/>
-            </a:pPr>
-            <a:r>
-              <a:rPr/>
-              <a:t>Target: 1:41. Reassurance slide: students have done substantial work. The framing here is important: their memo work wasn’t just homework — it was the actual analytical pipeline. The final presentation is not a new task; it’s communicating what they’ve already done.</a:t>
-            </a:r>
-          </a:p>
-          <a:p>
-            <a:pPr lvl="0" indent="0" marL="0">
-              <a:buNone/>
-            </a:pPr>
-          </a:p>
-          <a:p>
-            <a:pPr lvl="0" indent="0" marL="0">
-              <a:buNone/>
-            </a:pPr>
-            <a:r>
-              <a:rPr/>
-              <a:t>Target: 1:43. This is the transition from “technical analysis” to “communication.” The executive briefing is a genre with its own conventions. The biggest mistake students make: leading with methods. No one cares. Lead with the decision. Lead with what’s at stake. Then bring in the evidence. “What could change your mind” is actually a sign of analytical sophistication, not weakness.</a:t>
+              <a:t>Target: 1:14.</a:t>
+            </a:r>
+          </a:p>
+          <a:p>
+            <a:pPr lvl="0" indent="0" marL="0">
+              <a:buNone/>
+            </a:pPr>
+          </a:p>
+          <a:p>
+            <a:pPr lvl="0" indent="0" marL="0">
+              <a:buNone/>
+            </a:pPr>
+            <a:r>
+              <a:rPr/>
+              <a:t>Target: 1:15. One sentence, then play.</a:t>
+            </a:r>
+          </a:p>
+          <a:p>
+            <a:pPr lvl="0" indent="0" marL="0">
+              <a:buNone/>
+            </a:pPr>
+          </a:p>
+          <a:p>
+            <a:pPr lvl="0" indent="0" marL="0">
+              <a:buNone/>
+            </a:pPr>
+            <a:r>
+              <a:rPr/>
+              <a:t>Target: 1:23. 8-min video. No interruption. Pause briefly after.</a:t>
             </a:r>
           </a:p>
         </p:txBody>
@@ -1137,21 +1335,7 @@
             </a:pPr>
             <a:r>
               <a:rPr/>
-              <a:t>Target: 1:45. Practical slide structure advice. 7 slides for 15 minutes is about right — roughly 2 minutes per slide. “Cut ruthlessly” is the key message. Most students try to show everything they did. The presentation is not a summary of your work; it’s a persuasive argument for a recommendation. Practice out loud: this is not optional. Timing matters, and you can’t know your timing without actually speaking.</a:t>
-            </a:r>
-          </a:p>
-          <a:p>
-            <a:pPr lvl="0" indent="0" marL="0">
-              <a:buNone/>
-            </a:pPr>
-          </a:p>
-          <a:p>
-            <a:pPr lvl="0" indent="0" marL="0">
-              <a:buNone/>
-            </a:pPr>
-            <a:r>
-              <a:rPr/>
-              <a:t>Target: 1:47. Give students 60 seconds of actual silence to think. This is a design exercise: what is the load-bearing finding? If they can’t answer in 60 seconds, their narrative isn’t clear yet — and that’s a signal to work on. After the pause, cold call 2–3 students to share their one key finding. This doubles as a preview of what presentations will cover next week.</a:t>
+              <a:t>Target: 1:23. Part 3: ~12 min.</a:t>
             </a:r>
           </a:p>
         </p:txBody>
@@ -1233,21 +1417,7 @@
             </a:pPr>
             <a:r>
               <a:rPr/>
-              <a:t>Target: 1:48. Closing section — brief.</a:t>
-            </a:r>
-          </a:p>
-          <a:p>
-            <a:pPr lvl="0" indent="0" marL="0">
-              <a:buNone/>
-            </a:pPr>
-          </a:p>
-          <a:p>
-            <a:pPr lvl="0" indent="0" marL="0">
-              <a:buNone/>
-            </a:pPr>
-            <a:r>
-              <a:rPr/>
-              <a:t>Target: 1:50. Close with genuine warmth — this is the last lecture. The final line (“everything from here is yours to use”) is the send-off. The toolkit they’ve built — Monte Carlo, robustness, scenario discovery, multi-objective trade-offs — is genuinely useful in the world. That’s worth saying out loud. Optional: brief acknowledgment that you’ve enjoyed the semester, invite questions in office hours, etc.</a:t>
+              <a:t>Target: 1:25. The Delta Works = textbook predict-then-act.</a:t>
             </a:r>
           </a:p>
         </p:txBody>
@@ -1270,6 +1440,184 @@
             <a:fld id="{18BDFEC3-8487-43E8-A154-7C12CBC1FFF2}" type="slidenum">
               <a:rPr lang="en-US"/>
               <a:t>8</a:t>
+            </a:fld>
+            <a:endParaRPr lang="en-US"/>
+          </a:p>
+        </p:txBody>
+      </p:sp>
+    </p:spTree>
+  </p:cSld>
+</p:notes>
+</file>
+
+<file path=ppt/notesSlides/notesSlide8.xml><?xml version="1.0" encoding="utf-8"?>
+<p:notes xmlns:a="http://schemas.openxmlformats.org/drawingml/2006/main" xmlns:r="http://schemas.openxmlformats.org/officeDocument/2006/relationships" xmlns:p="http://schemas.openxmlformats.org/presentationml/2006/main">
+  <p:cSld>
+    <p:spTree>
+      <p:nvGrpSpPr>
+        <p:cNvPr id="1" name=""/>
+        <p:cNvGrpSpPr/>
+        <p:nvPr/>
+      </p:nvGrpSpPr>
+      <p:grpSpPr>
+        <a:xfrm>
+          <a:off x="0" y="0"/>
+          <a:ext cx="0" cy="0"/>
+          <a:chOff x="0" y="0"/>
+          <a:chExt cx="0" cy="0"/>
+        </a:xfrm>
+      </p:grpSpPr>
+      <p:sp>
+        <p:nvSpPr>
+          <p:cNvPr id="2" name="Slide Image Placeholder 1"/>
+          <p:cNvSpPr>
+            <a:spLocks noGrp="1" noRot="1" noChangeAspect="1"/>
+          </p:cNvSpPr>
+          <p:nvPr>
+            <p:ph type="sldImg"/>
+          </p:nvPr>
+        </p:nvSpPr>
+        <p:spPr/>
+      </p:sp>
+      <p:sp>
+        <p:nvSpPr>
+          <p:cNvPr id="3" name="Notes Placeholder 2"/>
+          <p:cNvSpPr>
+            <a:spLocks noGrp="1"/>
+          </p:cNvSpPr>
+          <p:nvPr>
+            <p:ph type="body" idx="1"/>
+          </p:nvPr>
+        </p:nvSpPr>
+        <p:spPr/>
+        <p:txBody>
+          <a:bodyPr/>
+          <a:lstStyle/>
+          <a:p>
+            <a:pPr lvl="0" indent="0" marL="0">
+              <a:buNone/>
+            </a:pPr>
+            <a:r>
+              <a:rPr/>
+              <a:t>Target: 1:28. The Dutch kept the Delta Works AND added Room for the River. They didn’t choose one side.</a:t>
+            </a:r>
+          </a:p>
+        </p:txBody>
+      </p:sp>
+      <p:sp>
+        <p:nvSpPr>
+          <p:cNvPr id="4" name="Slide Number Placeholder 3"/>
+          <p:cNvSpPr>
+            <a:spLocks noGrp="1"/>
+          </p:cNvSpPr>
+          <p:nvPr>
+            <p:ph type="sldNum" sz="quarter" idx="10"/>
+          </p:nvPr>
+        </p:nvSpPr>
+        <p:spPr/>
+        <p:txBody>
+          <a:bodyPr/>
+          <a:lstStyle/>
+          <a:p>
+            <a:fld id="{18BDFEC3-8487-43E8-A154-7C12CBC1FFF2}" type="slidenum">
+              <a:rPr lang="en-US"/>
+              <a:t>11</a:t>
+            </a:fld>
+            <a:endParaRPr lang="en-US"/>
+          </a:p>
+        </p:txBody>
+      </p:sp>
+    </p:spTree>
+  </p:cSld>
+</p:notes>
+</file>
+
+<file path=ppt/notesSlides/notesSlide9.xml><?xml version="1.0" encoding="utf-8"?>
+<p:notes xmlns:a="http://schemas.openxmlformats.org/drawingml/2006/main" xmlns:r="http://schemas.openxmlformats.org/officeDocument/2006/relationships" xmlns:p="http://schemas.openxmlformats.org/presentationml/2006/main">
+  <p:cSld>
+    <p:spTree>
+      <p:nvGrpSpPr>
+        <p:cNvPr id="1" name=""/>
+        <p:cNvGrpSpPr/>
+        <p:nvPr/>
+      </p:nvGrpSpPr>
+      <p:grpSpPr>
+        <a:xfrm>
+          <a:off x="0" y="0"/>
+          <a:ext cx="0" cy="0"/>
+          <a:chOff x="0" y="0"/>
+          <a:chExt cx="0" cy="0"/>
+        </a:xfrm>
+      </p:grpSpPr>
+      <p:sp>
+        <p:nvSpPr>
+          <p:cNvPr id="2" name="Slide Image Placeholder 1"/>
+          <p:cNvSpPr>
+            <a:spLocks noGrp="1" noRot="1" noChangeAspect="1"/>
+          </p:cNvSpPr>
+          <p:nvPr>
+            <p:ph type="sldImg"/>
+          </p:nvPr>
+        </p:nvSpPr>
+        <p:spPr/>
+      </p:sp>
+      <p:sp>
+        <p:nvSpPr>
+          <p:cNvPr id="3" name="Notes Placeholder 2"/>
+          <p:cNvSpPr>
+            <a:spLocks noGrp="1"/>
+          </p:cNvSpPr>
+          <p:nvPr>
+            <p:ph type="body" idx="1"/>
+          </p:nvPr>
+        </p:nvSpPr>
+        <p:spPr/>
+        <p:txBody>
+          <a:bodyPr/>
+          <a:lstStyle/>
+          <a:p>
+            <a:pPr lvl="0" indent="0" marL="0">
+              <a:buNone/>
+            </a:pPr>
+            <a:r>
+              <a:rPr/>
+              <a:t>Target: 1:31. Four Delta Scenarios (Warm, Rest, Busy, Steam) without probabilities. Individual structures still use probabilistic standards. Both coexist.</a:t>
+            </a:r>
+          </a:p>
+          <a:p>
+            <a:pPr lvl="0" indent="0" marL="0">
+              <a:buNone/>
+            </a:pPr>
+          </a:p>
+          <a:p>
+            <a:pPr lvl="0" indent="0" marL="0">
+              <a:buNone/>
+            </a:pPr>
+            <a:r>
+              <a:rPr/>
+              <a:t>Target: 1:34. 60s think, 30s pair, cold-call 2-3. Push students to steelman the side they disagree with.</a:t>
+            </a:r>
+          </a:p>
+        </p:txBody>
+      </p:sp>
+      <p:sp>
+        <p:nvSpPr>
+          <p:cNvPr id="4" name="Slide Number Placeholder 3"/>
+          <p:cNvSpPr>
+            <a:spLocks noGrp="1"/>
+          </p:cNvSpPr>
+          <p:nvPr>
+            <p:ph type="sldNum" sz="quarter" idx="10"/>
+          </p:nvPr>
+        </p:nvSpPr>
+        <p:spPr/>
+        <p:txBody>
+          <a:bodyPr/>
+          <a:lstStyle/>
+          <a:p>
+            <a:fld id="{18BDFEC3-8487-43E8-A154-7C12CBC1FFF2}" type="slidenum">
+              <a:rPr lang="en-US"/>
+              <a:t>13</a:t>
             </a:fld>
             <a:endParaRPr lang="en-US"/>
           </a:p>
@@ -4272,7 +4620,7 @@
             </a:pPr>
             <a:r>
               <a:rPr/>
-              <a:t>Case Studies</a:t>
+              <a:t>Case Studies: Dynamic Adaptive Policy Pathways</a:t>
             </a:r>
           </a:p>
         </p:txBody>
@@ -4343,7 +4691,7 @@
 </p:sld>
 </file>
 
-<file path=ppt/slides/slide2.xml><?xml version="1.0" encoding="utf-8"?>
+<file path=ppt/slides/slide10.xml><?xml version="1.0" encoding="utf-8"?>
 <p:sld xmlns:a="http://schemas.openxmlformats.org/drawingml/2006/main" xmlns:r="http://schemas.openxmlformats.org/officeDocument/2006/relationships" xmlns:p="http://schemas.openxmlformats.org/presentationml/2006/main">
   <p:cSld>
     <p:spTree>
@@ -4367,7 +4715,7 @@
             <a:spLocks noGrp="1"/>
           </p:cNvSpPr>
           <p:nvPr>
-            <p:ph idx="1"/>
+            <p:ph idx="1" sz="half"/>
           </p:nvPr>
         </p:nvSpPr>
         <p:spPr/>
@@ -4380,116 +4728,88 @@
             </a:pPr>
             <a:r>
               <a:rPr b="1"/>
-              <a:t>Draft Material:</a:t>
-            </a:r>
-            <a:r>
-              <a:rPr/>
-              <a:t> This content is under development and subject to change.</a:t>
-            </a:r>
-          </a:p>
-          <a:p>
-            <a:pPr lvl="0" indent="0" marL="0">
-              <a:spcBef>
-                <a:spcPts val="3000"/>
-              </a:spcBef>
+              <a:t>Hold the Line</a:t>
+            </a:r>
+          </a:p>
+          <a:p>
+            <a:pPr lvl="0"/>
+            <a:r>
+              <a:rPr/>
+              <a:t>Hard engineering: higher dikes, stronger barriers</a:t>
+            </a:r>
+          </a:p>
+          <a:p>
+            <a:pPr lvl="0"/>
+            <a:r>
+              <a:rPr/>
+              <a:t>Protect existing land use and development</a:t>
+            </a:r>
+          </a:p>
+          <a:p>
+            <a:pPr lvl="0"/>
+            <a:r>
+              <a:rPr/>
+              <a:t>Proven track record, measurable standards</a:t>
+            </a:r>
+          </a:p>
+          <a:p>
+            <a:pPr lvl="0"/>
+            <a:r>
+              <a:rPr/>
+              <a:t>Clear design criteria and accountability</a:t>
+            </a:r>
+          </a:p>
+        </p:txBody>
+      </p:sp>
+      <p:sp>
+        <p:nvSpPr>
+          <p:cNvPr id="4" name="Content Placeholder 3"/>
+          <p:cNvSpPr>
+            <a:spLocks noGrp="1"/>
+          </p:cNvSpPr>
+          <p:nvPr>
+            <p:ph idx="2" sz="half"/>
+          </p:nvPr>
+        </p:nvSpPr>
+        <p:spPr/>
+        <p:txBody>
+          <a:bodyPr/>
+          <a:lstStyle/>
+          <a:p>
+            <a:pPr lvl="0" indent="0" marL="0">
               <a:buNone/>
             </a:pPr>
             <a:r>
               <a:rPr b="1"/>
-              <a:t>The Problem with Perfect Plans</a:t>
-            </a:r>
-          </a:p>
-          <a:p>
-            <a:pPr lvl="0" indent="0" marL="0">
-              <a:buNone/>
-            </a:pPr>
-            <a:r>
-              <a:rPr/>
-              <a:t>In 1953, catastrophic flooding killed over 1,800 people in the Netherlands.</a:t>
-            </a:r>
-          </a:p>
-          <a:p>
-            <a:pPr lvl="0" indent="0" marL="0">
-              <a:buNone/>
-            </a:pPr>
-            <a:r>
-              <a:rPr/>
-              <a:t>The Dutch response: the Delta Works — a massive system of dams, sluices, and storm surge barriers.</a:t>
-            </a:r>
-          </a:p>
-          <a:p>
-            <a:pPr lvl="0" indent="0" marL="0">
-              <a:buNone/>
-            </a:pPr>
-            <a:r>
-              <a:rPr/>
-              <a:t>Designed to last 200 years.</a:t>
-            </a:r>
-          </a:p>
-          <a:p>
-            <a:pPr lvl="0" indent="0" marL="0">
-              <a:spcBef>
-                <a:spcPts val="3000"/>
-              </a:spcBef>
-              <a:buNone/>
-            </a:pPr>
-            <a:r>
-              <a:rPr b="1"/>
-              <a:t>You’ve Spent 13 Weeks Building a Toolkit</a:t>
-            </a:r>
-          </a:p>
-          <a:p>
-            <a:pPr lvl="0" indent="0" marL="0">
-              <a:buNone/>
-            </a:pPr>
-            <a:r>
-              <a:rPr/>
-              <a:t>. . .</a:t>
-            </a:r>
-          </a:p>
-          <a:p>
-            <a:pPr lvl="0" indent="0" marL="0">
-              <a:buNone/>
-            </a:pPr>
-            <a:r>
-              <a:rPr/>
-              <a:t>Today we look at how someone actually used it.</a:t>
-            </a:r>
-          </a:p>
-          <a:p>
-            <a:pPr lvl="0" indent="0" marL="0">
-              <a:buNone/>
-            </a:pPr>
-            <a:r>
-              <a:rPr/>
-              <a:t>. . .</a:t>
-            </a:r>
-          </a:p>
-          <a:p>
-            <a:pPr lvl="0" indent="0" marL="0">
-              <a:buNone/>
-            </a:pPr>
-            <a:r>
-              <a:rPr/>
-              <a:t>A real case study of climate adaptation planning in the Netherlands — one that’s become a model for coastal cities around the world.</a:t>
-            </a:r>
-          </a:p>
-          <a:p>
-            <a:pPr lvl="0" indent="0" marL="0">
-              <a:buNone/>
-            </a:pPr>
-            <a:r>
-              <a:rPr/>
-              <a:t>. . .</a:t>
-            </a:r>
-          </a:p>
-          <a:p>
-            <a:pPr lvl="0" indent="0" marL="0">
-              <a:buNone/>
-            </a:pPr>
-            <a:r>
-              <a:rPr/>
-              <a:t>Then we turn the lens on your own projects.</a:t>
+              <a:t>Adapt with Nature</a:t>
+            </a:r>
+          </a:p>
+          <a:p>
+            <a:pPr lvl="0"/>
+            <a:r>
+              <a:rPr/>
+              <a:t>Nature-based solutions, managed retreat</a:t>
+            </a:r>
+          </a:p>
+          <a:p>
+            <a:pPr lvl="0"/>
+            <a:r>
+              <a:rPr/>
+              <a:t>Work with natural processes</a:t>
+            </a:r>
+          </a:p>
+          <a:p>
+            <a:pPr lvl="0"/>
+            <a:r>
+              <a:rPr/>
+              <a:t>Multiple co-benefits (ecosystem services, recreation, equity)</a:t>
+            </a:r>
+          </a:p>
+          <a:p>
+            <a:pPr lvl="0"/>
+            <a:r>
+              <a:rPr/>
+              <a:t>Flexibility across uncertain futures</a:t>
             </a:r>
           </a:p>
         </p:txBody>
@@ -4499,7 +4819,7 @@
 </p:sld>
 </file>
 
-<file path=ppt/slides/slide3.xml><?xml version="1.0" encoding="utf-8"?>
+<file path=ppt/slides/slide11.xml><?xml version="1.0" encoding="utf-8"?>
 <p:sld xmlns:a="http://schemas.openxmlformats.org/drawingml/2006/main" xmlns:r="http://schemas.openxmlformats.org/officeDocument/2006/relationships" xmlns:p="http://schemas.openxmlformats.org/presentationml/2006/main">
   <p:cSld>
     <p:spTree>
@@ -4518,6 +4838,294 @@
       </p:grpSpPr>
       <p:sp>
         <p:nvSpPr>
+          <p:cNvPr id="3" name="Content Placeholder 2"/>
+          <p:cNvSpPr>
+            <a:spLocks noGrp="1"/>
+          </p:cNvSpPr>
+          <p:nvPr>
+            <p:ph idx="1"/>
+          </p:nvPr>
+        </p:nvSpPr>
+        <p:spPr/>
+        <p:txBody>
+          <a:bodyPr/>
+          <a:lstStyle/>
+          <a:p>
+            <a:pPr lvl="0" indent="0" marL="0">
+              <a:buNone/>
+            </a:pPr>
+            <a:r>
+              <a:rPr/>
+              <a:t>. . .</a:t>
+            </a:r>
+          </a:p>
+          <a:p>
+            <a:pPr lvl="0" indent="0" marL="0">
+              <a:buNone/>
+            </a:pPr>
+            <a:r>
+              <a:rPr b="1"/>
+              <a:t>Neither is obviously right.</a:t>
+            </a:r>
+            <a:r>
+              <a:rPr/>
+              <a:t> Real solutions likely involve both – but the </a:t>
+            </a:r>
+            <a:r>
+              <a:rPr i="1"/>
+              <a:t>balance</a:t>
+            </a:r>
+            <a:r>
+              <a:rPr/>
+              <a:t> depends on values, not just science.</a:t>
+            </a:r>
+          </a:p>
+          <a:p>
+            <a:pPr lvl="0" indent="0" marL="0">
+              <a:spcBef>
+                <a:spcPts val="3000"/>
+              </a:spcBef>
+              <a:buNone/>
+            </a:pPr>
+            <a:r>
+              <a:rPr b="1"/>
+              <a:t>How the Dutch Actually Decided</a:t>
+            </a:r>
+          </a:p>
+          <a:p>
+            <a:pPr lvl="0" indent="0" marL="0">
+              <a:buNone/>
+            </a:pPr>
+            <a:r>
+              <a:rPr/>
+              <a:t>The Delta Programme faced a choice you’ve seen before:</a:t>
+            </a:r>
+          </a:p>
+        </p:txBody>
+      </p:sp>
+    </p:spTree>
+  </p:cSld>
+</p:sld>
+</file>
+
+<file path=ppt/slides/slide12.xml><?xml version="1.0" encoding="utf-8"?>
+<p:sld xmlns:a="http://schemas.openxmlformats.org/drawingml/2006/main" xmlns:r="http://schemas.openxmlformats.org/officeDocument/2006/relationships" xmlns:p="http://schemas.openxmlformats.org/presentationml/2006/main">
+  <p:cSld>
+    <p:spTree>
+      <p:nvGrpSpPr>
+        <p:cNvPr id="1" name=""/>
+        <p:cNvGrpSpPr/>
+        <p:nvPr/>
+      </p:nvGrpSpPr>
+      <p:grpSpPr>
+        <a:xfrm>
+          <a:off x="0" y="0"/>
+          <a:ext cx="0" cy="0"/>
+          <a:chOff x="0" y="0"/>
+          <a:chExt cx="0" cy="0"/>
+        </a:xfrm>
+      </p:grpSpPr>
+      <p:sp>
+        <p:nvSpPr>
+          <p:cNvPr id="3" name="Content Placeholder 2"/>
+          <p:cNvSpPr>
+            <a:spLocks noGrp="1"/>
+          </p:cNvSpPr>
+          <p:nvPr>
+            <p:ph idx="1" sz="half"/>
+          </p:nvPr>
+        </p:nvSpPr>
+        <p:spPr/>
+        <p:txBody>
+          <a:bodyPr/>
+          <a:lstStyle/>
+          <a:p>
+            <a:pPr lvl="0" indent="0" marL="0">
+              <a:buNone/>
+            </a:pPr>
+            <a:r>
+              <a:rPr b="1"/>
+              <a:t>For individual structures:</a:t>
+            </a:r>
+          </a:p>
+          <a:p>
+            <a:pPr lvl="0"/>
+            <a:r>
+              <a:rPr/>
+              <a:t>Probabilistic design standards.</a:t>
+            </a:r>
+          </a:p>
+          <a:p>
+            <a:pPr lvl="0"/>
+            <a:r>
+              <a:rPr/>
+              <a:t>1-in-10,000 year return periods.</a:t>
+            </a:r>
+          </a:p>
+        </p:txBody>
+      </p:sp>
+      <p:sp>
+        <p:nvSpPr>
+          <p:cNvPr id="4" name="Content Placeholder 3"/>
+          <p:cNvSpPr>
+            <a:spLocks noGrp="1"/>
+          </p:cNvSpPr>
+          <p:nvPr>
+            <p:ph idx="2" sz="half"/>
+          </p:nvPr>
+        </p:nvSpPr>
+        <p:spPr/>
+        <p:txBody>
+          <a:bodyPr/>
+          <a:lstStyle/>
+          <a:p>
+            <a:pPr lvl="0" indent="0" marL="0">
+              <a:buNone/>
+            </a:pPr>
+            <a:r>
+              <a:rPr b="1"/>
+              <a:t>For long-term strategy:</a:t>
+            </a:r>
+          </a:p>
+          <a:p>
+            <a:pPr lvl="0"/>
+            <a:r>
+              <a:rPr/>
+              <a:t>Scenarios, not probabilities.</a:t>
+            </a:r>
+          </a:p>
+          <a:p>
+            <a:pPr lvl="0"/>
+            <a:r>
+              <a:rPr/>
+              <a:t>Four Delta Scenarios exploring divergent futures.</a:t>
+            </a:r>
+          </a:p>
+        </p:txBody>
+      </p:sp>
+    </p:spTree>
+  </p:cSld>
+</p:sld>
+</file>
+
+<file path=ppt/slides/slide13.xml><?xml version="1.0" encoding="utf-8"?>
+<p:sld xmlns:a="http://schemas.openxmlformats.org/drawingml/2006/main" xmlns:r="http://schemas.openxmlformats.org/officeDocument/2006/relationships" xmlns:p="http://schemas.openxmlformats.org/presentationml/2006/main">
+  <p:cSld>
+    <p:spTree>
+      <p:nvGrpSpPr>
+        <p:cNvPr id="1" name=""/>
+        <p:cNvGrpSpPr/>
+        <p:nvPr/>
+      </p:nvGrpSpPr>
+      <p:grpSpPr>
+        <a:xfrm>
+          <a:off x="0" y="0"/>
+          <a:ext cx="0" cy="0"/>
+          <a:chOff x="0" y="0"/>
+          <a:chExt cx="0" cy="0"/>
+        </a:xfrm>
+      </p:grpSpPr>
+      <p:sp>
+        <p:nvSpPr>
+          <p:cNvPr id="3" name="Content Placeholder 2"/>
+          <p:cNvSpPr>
+            <a:spLocks noGrp="1"/>
+          </p:cNvSpPr>
+          <p:nvPr>
+            <p:ph idx="1"/>
+          </p:nvPr>
+        </p:nvSpPr>
+        <p:spPr/>
+        <p:txBody>
+          <a:bodyPr/>
+          <a:lstStyle/>
+          <a:p>
+            <a:pPr lvl="0" indent="0" marL="0">
+              <a:buNone/>
+            </a:pPr>
+            <a:r>
+              <a:rPr/>
+              <a:t>. . .</a:t>
+            </a:r>
+          </a:p>
+          <a:p>
+            <a:pPr lvl="0" indent="0" marL="0">
+              <a:buNone/>
+            </a:pPr>
+            <a:r>
+              <a:rPr/>
+              <a:t>They used </a:t>
+            </a:r>
+            <a:r>
+              <a:rPr b="1"/>
+              <a:t>both</a:t>
+            </a:r>
+            <a:r>
+              <a:rPr/>
+              <a:t> — probabilities where they could, scenarios where they couldn’t.</a:t>
+            </a:r>
+          </a:p>
+          <a:p>
+            <a:pPr lvl="0" indent="0" marL="0">
+              <a:spcBef>
+                <a:spcPts val="3000"/>
+              </a:spcBef>
+              <a:buNone/>
+            </a:pPr>
+          </a:p>
+          <a:p>
+            <a:pPr lvl="0" indent="0" marL="1270000">
+              <a:buNone/>
+            </a:pPr>
+            <a:r>
+              <a:rPr sz="2000" b="1"/>
+              <a:t>Think-Pair-Share (90 seconds)</a:t>
+            </a:r>
+          </a:p>
+          <a:p>
+            <a:pPr lvl="0" indent="0" marL="1270000">
+              <a:buNone/>
+            </a:pPr>
+            <a:r>
+              <a:rPr sz="2000"/>
+              <a:t>Which side of the “Hold the Line vs. Adapt with Nature” debate does the Room for the River video support?</a:t>
+            </a:r>
+          </a:p>
+          <a:p>
+            <a:pPr lvl="0" indent="0" marL="1270000">
+              <a:buNone/>
+            </a:pPr>
+            <a:r>
+              <a:rPr sz="2000" b="1"/>
+              <a:t>What’s the strongest argument for the OTHER side?</a:t>
+            </a:r>
+          </a:p>
+        </p:txBody>
+      </p:sp>
+    </p:spTree>
+  </p:cSld>
+</p:sld>
+</file>
+
+<file path=ppt/slides/slide14.xml><?xml version="1.0" encoding="utf-8"?>
+<p:sld xmlns:a="http://schemas.openxmlformats.org/drawingml/2006/main" xmlns:r="http://schemas.openxmlformats.org/officeDocument/2006/relationships" xmlns:p="http://schemas.openxmlformats.org/presentationml/2006/main">
+  <p:cSld>
+    <p:spTree>
+      <p:nvGrpSpPr>
+        <p:cNvPr id="1" name=""/>
+        <p:cNvGrpSpPr/>
+        <p:nvPr/>
+      </p:nvGrpSpPr>
+      <p:grpSpPr>
+        <a:xfrm>
+          <a:off x="0" y="0"/>
+          <a:ext cx="0" cy="0"/>
+          <a:chOff x="0" y="0"/>
+          <a:chExt cx="0" cy="0"/>
+        </a:xfrm>
+      </p:grpSpPr>
+      <p:sp>
+        <p:nvSpPr>
           <p:cNvPr id="2" name="Title 1"/>
           <p:cNvSpPr>
             <a:spLocks noGrp="1"/>
@@ -4541,7 +5149,7 @@
             </a:pPr>
             <a:r>
               <a:rPr/>
-              <a:t>The Adaptive Pathways Approach</a:t>
+              <a:t>Dynamic Adaptive Policy Pathways</a:t>
             </a:r>
           </a:p>
         </p:txBody>
@@ -4569,37 +5177,70 @@
             </a:pPr>
             <a:r>
               <a:rPr b="1"/>
-              <a:t>The Core Challenge</a:t>
-            </a:r>
-          </a:p>
-          <a:p>
-            <a:pPr lvl="0" indent="0" marL="0">
-              <a:buNone/>
-            </a:pPr>
-            <a:r>
-              <a:rPr/>
-              <a:t>The Netherlands faces deep uncertainty about:</a:t>
+              <a:t>Adaptation Tipping Points</a:t>
+            </a:r>
+          </a:p>
+          <a:p>
+            <a:pPr lvl="0" indent="0" marL="0">
+              <a:buNone/>
+            </a:pPr>
+            <a:r>
+              <a:rPr/>
+              <a:t>An </a:t>
+            </a:r>
+            <a:r>
+              <a:rPr b="1"/>
+              <a:t>Adaptation Tipping Point (ATP)</a:t>
+            </a:r>
+            <a:r>
+              <a:rPr/>
+              <a:t> is the condition under which a strategy no longer meets its objectives.</a:t>
+            </a:r>
+          </a:p>
+          <a:p>
+            <a:pPr lvl="0" indent="0" marL="0">
+              <a:buNone/>
+            </a:pPr>
+            <a:r>
+              <a:rPr b="1"/>
+              <a:t>Examples:</a:t>
             </a:r>
           </a:p>
           <a:p>
             <a:pPr lvl="0"/>
             <a:r>
               <a:rPr/>
-              <a:t>How much sea level will rise (and when)</a:t>
+              <a:t>Storm surge barrier effective up to </a:t>
+            </a:r>
+            <a:r>
+              <a:rPr b="1"/>
+              <a:t>2.5m</a:t>
+            </a:r>
+            <a:r>
+              <a:rPr/>
+              <a:t> sea-level rise</a:t>
             </a:r>
           </a:p>
           <a:p>
             <a:pPr lvl="0"/>
             <a:r>
               <a:rPr/>
-              <a:t>How socioeconomic conditions will change</a:t>
+              <a:t>Current evacuation plan works for population </a:t>
+            </a:r>
+            <a:r>
+              <a:rPr b="1"/>
+              <a:t>&lt; 150,000</a:t>
             </a:r>
           </a:p>
           <a:p>
             <a:pPr lvl="0"/>
             <a:r>
               <a:rPr/>
-              <a:t>Whether existing infrastructure will be adequate in 50 or 100 years</a:t>
+              <a:t>Nature-based solutions sufficient for rainfall </a:t>
+            </a:r>
+            <a:r>
+              <a:rPr b="1"/>
+              <a:t>&lt; 150 mm/day</a:t>
             </a:r>
           </a:p>
           <a:p>
@@ -4617,23 +5258,23 @@
             </a:pPr>
             <a:r>
               <a:rPr/>
-              <a:t>Large infrastructure investments have </a:t>
+              <a:t>ATPs tell us </a:t>
             </a:r>
             <a:r>
               <a:rPr b="1"/>
-              <a:t>very long lifetimes</a:t>
-            </a:r>
-            <a:r>
-              <a:rPr/>
-              <a:t> and </a:t>
+              <a:t>when</a:t>
+            </a:r>
+            <a:r>
+              <a:rPr/>
+              <a:t> we need to adapt, not just </a:t>
             </a:r>
             <a:r>
               <a:rPr b="1"/>
-              <a:t>high lock-in</a:t>
-            </a:r>
-            <a:r>
-              <a:rPr/>
-              <a:t>.</a:t>
+              <a:t>what</a:t>
+            </a:r>
+            <a:r>
+              <a:rPr/>
+              <a:t> to adapt to.</a:t>
             </a:r>
           </a:p>
           <a:p>
@@ -4718,71 +5359,109 @@
             </a:pPr>
             <a:r>
               <a:rPr b="1"/>
-              <a:t>A Pathway Map</a:t>
-            </a:r>
-          </a:p>
-          <a:p>
-            <a:pPr lvl="0" indent="0" marL="1270000">
-              <a:buNone/>
-            </a:pPr>
-            <a:r>
-              <a:rPr sz="2000" b="1"/>
-              <a:t>Note</a:t>
-            </a:r>
-          </a:p>
-          <a:p>
-            <a:pPr lvl="0" indent="0" marL="1270000">
-              <a:buNone/>
-            </a:pPr>
-            <a:r>
-              <a:rPr sz="2000" b="1"/>
-              <a:t>Pathway Map</a:t>
-            </a:r>
-            <a:r>
-              <a:rPr sz="2000"/>
-              <a:t> — a diagram showing possible sequences of actions across time, with transitions triggered by observed conditions.</a:t>
-            </a:r>
-          </a:p>
-          <a:p>
-            <a:pPr lvl="0"/>
-            <a:r>
-              <a:rPr/>
-              <a:t>Each path represents a sequence of policy decisions</a:t>
-            </a:r>
-          </a:p>
-          <a:p>
-            <a:pPr lvl="0"/>
-            <a:r>
-              <a:rPr b="1"/>
-              <a:t>Trigger conditions</a:t>
-            </a:r>
-            <a:r>
-              <a:rPr/>
-              <a:t> mark when to switch from one action to another</a:t>
-            </a:r>
-          </a:p>
-          <a:p>
-            <a:pPr lvl="0"/>
-            <a:r>
-              <a:rPr/>
-              <a:t>Multiple paths accommodate multiple possible futures</a:t>
-            </a:r>
-          </a:p>
-          <a:p>
-            <a:pPr lvl="0"/>
-            <a:r>
-              <a:rPr/>
-              <a:t>No single path is “the plan” — the map </a:t>
-            </a:r>
-            <a:r>
-              <a:rPr i="1"/>
-              <a:t>is</a:t>
-            </a:r>
-            <a:r>
-              <a:rPr/>
-              <a:t> the plan</a:t>
-            </a:r>
-          </a:p>
+              <a:t>The Pathway Map</a:t>
+            </a:r>
+          </a:p>
+        </p:txBody>
+      </p:sp>
+      <p:pic>
+        <p:nvPicPr>
+          <p:cNvPr descr="haasnoot-2013-fig-6.jpg" id="0" name="Picture 1"/>
+          <p:cNvPicPr>
+            <a:picLocks noGrp="1" noChangeAspect="1"/>
+          </p:cNvPicPr>
+          <p:nvPr/>
+        </p:nvPicPr>
+        <p:blipFill>
+          <a:blip r:embed="rId3"/>
+          <a:stretch>
+            <a:fillRect/>
+          </a:stretch>
+        </p:blipFill>
+        <p:spPr bwMode="auto">
+          <a:xfrm>
+            <a:off x="4038600" y="203200"/>
+            <a:ext cx="4152900" cy="3873500"/>
+          </a:xfrm>
+          <a:prstGeom prst="rect">
+            <a:avLst/>
+          </a:prstGeom>
+          <a:noFill/>
+          <a:ln w="9525">
+            <a:noFill/>
+            <a:headEnd/>
+            <a:tailEnd/>
+          </a:ln>
+        </p:spPr>
+      </p:pic>
+      <p:sp>
+        <p:nvSpPr>
+          <p:cNvPr id="1" name="TextBox 3"/>
+          <p:cNvSpPr txBox="1"/>
+          <p:nvPr>
+            <p:ph idx="1"/>
+          </p:nvPr>
+        </p:nvSpPr>
+        <p:spPr>
+          <a:xfrm>
+            <a:off x="3568700" y="4076700"/>
+            <a:ext cx="5105400" cy="508000"/>
+          </a:xfrm>
+          <a:prstGeom prst="rect">
+            <a:avLst/>
+          </a:prstGeom>
+          <a:noFill/>
+        </p:spPr>
+        <p:txBody>
+          <a:bodyPr/>
+          <a:lstStyle/>
+          <a:p>
+            <a:pPr lvl="0" indent="0" marL="0" algn="ctr">
+              <a:buNone/>
+            </a:pPr>
+            <a:r>
+              <a:rPr/>
+              <a:t>Figure 4: Adaptation pathways map for water management in the Netherlands. Source: Haasnoot et al. (2013).</a:t>
+            </a:r>
+          </a:p>
+        </p:txBody>
+      </p:sp>
+    </p:spTree>
+  </p:cSld>
+</p:sld>
+</file>
+
+<file path=ppt/slides/slide15.xml><?xml version="1.0" encoding="utf-8"?>
+<p:sld xmlns:a="http://schemas.openxmlformats.org/drawingml/2006/main" xmlns:r="http://schemas.openxmlformats.org/officeDocument/2006/relationships" xmlns:p="http://schemas.openxmlformats.org/presentationml/2006/main">
+  <p:cSld>
+    <p:spTree>
+      <p:nvGrpSpPr>
+        <p:cNvPr id="1" name=""/>
+        <p:cNvGrpSpPr/>
+        <p:nvPr/>
+      </p:nvGrpSpPr>
+      <p:grpSpPr>
+        <a:xfrm>
+          <a:off x="0" y="0"/>
+          <a:ext cx="0" cy="0"/>
+          <a:chOff x="0" y="0"/>
+          <a:chExt cx="0" cy="0"/>
+        </a:xfrm>
+      </p:grpSpPr>
+      <p:sp>
+        <p:nvSpPr>
+          <p:cNvPr id="4" name="Text Placeholder 3"/>
+          <p:cNvSpPr>
+            <a:spLocks noGrp="1"/>
+          </p:cNvSpPr>
+          <p:nvPr>
+            <p:ph idx="2" sz="half" type="body"/>
+          </p:nvPr>
+        </p:nvSpPr>
+        <p:spPr/>
+        <p:txBody>
+          <a:bodyPr/>
+          <a:lstStyle/>
           <a:p>
             <a:pPr lvl="0" indent="0" marL="0">
               <a:spcBef>
@@ -4987,6 +5666,1081 @@
           </a:graphicData>
         </a:graphic>
       </p:graphicFrame>
+    </p:spTree>
+  </p:cSld>
+</p:sld>
+</file>
+
+<file path=ppt/slides/slide16.xml><?xml version="1.0" encoding="utf-8"?>
+<p:sld xmlns:a="http://schemas.openxmlformats.org/drawingml/2006/main" xmlns:r="http://schemas.openxmlformats.org/officeDocument/2006/relationships" xmlns:p="http://schemas.openxmlformats.org/presentationml/2006/main">
+  <p:cSld>
+    <p:spTree>
+      <p:nvGrpSpPr>
+        <p:cNvPr id="1" name=""/>
+        <p:cNvGrpSpPr/>
+        <p:nvPr/>
+      </p:nvGrpSpPr>
+      <p:grpSpPr>
+        <a:xfrm>
+          <a:off x="0" y="0"/>
+          <a:ext cx="0" cy="0"/>
+          <a:chOff x="0" y="0"/>
+          <a:chExt cx="0" cy="0"/>
+        </a:xfrm>
+      </p:grpSpPr>
+      <p:sp>
+        <p:nvSpPr>
+          <p:cNvPr id="2" name="Title 1"/>
+          <p:cNvSpPr>
+            <a:spLocks noGrp="1"/>
+          </p:cNvSpPr>
+          <p:nvPr>
+            <p:ph type="title"/>
+          </p:nvPr>
+        </p:nvSpPr>
+        <p:spPr/>
+        <p:txBody>
+          <a:bodyPr/>
+          <a:lstStyle/>
+          <a:p>
+            <a:pPr lvl="0" indent="0" marL="0">
+              <a:buNone/>
+            </a:pPr>
+            <a:r>
+              <a:rPr/>
+              <a:t>Wrap-up and Connecting</a:t>
+            </a:r>
+          </a:p>
+        </p:txBody>
+      </p:sp>
+      <p:sp>
+        <p:nvSpPr>
+          <p:cNvPr id="3" name="Content Placeholder 2"/>
+          <p:cNvSpPr>
+            <a:spLocks noGrp="1"/>
+          </p:cNvSpPr>
+          <p:nvPr>
+            <p:ph idx="1"/>
+          </p:nvPr>
+        </p:nvSpPr>
+        <p:spPr/>
+        <p:txBody>
+          <a:bodyPr/>
+          <a:lstStyle/>
+          <a:p>
+            <a:pPr lvl="0" indent="0" marL="0">
+              <a:spcBef>
+                <a:spcPts val="3000"/>
+              </a:spcBef>
+              <a:buNone/>
+            </a:pPr>
+          </a:p>
+          <a:p>
+            <a:pPr lvl="0" indent="0" marL="1270000">
+              <a:buNone/>
+            </a:pPr>
+            <a:r>
+              <a:rPr sz="2000" b="1"/>
+              <a:t>Write (60 seconds)</a:t>
+            </a:r>
+          </a:p>
+          <a:p>
+            <a:pPr lvl="0" indent="0" marL="1270000">
+              <a:buNone/>
+            </a:pPr>
+            <a:r>
+              <a:rPr sz="2000"/>
+              <a:t>Trace your final project through this pipeline.</a:t>
+            </a:r>
+          </a:p>
+          <a:p>
+            <a:pPr lvl="0" indent="0" marL="1270000">
+              <a:buNone/>
+            </a:pPr>
+            <a:r>
+              <a:rPr sz="2000"/>
+              <a:t>Which stages did you use? Which didn’t you need? Where did you spend the most time?</a:t>
+            </a:r>
+          </a:p>
+          <a:p>
+            <a:pPr lvl="0" indent="0" marL="0">
+              <a:spcBef>
+                <a:spcPts val="3000"/>
+              </a:spcBef>
+              <a:buNone/>
+            </a:pPr>
+            <a:r>
+              <a:rPr b="1"/>
+              <a:t>Five Questions for Any Case Study</a:t>
+            </a:r>
+          </a:p>
+          <a:p>
+            <a:pPr lvl="0" indent="-342900" marL="342900">
+              <a:buAutoNum type="arabicPeriod"/>
+            </a:pPr>
+            <a:r>
+              <a:rPr b="1"/>
+              <a:t>Decision context</a:t>
+            </a:r>
+            <a:r>
+              <a:rPr/>
+              <a:t>: Who decides? What’s at stake? What are the constraints?</a:t>
+            </a:r>
+          </a:p>
+          <a:p>
+            <a:pPr lvl="0" indent="-342900" marL="342900">
+              <a:buAutoNum type="arabicPeriod"/>
+            </a:pPr>
+            <a:r>
+              <a:rPr b="1"/>
+              <a:t>System model</a:t>
+            </a:r>
+            <a:r>
+              <a:rPr/>
+              <a:t>: What’s captured? What’s left out?</a:t>
+            </a:r>
+          </a:p>
+          <a:p>
+            <a:pPr lvl="0" indent="-342900" marL="342900">
+              <a:buAutoNum type="arabicPeriod"/>
+            </a:pPr>
+            <a:r>
+              <a:rPr b="1"/>
+              <a:t>Uncertainty characterization</a:t>
+            </a:r>
+            <a:r>
+              <a:rPr/>
+              <a:t>: Deep or well-characterized? How sampled?</a:t>
+            </a:r>
+          </a:p>
+          <a:p>
+            <a:pPr lvl="0" indent="-342900" marL="342900">
+              <a:buAutoNum type="arabicPeriod"/>
+            </a:pPr>
+            <a:r>
+              <a:rPr b="1"/>
+              <a:t>Decision framework</a:t>
+            </a:r>
+            <a:r>
+              <a:rPr/>
+              <a:t>: Static or adaptive? Single or multi-objective?</a:t>
+            </a:r>
+          </a:p>
+          <a:p>
+            <a:pPr lvl="0" indent="-342900" marL="342900">
+              <a:buAutoNum type="arabicPeriod"/>
+            </a:pPr>
+            <a:r>
+              <a:rPr b="1"/>
+              <a:t>Limits</a:t>
+            </a:r>
+            <a:r>
+              <a:rPr/>
+              <a:t>: What does this analysis NOT answer?</a:t>
+            </a:r>
+          </a:p>
+          <a:p>
+            <a:pPr lvl="0" indent="0" marL="0">
+              <a:spcBef>
+                <a:spcPts val="3000"/>
+              </a:spcBef>
+              <a:buNone/>
+            </a:pPr>
+            <a:r>
+              <a:rPr b="1"/>
+              <a:t>This Week and Next</a:t>
+            </a:r>
+          </a:p>
+          <a:p>
+            <a:pPr lvl="0"/>
+            <a:r>
+              <a:rPr b="1"/>
+              <a:t>Wednesday</a:t>
+            </a:r>
+            <a:r>
+              <a:rPr/>
+              <a:t>: Dongwook leads discussion of Steinschneider et al. (2015)</a:t>
+            </a:r>
+          </a:p>
+          <a:p>
+            <a:pPr lvl="0"/>
+            <a:r>
+              <a:rPr b="1"/>
+              <a:t>Friday, Apr 17</a:t>
+            </a:r>
+            <a:r>
+              <a:rPr/>
+              <a:t>: No lab; you are encouraged to use the time to practice your final presentation</a:t>
+            </a:r>
+          </a:p>
+          <a:p>
+            <a:pPr lvl="0"/>
+            <a:r>
+              <a:rPr b="1"/>
+              <a:t>Week 14 (Apr 20-24)</a:t>
+            </a:r>
+            <a:r>
+              <a:rPr/>
+              <a:t>: Final presentations</a:t>
+            </a:r>
+          </a:p>
+          <a:p>
+            <a:pPr lvl="0" indent="0" marL="0">
+              <a:spcBef>
+                <a:spcPts val="3000"/>
+              </a:spcBef>
+              <a:buNone/>
+            </a:pPr>
+            <a:r>
+              <a:rPr b="1"/>
+              <a:t>References</a:t>
+            </a:r>
+          </a:p>
+          <a:p>
+            <a:pPr lvl="0" indent="0" marL="0">
+              <a:buNone/>
+            </a:pPr>
+            <a:r>
+              <a:rPr/>
+              <a:t>Haasnoot, Marjolijn, Jan H Kwakkel, Warren E Walker, and Judith ter Maat. 2013. “Dynamic Adaptive Policy Pathways: A Method for Crafting Robust Decisions for a Deeply Uncertain World.” </a:t>
+            </a:r>
+            <a:r>
+              <a:rPr i="1"/>
+              <a:t>Global Environmental Change</a:t>
+            </a:r>
+            <a:r>
+              <a:rPr/>
+              <a:t> 23 (2): 485–98. </a:t>
+            </a:r>
+            <a:r>
+              <a:rPr>
+                <a:hlinkClick r:id="rId3"/>
+              </a:rPr>
+              <a:t>https://doi.org/10.1016/j.gloenvcha.2012.12.006</a:t>
+            </a:r>
+            <a:r>
+              <a:rPr/>
+              <a:t>.</a:t>
+            </a:r>
+          </a:p>
+          <a:p>
+            <a:pPr lvl="0" indent="0" marL="0">
+              <a:buNone/>
+            </a:pPr>
+            <a:r>
+              <a:rPr/>
+              <a:t>Haasnoot, M., J. Kwadijk, J. van Alphen, et al. 2020. “Adaptation to Uncertain Sea-Level Rise: How Uncertainty in Antarctic Mass-Loss Impacts the Coastal Adaptation Strategy of the Netherlands.” </a:t>
+            </a:r>
+            <a:r>
+              <a:rPr i="1"/>
+              <a:t>Environmental Research Letters</a:t>
+            </a:r>
+            <a:r>
+              <a:rPr/>
+              <a:t> 15 (3): 034007. </a:t>
+            </a:r>
+            <a:r>
+              <a:rPr>
+                <a:hlinkClick r:id="rId4"/>
+              </a:rPr>
+              <a:t>https://doi.org/10.1088/1748-9326/ab666c</a:t>
+            </a:r>
+            <a:r>
+              <a:rPr/>
+              <a:t>.</a:t>
+            </a:r>
+          </a:p>
+          <a:p>
+            <a:pPr lvl="0" indent="0" marL="0">
+              <a:buNone/>
+            </a:pPr>
+            <a:r>
+              <a:rPr/>
+              <a:t>Steinschneider, Scott, Rachel McCrary, Sungwook Wi, Kevin Mulligan, Linda O Mearns, and Casey M Brown. 2015. “Expanded Decision-Scaling Framework to Select Robust Long-Term Water-System Plans Under Hydroclimatic Uncertainties.” </a:t>
+            </a:r>
+            <a:r>
+              <a:rPr i="1"/>
+              <a:t>Journal of Water Resources Planning and Management</a:t>
+            </a:r>
+            <a:r>
+              <a:rPr/>
+              <a:t> 141 (11). </a:t>
+            </a:r>
+            <a:r>
+              <a:rPr>
+                <a:hlinkClick r:id="rId5"/>
+              </a:rPr>
+              <a:t>https://doi.org/10.1061/(asce)wr.1943-5452.0000536</a:t>
+            </a:r>
+            <a:r>
+              <a:rPr/>
+              <a:t>.</a:t>
+            </a:r>
+          </a:p>
+        </p:txBody>
+      </p:sp>
+    </p:spTree>
+  </p:cSld>
+  <p:timing>
+    <p:tnLst>
+      <p:par>
+        <p:cTn id="1" dur="indefinite" restart="never" nodeType="tmRoot">
+          <p:childTnLst>
+            <p:seq concurrent="1" nextAc="seek">
+              <p:cTn id="2" dur="indefinite" nodeType="mainSeq">
+                <p:childTnLst>
+                  <p:par>
+                    <p:cTn id="3" fill="hold">
+                      <p:stCondLst>
+                        <p:cond delay="indefinite"/>
+                      </p:stCondLst>
+                      <p:childTnLst>
+                        <p:par>
+                          <p:cTn id="4" fill="hold">
+                            <p:stCondLst>
+                              <p:cond delay="0"/>
+                            </p:stCondLst>
+                            <p:childTnLst>
+                              <p:par>
+                                <p:cTn id="5" presetID="1" presetClass="entr" presetSubtype="0" fill="hold" grpId="0" nodeType="clickEffect">
+                                  <p:stCondLst>
+                                    <p:cond delay="0"/>
+                                  </p:stCondLst>
+                                  <p:childTnLst>
+                                    <p:set>
+                                      <p:cBhvr>
+                                        <p:cTn id="6" dur="1" fill="hold">
+                                          <p:stCondLst>
+                                            <p:cond delay="0"/>
+                                          </p:stCondLst>
+                                        </p:cTn>
+                                        <p:tgtEl>
+                                          <p:spTgt spid="3">
+                                            <p:txEl>
+                                              <p:pRg st="5" end="5"/>
+                                            </p:txEl>
+                                          </p:spTgt>
+                                        </p:tgtEl>
+                                        <p:attrNameLst>
+                                          <p:attrName>style.visibility</p:attrName>
+                                        </p:attrNameLst>
+                                      </p:cBhvr>
+                                      <p:to>
+                                        <p:strVal val="visible"/>
+                                      </p:to>
+                                    </p:set>
+                                  </p:childTnLst>
+                                </p:cTn>
+                              </p:par>
+                            </p:childTnLst>
+                          </p:cTn>
+                        </p:par>
+                      </p:childTnLst>
+                    </p:cTn>
+                  </p:par>
+                  <p:par>
+                    <p:cTn id="7" fill="hold">
+                      <p:stCondLst>
+                        <p:cond delay="indefinite"/>
+                      </p:stCondLst>
+                      <p:childTnLst>
+                        <p:par>
+                          <p:cTn id="8" fill="hold">
+                            <p:stCondLst>
+                              <p:cond delay="0"/>
+                            </p:stCondLst>
+                            <p:childTnLst>
+                              <p:par>
+                                <p:cTn id="9" presetID="1" presetClass="entr" presetSubtype="0" fill="hold" grpId="0" nodeType="clickEffect">
+                                  <p:stCondLst>
+                                    <p:cond delay="0"/>
+                                  </p:stCondLst>
+                                  <p:childTnLst>
+                                    <p:set>
+                                      <p:cBhvr>
+                                        <p:cTn id="10" dur="1" fill="hold">
+                                          <p:stCondLst>
+                                            <p:cond delay="0"/>
+                                          </p:stCondLst>
+                                        </p:cTn>
+                                        <p:tgtEl>
+                                          <p:spTgt spid="3">
+                                            <p:txEl>
+                                              <p:pRg st="6" end="6"/>
+                                            </p:txEl>
+                                          </p:spTgt>
+                                        </p:tgtEl>
+                                        <p:attrNameLst>
+                                          <p:attrName>style.visibility</p:attrName>
+                                        </p:attrNameLst>
+                                      </p:cBhvr>
+                                      <p:to>
+                                        <p:strVal val="visible"/>
+                                      </p:to>
+                                    </p:set>
+                                  </p:childTnLst>
+                                </p:cTn>
+                              </p:par>
+                            </p:childTnLst>
+                          </p:cTn>
+                        </p:par>
+                      </p:childTnLst>
+                    </p:cTn>
+                  </p:par>
+                  <p:par>
+                    <p:cTn id="11" fill="hold">
+                      <p:stCondLst>
+                        <p:cond delay="indefinite"/>
+                      </p:stCondLst>
+                      <p:childTnLst>
+                        <p:par>
+                          <p:cTn id="12" fill="hold">
+                            <p:stCondLst>
+                              <p:cond delay="0"/>
+                            </p:stCondLst>
+                            <p:childTnLst>
+                              <p:par>
+                                <p:cTn id="13" presetID="1" presetClass="entr" presetSubtype="0" fill="hold" grpId="0" nodeType="clickEffect">
+                                  <p:stCondLst>
+                                    <p:cond delay="0"/>
+                                  </p:stCondLst>
+                                  <p:childTnLst>
+                                    <p:set>
+                                      <p:cBhvr>
+                                        <p:cTn id="14" dur="1" fill="hold">
+                                          <p:stCondLst>
+                                            <p:cond delay="0"/>
+                                          </p:stCondLst>
+                                        </p:cTn>
+                                        <p:tgtEl>
+                                          <p:spTgt spid="3">
+                                            <p:txEl>
+                                              <p:pRg st="7" end="7"/>
+                                            </p:txEl>
+                                          </p:spTgt>
+                                        </p:tgtEl>
+                                        <p:attrNameLst>
+                                          <p:attrName>style.visibility</p:attrName>
+                                        </p:attrNameLst>
+                                      </p:cBhvr>
+                                      <p:to>
+                                        <p:strVal val="visible"/>
+                                      </p:to>
+                                    </p:set>
+                                  </p:childTnLst>
+                                </p:cTn>
+                              </p:par>
+                            </p:childTnLst>
+                          </p:cTn>
+                        </p:par>
+                      </p:childTnLst>
+                    </p:cTn>
+                  </p:par>
+                  <p:par>
+                    <p:cTn id="15" fill="hold">
+                      <p:stCondLst>
+                        <p:cond delay="indefinite"/>
+                      </p:stCondLst>
+                      <p:childTnLst>
+                        <p:par>
+                          <p:cTn id="16" fill="hold">
+                            <p:stCondLst>
+                              <p:cond delay="0"/>
+                            </p:stCondLst>
+                            <p:childTnLst>
+                              <p:par>
+                                <p:cTn id="17" presetID="1" presetClass="entr" presetSubtype="0" fill="hold" grpId="0" nodeType="clickEffect">
+                                  <p:stCondLst>
+                                    <p:cond delay="0"/>
+                                  </p:stCondLst>
+                                  <p:childTnLst>
+                                    <p:set>
+                                      <p:cBhvr>
+                                        <p:cTn id="18" dur="1" fill="hold">
+                                          <p:stCondLst>
+                                            <p:cond delay="0"/>
+                                          </p:stCondLst>
+                                        </p:cTn>
+                                        <p:tgtEl>
+                                          <p:spTgt spid="3">
+                                            <p:txEl>
+                                              <p:pRg st="8" end="8"/>
+                                            </p:txEl>
+                                          </p:spTgt>
+                                        </p:tgtEl>
+                                        <p:attrNameLst>
+                                          <p:attrName>style.visibility</p:attrName>
+                                        </p:attrNameLst>
+                                      </p:cBhvr>
+                                      <p:to>
+                                        <p:strVal val="visible"/>
+                                      </p:to>
+                                    </p:set>
+                                  </p:childTnLst>
+                                </p:cTn>
+                              </p:par>
+                            </p:childTnLst>
+                          </p:cTn>
+                        </p:par>
+                      </p:childTnLst>
+                    </p:cTn>
+                  </p:par>
+                  <p:par>
+                    <p:cTn id="19" fill="hold">
+                      <p:stCondLst>
+                        <p:cond delay="indefinite"/>
+                      </p:stCondLst>
+                      <p:childTnLst>
+                        <p:par>
+                          <p:cTn id="20" fill="hold">
+                            <p:stCondLst>
+                              <p:cond delay="0"/>
+                            </p:stCondLst>
+                            <p:childTnLst>
+                              <p:par>
+                                <p:cTn id="21" presetID="1" presetClass="entr" presetSubtype="0" fill="hold" grpId="0" nodeType="clickEffect">
+                                  <p:stCondLst>
+                                    <p:cond delay="0"/>
+                                  </p:stCondLst>
+                                  <p:childTnLst>
+                                    <p:set>
+                                      <p:cBhvr>
+                                        <p:cTn id="22" dur="1" fill="hold">
+                                          <p:stCondLst>
+                                            <p:cond delay="0"/>
+                                          </p:stCondLst>
+                                        </p:cTn>
+                                        <p:tgtEl>
+                                          <p:spTgt spid="3">
+                                            <p:txEl>
+                                              <p:pRg st="9" end="9"/>
+                                            </p:txEl>
+                                          </p:spTgt>
+                                        </p:tgtEl>
+                                        <p:attrNameLst>
+                                          <p:attrName>style.visibility</p:attrName>
+                                        </p:attrNameLst>
+                                      </p:cBhvr>
+                                      <p:to>
+                                        <p:strVal val="visible"/>
+                                      </p:to>
+                                    </p:set>
+                                  </p:childTnLst>
+                                </p:cTn>
+                              </p:par>
+                            </p:childTnLst>
+                          </p:cTn>
+                        </p:par>
+                      </p:childTnLst>
+                    </p:cTn>
+                  </p:par>
+                  <p:par>
+                    <p:cTn id="23" fill="hold">
+                      <p:stCondLst>
+                        <p:cond delay="indefinite"/>
+                      </p:stCondLst>
+                      <p:childTnLst>
+                        <p:par>
+                          <p:cTn id="24" fill="hold">
+                            <p:stCondLst>
+                              <p:cond delay="0"/>
+                            </p:stCondLst>
+                            <p:childTnLst>
+                              <p:par>
+                                <p:cTn id="25" presetID="1" presetClass="entr" presetSubtype="0" fill="hold" grpId="0" nodeType="clickEffect">
+                                  <p:stCondLst>
+                                    <p:cond delay="0"/>
+                                  </p:stCondLst>
+                                  <p:childTnLst>
+                                    <p:set>
+                                      <p:cBhvr>
+                                        <p:cTn id="26" dur="1" fill="hold">
+                                          <p:stCondLst>
+                                            <p:cond delay="0"/>
+                                          </p:stCondLst>
+                                        </p:cTn>
+                                        <p:tgtEl>
+                                          <p:spTgt spid="3">
+                                            <p:txEl>
+                                              <p:pRg st="11" end="11"/>
+                                            </p:txEl>
+                                          </p:spTgt>
+                                        </p:tgtEl>
+                                        <p:attrNameLst>
+                                          <p:attrName>style.visibility</p:attrName>
+                                        </p:attrNameLst>
+                                      </p:cBhvr>
+                                      <p:to>
+                                        <p:strVal val="visible"/>
+                                      </p:to>
+                                    </p:set>
+                                  </p:childTnLst>
+                                </p:cTn>
+                              </p:par>
+                            </p:childTnLst>
+                          </p:cTn>
+                        </p:par>
+                      </p:childTnLst>
+                    </p:cTn>
+                  </p:par>
+                  <p:par>
+                    <p:cTn id="27" fill="hold">
+                      <p:stCondLst>
+                        <p:cond delay="indefinite"/>
+                      </p:stCondLst>
+                      <p:childTnLst>
+                        <p:par>
+                          <p:cTn id="28" fill="hold">
+                            <p:stCondLst>
+                              <p:cond delay="0"/>
+                            </p:stCondLst>
+                            <p:childTnLst>
+                              <p:par>
+                                <p:cTn id="29" presetID="1" presetClass="entr" presetSubtype="0" fill="hold" grpId="0" nodeType="clickEffect">
+                                  <p:stCondLst>
+                                    <p:cond delay="0"/>
+                                  </p:stCondLst>
+                                  <p:childTnLst>
+                                    <p:set>
+                                      <p:cBhvr>
+                                        <p:cTn id="30" dur="1" fill="hold">
+                                          <p:stCondLst>
+                                            <p:cond delay="0"/>
+                                          </p:stCondLst>
+                                        </p:cTn>
+                                        <p:tgtEl>
+                                          <p:spTgt spid="3">
+                                            <p:txEl>
+                                              <p:pRg st="12" end="12"/>
+                                            </p:txEl>
+                                          </p:spTgt>
+                                        </p:tgtEl>
+                                        <p:attrNameLst>
+                                          <p:attrName>style.visibility</p:attrName>
+                                        </p:attrNameLst>
+                                      </p:cBhvr>
+                                      <p:to>
+                                        <p:strVal val="visible"/>
+                                      </p:to>
+                                    </p:set>
+                                  </p:childTnLst>
+                                </p:cTn>
+                              </p:par>
+                            </p:childTnLst>
+                          </p:cTn>
+                        </p:par>
+                      </p:childTnLst>
+                    </p:cTn>
+                  </p:par>
+                  <p:par>
+                    <p:cTn id="31" fill="hold">
+                      <p:stCondLst>
+                        <p:cond delay="indefinite"/>
+                      </p:stCondLst>
+                      <p:childTnLst>
+                        <p:par>
+                          <p:cTn id="32" fill="hold">
+                            <p:stCondLst>
+                              <p:cond delay="0"/>
+                            </p:stCondLst>
+                            <p:childTnLst>
+                              <p:par>
+                                <p:cTn id="33" presetID="1" presetClass="entr" presetSubtype="0" fill="hold" grpId="0" nodeType="clickEffect">
+                                  <p:stCondLst>
+                                    <p:cond delay="0"/>
+                                  </p:stCondLst>
+                                  <p:childTnLst>
+                                    <p:set>
+                                      <p:cBhvr>
+                                        <p:cTn id="34" dur="1" fill="hold">
+                                          <p:stCondLst>
+                                            <p:cond delay="0"/>
+                                          </p:stCondLst>
+                                        </p:cTn>
+                                        <p:tgtEl>
+                                          <p:spTgt spid="3">
+                                            <p:txEl>
+                                              <p:pRg st="13" end="13"/>
+                                            </p:txEl>
+                                          </p:spTgt>
+                                        </p:tgtEl>
+                                        <p:attrNameLst>
+                                          <p:attrName>style.visibility</p:attrName>
+                                        </p:attrNameLst>
+                                      </p:cBhvr>
+                                      <p:to>
+                                        <p:strVal val="visible"/>
+                                      </p:to>
+                                    </p:set>
+                                  </p:childTnLst>
+                                </p:cTn>
+                              </p:par>
+                            </p:childTnLst>
+                          </p:cTn>
+                        </p:par>
+                      </p:childTnLst>
+                    </p:cTn>
+                  </p:par>
+                </p:childTnLst>
+              </p:cTn>
+              <p:prevCondLst>
+                <p:cond evt="onPrev" delay="0">
+                  <p:tgtEl>
+                    <p:sldTgt/>
+                  </p:tgtEl>
+                </p:cond>
+              </p:prevCondLst>
+              <p:nextCondLst>
+                <p:cond evt="onNext" delay="0">
+                  <p:tgtEl>
+                    <p:sldTgt/>
+                  </p:tgtEl>
+                </p:cond>
+              </p:nextCondLst>
+            </p:seq>
+          </p:childTnLst>
+        </p:cTn>
+      </p:par>
+    </p:tnLst>
+    <p:bldLst>
+      <p:bldP spid="3" grpId="0" uiExpand="1" build="p"/>
+    </p:bldLst>
+  </p:timing>
+</p:sld>
+</file>
+
+<file path=ppt/slides/slide2.xml><?xml version="1.0" encoding="utf-8"?>
+<p:sld xmlns:a="http://schemas.openxmlformats.org/drawingml/2006/main" xmlns:r="http://schemas.openxmlformats.org/officeDocument/2006/relationships" xmlns:p="http://schemas.openxmlformats.org/presentationml/2006/main">
+  <p:cSld>
+    <p:spTree>
+      <p:nvGrpSpPr>
+        <p:cNvPr id="1" name=""/>
+        <p:cNvGrpSpPr/>
+        <p:nvPr/>
+      </p:nvGrpSpPr>
+      <p:grpSpPr>
+        <a:xfrm>
+          <a:off x="0" y="0"/>
+          <a:ext cx="0" cy="0"/>
+          <a:chOff x="0" y="0"/>
+          <a:chExt cx="0" cy="0"/>
+        </a:xfrm>
+      </p:grpSpPr>
+      <p:sp>
+        <p:nvSpPr>
+          <p:cNvPr id="2" name="Title 1"/>
+          <p:cNvSpPr>
+            <a:spLocks noGrp="1"/>
+          </p:cNvSpPr>
+          <p:nvPr>
+            <p:ph type="title"/>
+          </p:nvPr>
+        </p:nvSpPr>
+        <p:spPr>
+          <a:xfrm>
+            <a:off x="457201" y="204787"/>
+            <a:ext cx="3008313" cy="871538"/>
+          </a:xfrm>
+        </p:spPr>
+        <p:txBody>
+          <a:bodyPr/>
+          <a:lstStyle/>
+          <a:p>
+            <a:pPr lvl="0" indent="0" marL="0">
+              <a:buNone/>
+            </a:pPr>
+            <a:r>
+              <a:rPr/>
+              <a:t>Background and Context</a:t>
+            </a:r>
+          </a:p>
+        </p:txBody>
+      </p:sp>
+      <p:sp>
+        <p:nvSpPr>
+          <p:cNvPr id="4" name="Text Placeholder 3"/>
+          <p:cNvSpPr>
+            <a:spLocks noGrp="1"/>
+          </p:cNvSpPr>
+          <p:nvPr>
+            <p:ph idx="2" sz="half" type="body"/>
+          </p:nvPr>
+        </p:nvSpPr>
+        <p:spPr/>
+        <p:txBody>
+          <a:bodyPr/>
+          <a:lstStyle/>
+          <a:p>
+            <a:pPr lvl="0" indent="0" marL="0">
+              <a:spcBef>
+                <a:spcPts val="3000"/>
+              </a:spcBef>
+              <a:buNone/>
+            </a:pPr>
+            <a:r>
+              <a:rPr b="1"/>
+              <a:t>The Netherlands</a:t>
+            </a:r>
+          </a:p>
+        </p:txBody>
+      </p:sp>
+      <p:pic>
+        <p:nvPicPr>
+          <p:cNvPr descr="haasnoot-antarctic-2020.jpg" id="0" name="Picture 1"/>
+          <p:cNvPicPr>
+            <a:picLocks noGrp="1" noChangeAspect="1"/>
+          </p:cNvPicPr>
+          <p:nvPr/>
+        </p:nvPicPr>
+        <p:blipFill>
+          <a:blip r:embed="rId3"/>
+          <a:stretch>
+            <a:fillRect/>
+          </a:stretch>
+        </p:blipFill>
+        <p:spPr bwMode="auto">
+          <a:xfrm>
+            <a:off x="4419600" y="203200"/>
+            <a:ext cx="3403600" cy="3873500"/>
+          </a:xfrm>
+          <a:prstGeom prst="rect">
+            <a:avLst/>
+          </a:prstGeom>
+          <a:noFill/>
+          <a:ln w="9525">
+            <a:noFill/>
+            <a:headEnd/>
+            <a:tailEnd/>
+          </a:ln>
+        </p:spPr>
+      </p:pic>
+      <p:sp>
+        <p:nvSpPr>
+          <p:cNvPr id="1" name="TextBox 3"/>
+          <p:cNvSpPr txBox="1"/>
+          <p:nvPr>
+            <p:ph idx="1"/>
+          </p:nvPr>
+        </p:nvSpPr>
+        <p:spPr>
+          <a:xfrm>
+            <a:off x="3568700" y="4076700"/>
+            <a:ext cx="5105400" cy="508000"/>
+          </a:xfrm>
+          <a:prstGeom prst="rect">
+            <a:avLst/>
+          </a:prstGeom>
+          <a:noFill/>
+        </p:spPr>
+        <p:txBody>
+          <a:bodyPr/>
+          <a:lstStyle/>
+          <a:p>
+            <a:pPr lvl="0" indent="0" marL="0" algn="ctr">
+              <a:buNone/>
+            </a:pPr>
+            <a:r>
+              <a:rPr/>
+              <a:t>Figure 1: Flood-prone zones (blue) and key flood defense infrastructure. Source: Haasnoot et al. (2020).</a:t>
+            </a:r>
+          </a:p>
+        </p:txBody>
+      </p:sp>
+    </p:spTree>
+  </p:cSld>
+</p:sld>
+</file>
+
+<file path=ppt/slides/slide3.xml><?xml version="1.0" encoding="utf-8"?>
+<p:sld xmlns:a="http://schemas.openxmlformats.org/drawingml/2006/main" xmlns:r="http://schemas.openxmlformats.org/officeDocument/2006/relationships" xmlns:p="http://schemas.openxmlformats.org/presentationml/2006/main">
+  <p:cSld>
+    <p:spTree>
+      <p:nvGrpSpPr>
+        <p:cNvPr id="1" name=""/>
+        <p:cNvGrpSpPr/>
+        <p:nvPr/>
+      </p:nvGrpSpPr>
+      <p:grpSpPr>
+        <a:xfrm>
+          <a:off x="0" y="0"/>
+          <a:ext cx="0" cy="0"/>
+          <a:chOff x="0" y="0"/>
+          <a:chExt cx="0" cy="0"/>
+        </a:xfrm>
+      </p:grpSpPr>
+      <p:sp>
+        <p:nvSpPr>
+          <p:cNvPr id="4" name="Text Placeholder 3"/>
+          <p:cNvSpPr>
+            <a:spLocks noGrp="1"/>
+          </p:cNvSpPr>
+          <p:nvPr>
+            <p:ph idx="2" sz="half" type="body"/>
+          </p:nvPr>
+        </p:nvSpPr>
+        <p:spPr/>
+        <p:txBody>
+          <a:bodyPr/>
+          <a:lstStyle/>
+          <a:p>
+            <a:pPr lvl="0" indent="0" marL="0">
+              <a:spcBef>
+                <a:spcPts val="3000"/>
+              </a:spcBef>
+              <a:buNone/>
+            </a:pPr>
+            <a:r>
+              <a:rPr b="1"/>
+              <a:t>A Long History of Flooding</a:t>
+            </a:r>
+          </a:p>
+          <a:p>
+            <a:pPr lvl="0" indent="0" marL="0">
+              <a:buNone/>
+            </a:pPr>
+            <a:r>
+              <a:rPr/>
+              <a:t>The Dutch have been fighting water for centuries.</a:t>
+            </a:r>
+          </a:p>
+          <a:p>
+            <a:pPr lvl="0"/>
+            <a:r>
+              <a:rPr b="1"/>
+              <a:t>1404, 1421:</a:t>
+            </a:r>
+            <a:r>
+              <a:rPr/>
+              <a:t> St. Elizabeth Floods reshape the coastline</a:t>
+            </a:r>
+          </a:p>
+          <a:p>
+            <a:pPr lvl="0"/>
+            <a:r>
+              <a:rPr b="1"/>
+              <a:t>1530, 1570:</a:t>
+            </a:r>
+            <a:r>
+              <a:rPr/>
+              <a:t> Catastrophic North Sea floods kill tens of thousands</a:t>
+            </a:r>
+          </a:p>
+          <a:p>
+            <a:pPr lvl="0"/>
+            <a:r>
+              <a:rPr b="1"/>
+              <a:t>1916:</a:t>
+            </a:r>
+            <a:r>
+              <a:rPr/>
+              <a:t> Zuider Zee flood triggers first modern flood protection program</a:t>
+            </a:r>
+          </a:p>
+          <a:p>
+            <a:pPr lvl="0"/>
+            <a:r>
+              <a:rPr b="1"/>
+              <a:t>1928-1943:</a:t>
+            </a:r>
+            <a:r>
+              <a:rPr/>
+              <a:t> Repeated studies find dikes “seriously defective” — repairs delayed by WWII</a:t>
+            </a:r>
+          </a:p>
+          <a:p>
+            <a:pPr lvl="0" indent="0" marL="0">
+              <a:buNone/>
+            </a:pPr>
+            <a:r>
+              <a:rPr/>
+              <a:t>. . .</a:t>
+            </a:r>
+          </a:p>
+          <a:p>
+            <a:pPr lvl="0" indent="0" marL="0">
+              <a:buNone/>
+            </a:pPr>
+            <a:r>
+              <a:rPr/>
+              <a:t>Then came 1953.</a:t>
+            </a:r>
+          </a:p>
+          <a:p>
+            <a:pPr lvl="0" indent="0" marL="0">
+              <a:spcBef>
+                <a:spcPts val="3000"/>
+              </a:spcBef>
+              <a:buNone/>
+            </a:pPr>
+            <a:r>
+              <a:rPr b="1"/>
+              <a:t>February 1, 1953</a:t>
+            </a:r>
+          </a:p>
+        </p:txBody>
+      </p:sp>
+      <p:pic>
+        <p:nvPicPr>
+          <p:cNvPr descr="flood-1953.jpg" id="0" name="Picture 1"/>
+          <p:cNvPicPr>
+            <a:picLocks noGrp="1" noChangeAspect="1"/>
+          </p:cNvPicPr>
+          <p:nvPr/>
+        </p:nvPicPr>
+        <p:blipFill>
+          <a:blip r:embed="rId3"/>
+          <a:stretch>
+            <a:fillRect/>
+          </a:stretch>
+        </p:blipFill>
+        <p:spPr bwMode="auto">
+          <a:xfrm>
+            <a:off x="3708400" y="203200"/>
+            <a:ext cx="4813300" cy="3873500"/>
+          </a:xfrm>
+          <a:prstGeom prst="rect">
+            <a:avLst/>
+          </a:prstGeom>
+          <a:noFill/>
+          <a:ln w="9525">
+            <a:noFill/>
+            <a:headEnd/>
+            <a:tailEnd/>
+          </a:ln>
+        </p:spPr>
+      </p:pic>
+      <p:sp>
+        <p:nvSpPr>
+          <p:cNvPr id="1" name="TextBox 3"/>
+          <p:cNvSpPr txBox="1"/>
+          <p:nvPr>
+            <p:ph idx="1"/>
+          </p:nvPr>
+        </p:nvSpPr>
+        <p:spPr>
+          <a:xfrm>
+            <a:off x="3568700" y="4076700"/>
+            <a:ext cx="5105400" cy="508000"/>
+          </a:xfrm>
+          <a:prstGeom prst="rect">
+            <a:avLst/>
+          </a:prstGeom>
+          <a:noFill/>
+        </p:spPr>
+        <p:txBody>
+          <a:bodyPr/>
+          <a:lstStyle/>
+          <a:p>
+            <a:pPr lvl="0" indent="0" marL="0" algn="ctr">
+              <a:buNone/>
+            </a:pPr>
+            <a:r>
+              <a:rPr/>
+              <a:t>Figure 2: Aerial view of flooding in the Netherlands, 1953. Source: Wikimedia Commons (public domain).</a:t>
+            </a:r>
+          </a:p>
+        </p:txBody>
+      </p:sp>
     </p:spTree>
   </p:cSld>
   <p:timing>
@@ -5172,154 +6926,7 @@
                                         <p:tgtEl>
                                           <p:spTgt spid="4">
                                             <p:txEl>
-                                              <p:pRg st="16" end="16"/>
-                                            </p:txEl>
-                                          </p:spTgt>
-                                        </p:tgtEl>
-                                        <p:attrNameLst>
-                                          <p:attrName>style.visibility</p:attrName>
-                                        </p:attrNameLst>
-                                      </p:cBhvr>
-                                      <p:to>
-                                        <p:strVal val="visible"/>
-                                      </p:to>
-                                    </p:set>
-                                  </p:childTnLst>
-                                </p:cTn>
-                              </p:par>
-                            </p:childTnLst>
-                          </p:cTn>
-                        </p:par>
-                      </p:childTnLst>
-                    </p:cTn>
-                  </p:par>
-                  <p:par>
-                    <p:cTn id="19" fill="hold">
-                      <p:stCondLst>
-                        <p:cond delay="indefinite"/>
-                      </p:stCondLst>
-                      <p:childTnLst>
-                        <p:par>
-                          <p:cTn id="20" fill="hold">
-                            <p:stCondLst>
-                              <p:cond delay="0"/>
-                            </p:stCondLst>
-                            <p:childTnLst>
-                              <p:par>
-                                <p:cTn id="21" presetID="1" presetClass="entr" presetSubtype="0" fill="hold" grpId="0" nodeType="clickEffect">
-                                  <p:stCondLst>
-                                    <p:cond delay="0"/>
-                                  </p:stCondLst>
-                                  <p:childTnLst>
-                                    <p:set>
-                                      <p:cBhvr>
-                                        <p:cTn id="22" dur="1" fill="hold">
-                                          <p:stCondLst>
-                                            <p:cond delay="0"/>
-                                          </p:stCondLst>
-                                        </p:cTn>
-                                        <p:tgtEl>
-                                          <p:spTgt spid="4">
-                                            <p:txEl>
-                                              <p:pRg st="17" end="17"/>
-                                            </p:txEl>
-                                          </p:spTgt>
-                                        </p:tgtEl>
-                                        <p:attrNameLst>
-                                          <p:attrName>style.visibility</p:attrName>
-                                        </p:attrNameLst>
-                                      </p:cBhvr>
-                                      <p:to>
-                                        <p:strVal val="visible"/>
-                                      </p:to>
-                                    </p:set>
-                                  </p:childTnLst>
-                                </p:cTn>
-                              </p:par>
-                            </p:childTnLst>
-                          </p:cTn>
-                        </p:par>
-                      </p:childTnLst>
-                    </p:cTn>
-                  </p:par>
-                  <p:par>
-                    <p:cTn id="23" fill="hold">
-                      <p:stCondLst>
-                        <p:cond delay="indefinite"/>
-                      </p:stCondLst>
-                      <p:childTnLst>
-                        <p:par>
-                          <p:cTn id="24" fill="hold">
-                            <p:stCondLst>
-                              <p:cond delay="0"/>
-                            </p:stCondLst>
-                            <p:childTnLst>
-                              <p:par>
-                                <p:cTn id="25" presetID="1" presetClass="entr" presetSubtype="0" fill="hold" grpId="0" nodeType="clickEffect">
-                                  <p:stCondLst>
-                                    <p:cond delay="0"/>
-                                  </p:stCondLst>
-                                  <p:childTnLst>
-                                    <p:set>
-                                      <p:cBhvr>
-                                        <p:cTn id="26" dur="1" fill="hold">
-                                          <p:stCondLst>
-                                            <p:cond delay="0"/>
-                                          </p:stCondLst>
-                                        </p:cTn>
-                                        <p:tgtEl>
-                                          <p:spTgt spid="4">
-                                            <p:txEl>
-                                              <p:pRg st="18" end="18"/>
-                                            </p:txEl>
-                                          </p:spTgt>
-                                        </p:tgtEl>
-                                        <p:attrNameLst>
-                                          <p:attrName>style.visibility</p:attrName>
-                                        </p:attrNameLst>
-                                      </p:cBhvr>
-                                      <p:to>
-                                        <p:strVal val="visible"/>
-                                      </p:to>
-                                    </p:set>
-                                  </p:childTnLst>
-                                </p:cTn>
-                              </p:par>
-                            </p:childTnLst>
-                          </p:cTn>
-                        </p:par>
-                      </p:childTnLst>
-                    </p:cTn>
-                  </p:par>
-                  <p:par>
-                    <p:cTn id="27" fill="hold">
-                      <p:stCondLst>
-                        <p:cond delay="indefinite"/>
-                      </p:stCondLst>
-                      <p:childTnLst>
-                        <p:par>
-                          <p:cTn id="28" fill="hold">
-                            <p:stCondLst>
-                              <p:cond delay="0"/>
-                            </p:stCondLst>
-                            <p:childTnLst>
-                              <p:par>
-                                <p:cTn id="29" presetID="1" presetClass="entr" presetSubtype="0" fill="hold" grpId="0" nodeType="clickEffect">
-                                  <p:stCondLst>
-                                    <p:cond delay="0"/>
-                                  </p:stCondLst>
-                                  <p:childTnLst>
-                                    <p:set>
-                                      <p:cBhvr>
-                                        <p:cTn id="30" dur="1" fill="hold">
-                                          <p:stCondLst>
-                                            <p:cond delay="0"/>
-                                          </p:stCondLst>
-                                        </p:cTn>
-                                        <p:tgtEl>
-                                          <p:spTgt spid="4">
-                                            <p:txEl>
-                                              <p:pRg st="19" end="19"/>
+                                              <p:pRg st="5" end="5"/>
                                             </p:txEl>
                                           </p:spTgt>
                                         </p:tgtEl>
@@ -5387,37 +6994,12 @@
       </p:grpSpPr>
       <p:sp>
         <p:nvSpPr>
-          <p:cNvPr id="2" name="Title 1"/>
-          <p:cNvSpPr>
-            <a:spLocks noGrp="1"/>
-          </p:cNvSpPr>
-          <p:nvPr>
-            <p:ph type="title"/>
-          </p:nvPr>
-        </p:nvSpPr>
-        <p:spPr/>
-        <p:txBody>
-          <a:bodyPr/>
-          <a:lstStyle/>
-          <a:p>
-            <a:pPr lvl="0" indent="0" marL="0">
-              <a:buNone/>
-            </a:pPr>
-            <a:r>
-              <a:rPr/>
-              <a:t>Methods in the Wild</a:t>
-            </a:r>
-          </a:p>
-        </p:txBody>
-      </p:sp>
-      <p:sp>
-        <p:nvSpPr>
-          <p:cNvPr id="3" name="Content Placeholder 2"/>
-          <p:cNvSpPr>
-            <a:spLocks noGrp="1"/>
-          </p:cNvSpPr>
-          <p:nvPr>
-            <p:ph idx="1"/>
+          <p:cNvPr id="4" name="Text Placeholder 3"/>
+          <p:cNvSpPr>
+            <a:spLocks noGrp="1"/>
+          </p:cNvSpPr>
+          <p:nvPr>
+            <p:ph idx="2" sz="half" type="body"/>
           </p:nvPr>
         </p:nvSpPr>
         <p:spPr/>
@@ -5433,57 +7015,53 @@
             </a:pPr>
             <a:r>
               <a:rPr b="1"/>
-              <a:t>Exploratory Modeling → Identify the Landscape</a:t>
-            </a:r>
-          </a:p>
-          <a:p>
-            <a:pPr lvl="0" indent="0" marL="0">
-              <a:buNone/>
-            </a:pPr>
-            <a:r>
-              <a:rPr/>
-              <a:t>Run the system model across a large ensemble of futures:</a:t>
+              <a:t>“Never Again”</a:t>
+            </a:r>
+          </a:p>
+          <a:p>
+            <a:pPr lvl="0" indent="0" marL="0">
+              <a:buNone/>
+            </a:pPr>
+            <a:r>
+              <a:rPr/>
+              <a:t>The 1953 disaster reshaped Dutch politics.</a:t>
             </a:r>
           </a:p>
           <a:p>
             <a:pPr lvl="0"/>
             <a:r>
               <a:rPr/>
-              <a:t>Vary: sea-level rise trajectories, precipitation, demand, socioeconomic growth</a:t>
+              <a:t>The </a:t>
+            </a:r>
+            <a:r>
+              <a:rPr b="1"/>
+              <a:t>Delta Commission</a:t>
+            </a:r>
+            <a:r>
+              <a:rPr/>
+              <a:t> was formed within weeks</a:t>
             </a:r>
           </a:p>
           <a:p>
             <a:pPr lvl="0"/>
             <a:r>
+              <a:rPr/>
+              <a:t>Parliament committed to a </a:t>
+            </a:r>
+            <a:r>
               <a:rPr b="1"/>
-              <a:t>Not</a:t>
-            </a:r>
-            <a:r>
-              <a:rPr/>
-              <a:t>: calibrate to a single best estimate</a:t>
+              <a:t>1-in-10,000 year</a:t>
+            </a:r>
+            <a:r>
+              <a:rPr/>
+              <a:t> protection standard for critical infrastructure</a:t>
             </a:r>
           </a:p>
           <a:p>
             <a:pPr lvl="0"/>
             <a:r>
               <a:rPr/>
-              <a:t>Goal: map out </a:t>
-            </a:r>
-            <a:r>
-              <a:rPr i="1"/>
-              <a:t>where</a:t>
-            </a:r>
-            <a:r>
-              <a:rPr/>
-              <a:t> current strategies succeed and </a:t>
-            </a:r>
-            <a:r>
-              <a:rPr i="1"/>
-              <a:t>where</a:t>
-            </a:r>
-            <a:r>
-              <a:rPr/>
-              <a:t> they fail</a:t>
+              <a:t>The result: a 40-year, multi-billion euro construction program</a:t>
             </a:r>
           </a:p>
           <a:p>
@@ -5495,765 +7073,81 @@
             </a:pPr>
             <a:r>
               <a:rPr b="1"/>
-              <a:t>Scenario Discovery → Find the Triggers</a:t>
-            </a:r>
-          </a:p>
-          <a:p>
-            <a:pPr lvl="0" indent="0" marL="0">
-              <a:buNone/>
-            </a:pPr>
-            <a:r>
-              <a:rPr/>
-              <a:t>Use PRIM or similar to find:</a:t>
-            </a:r>
-          </a:p>
-          <a:p>
-            <a:pPr lvl="0" indent="0" marL="1270000">
-              <a:buNone/>
-            </a:pPr>
-            <a:r>
-              <a:rPr sz="2000"/>
-              <a:t>“Under what combinations of future conditions does the current strategy become inadequate?”</a:t>
-            </a:r>
-          </a:p>
-          <a:p>
-            <a:pPr lvl="0" indent="0" marL="0">
-              <a:buNone/>
-            </a:pPr>
-            <a:r>
-              <a:rPr/>
-              <a:t>. . .</a:t>
-            </a:r>
-          </a:p>
-          <a:p>
-            <a:pPr lvl="0" indent="0" marL="0">
-              <a:buNone/>
-            </a:pPr>
-            <a:r>
-              <a:rPr/>
-              <a:t>Those failure conditions become the </a:t>
-            </a:r>
-            <a:r>
-              <a:rPr b="1"/>
-              <a:t>trigger thresholds</a:t>
-            </a:r>
-            <a:r>
-              <a:rPr/>
-              <a:t> in the pathway map.</a:t>
-            </a:r>
-          </a:p>
-          <a:p>
-            <a:pPr lvl="0" indent="0" marL="0">
-              <a:spcBef>
-                <a:spcPts val="3000"/>
-              </a:spcBef>
-              <a:buNone/>
-            </a:pPr>
-            <a:r>
-              <a:rPr b="1"/>
-              <a:t>Sequential Decisions → Design the Pathways</a:t>
-            </a:r>
-          </a:p>
-          <a:p>
-            <a:pPr lvl="0" indent="0" marL="0">
-              <a:buNone/>
-            </a:pPr>
-            <a:r>
-              <a:rPr/>
-              <a:t>Once you know the triggers, design the sequences:</a:t>
-            </a:r>
-          </a:p>
-          <a:p>
-            <a:pPr lvl="0"/>
-            <a:r>
-              <a:rPr/>
-              <a:t>What actions are available at each decision point?</a:t>
-            </a:r>
-          </a:p>
-          <a:p>
-            <a:pPr lvl="0"/>
-            <a:r>
-              <a:rPr/>
-              <a:t>What are the path dependencies? (some options foreclose others)</a:t>
-            </a:r>
-          </a:p>
-          <a:p>
-            <a:pPr lvl="0"/>
-            <a:r>
-              <a:rPr/>
-              <a:t>Which sequences are robust across many futures?</a:t>
-            </a:r>
-          </a:p>
-          <a:p>
-            <a:pPr lvl="0" indent="0" marL="0">
-              <a:buNone/>
-            </a:pPr>
-            <a:r>
-              <a:rPr/>
-              <a:t>. . .</a:t>
-            </a:r>
-          </a:p>
-          <a:p>
-            <a:pPr lvl="0" indent="0" marL="0">
-              <a:buNone/>
-            </a:pPr>
-            <a:r>
-              <a:rPr/>
-              <a:t>This is Week 11 content applied at the </a:t>
-            </a:r>
-            <a:r>
-              <a:rPr b="1"/>
-              <a:t>portfolio level</a:t>
-            </a:r>
-            <a:r>
-              <a:rPr/>
-              <a:t>, not just the individual decision level.</a:t>
-            </a:r>
-          </a:p>
-          <a:p>
-            <a:pPr lvl="0" indent="0" marL="0">
-              <a:spcBef>
-                <a:spcPts val="3000"/>
-              </a:spcBef>
-              <a:buNone/>
-            </a:pPr>
-            <a:r>
-              <a:rPr b="1"/>
-              <a:t>Multi-Objective → Evaluate the Pathways</a:t>
-            </a:r>
-          </a:p>
-          <a:p>
-            <a:pPr lvl="0" indent="0" marL="0">
-              <a:buNone/>
-            </a:pPr>
-            <a:r>
-              <a:rPr/>
-              <a:t>Pathways are evaluated on multiple objectives simultaneously:</a:t>
-            </a:r>
-          </a:p>
-          <a:p>
-            <a:pPr lvl="0"/>
-            <a:r>
-              <a:rPr b="1"/>
-              <a:t>Cost</a:t>
-            </a:r>
-            <a:r>
-              <a:rPr/>
-              <a:t>: upfront and lifecycle</a:t>
-            </a:r>
-          </a:p>
-          <a:p>
-            <a:pPr lvl="0"/>
-            <a:r>
-              <a:rPr b="1"/>
-              <a:t>Safety</a:t>
-            </a:r>
-            <a:r>
-              <a:rPr/>
-              <a:t>: flood risk reduction across scenarios</a:t>
-            </a:r>
-          </a:p>
-          <a:p>
-            <a:pPr lvl="0"/>
-            <a:r>
-              <a:rPr b="1"/>
-              <a:t>Flexibility</a:t>
-            </a:r>
-            <a:r>
-              <a:rPr/>
-              <a:t>: how many options remain open?</a:t>
-            </a:r>
-          </a:p>
-          <a:p>
-            <a:pPr lvl="0"/>
-            <a:r>
-              <a:rPr b="1"/>
-              <a:t>Co-benefits</a:t>
-            </a:r>
-            <a:r>
-              <a:rPr/>
-              <a:t>: ecosystem services, recreation, equity</a:t>
-            </a:r>
-          </a:p>
-          <a:p>
-            <a:pPr lvl="0" indent="0" marL="0">
-              <a:buNone/>
-            </a:pPr>
-            <a:r>
-              <a:rPr/>
-              <a:t>. . .</a:t>
-            </a:r>
-          </a:p>
-          <a:p>
-            <a:pPr lvl="0" indent="0" marL="0">
-              <a:buNone/>
-            </a:pPr>
-            <a:r>
-              <a:rPr/>
-              <a:t>No single pathway dominates on all objectives → trade-off visualization (Week 12).</a:t>
-            </a:r>
-          </a:p>
-          <a:p>
-            <a:pPr lvl="0" indent="0" marL="0">
-              <a:spcBef>
-                <a:spcPts val="3000"/>
-              </a:spcBef>
-              <a:buNone/>
-            </a:pPr>
-            <a:r>
-              <a:rPr b="1"/>
-              <a:t>The Integrated Analysis Pipeline</a:t>
-            </a:r>
-          </a:p>
-          <a:p>
-            <a:pPr lvl="0" indent="0">
-              <a:buNone/>
-            </a:pPr>
-            <a:r>
-              <a:rPr>
-                <a:latin typeface="Courier"/>
+              <a:t>The </a:t>
+            </a:r>
+            <a:r>
+              <a:rPr b="1">
+                <a:hlinkClick r:id="rId3"/>
               </a:rPr>
-              <a:t>Exploratory Modeling
-        ↓
-  large ensemble of futures
-Scenario Discovery
-        ↓
-  trigger conditions (when to adapt)
-Sequential Decision Design
-        ↓
-  pathway sequences (what to do)
-Multi-Objective Evaluation
-        ↓
-  pathway trade-offs (which to recommend)</a:t>
+              <a:t>Delta Works</a:t>
+            </a:r>
+          </a:p>
+        </p:txBody>
+      </p:sp>
+      <p:pic>
+        <p:nvPicPr>
+          <p:cNvPr descr="maeslantkering.jpg" id="0" name="Picture 1"/>
+          <p:cNvPicPr>
+            <a:picLocks noGrp="1" noChangeAspect="1"/>
+          </p:cNvPicPr>
+          <p:nvPr/>
+        </p:nvPicPr>
+        <p:blipFill>
+          <a:blip r:embed="rId4"/>
+          <a:stretch>
+            <a:fillRect/>
+          </a:stretch>
+        </p:blipFill>
+        <p:spPr bwMode="auto">
+          <a:xfrm>
+            <a:off x="3568700" y="228600"/>
+            <a:ext cx="5105400" cy="3835400"/>
+          </a:xfrm>
+          <a:prstGeom prst="rect">
+            <a:avLst/>
+          </a:prstGeom>
+          <a:noFill/>
+          <a:ln w="9525">
+            <a:noFill/>
+            <a:headEnd/>
+            <a:tailEnd/>
+          </a:ln>
+        </p:spPr>
+      </p:pic>
+      <p:sp>
+        <p:nvSpPr>
+          <p:cNvPr id="1" name="TextBox 3"/>
+          <p:cNvSpPr txBox="1"/>
+          <p:nvPr>
+            <p:ph idx="1"/>
+          </p:nvPr>
+        </p:nvSpPr>
+        <p:spPr>
+          <a:xfrm>
+            <a:off x="3568700" y="4076700"/>
+            <a:ext cx="5105400" cy="508000"/>
+          </a:xfrm>
+          <a:prstGeom prst="rect">
+            <a:avLst/>
+          </a:prstGeom>
+          <a:noFill/>
+        </p:spPr>
+        <p:txBody>
+          <a:bodyPr/>
+          <a:lstStyle/>
+          <a:p>
+            <a:pPr lvl="0" indent="0" marL="0" algn="ctr">
+              <a:buNone/>
+            </a:pPr>
+            <a:r>
+              <a:rPr/>
+              <a:t>Figure 3: The Maeslantkering storm surge barrier. Source: Wikimedia Commons / Rens Jacobs (CC BY-SA).</a:t>
             </a:r>
           </a:p>
         </p:txBody>
       </p:sp>
     </p:spTree>
   </p:cSld>
-  <p:timing>
-    <p:tnLst>
-      <p:par>
-        <p:cTn id="1" dur="indefinite" restart="never" nodeType="tmRoot">
-          <p:childTnLst>
-            <p:seq concurrent="1" nextAc="seek">
-              <p:cTn id="2" dur="indefinite" nodeType="mainSeq">
-                <p:childTnLst>
-                  <p:par>
-                    <p:cTn id="3" fill="hold">
-                      <p:stCondLst>
-                        <p:cond delay="indefinite"/>
-                      </p:stCondLst>
-                      <p:childTnLst>
-                        <p:par>
-                          <p:cTn id="4" fill="hold">
-                            <p:stCondLst>
-                              <p:cond delay="0"/>
-                            </p:stCondLst>
-                            <p:childTnLst>
-                              <p:par>
-                                <p:cTn id="5" presetID="1" presetClass="entr" presetSubtype="0" fill="hold" grpId="0" nodeType="clickEffect">
-                                  <p:stCondLst>
-                                    <p:cond delay="0"/>
-                                  </p:stCondLst>
-                                  <p:childTnLst>
-                                    <p:set>
-                                      <p:cBhvr>
-                                        <p:cTn id="6" dur="1" fill="hold">
-                                          <p:stCondLst>
-                                            <p:cond delay="0"/>
-                                          </p:stCondLst>
-                                        </p:cTn>
-                                        <p:tgtEl>
-                                          <p:spTgt spid="3">
-                                            <p:txEl>
-                                              <p:pRg st="2" end="2"/>
-                                            </p:txEl>
-                                          </p:spTgt>
-                                        </p:tgtEl>
-                                        <p:attrNameLst>
-                                          <p:attrName>style.visibility</p:attrName>
-                                        </p:attrNameLst>
-                                      </p:cBhvr>
-                                      <p:to>
-                                        <p:strVal val="visible"/>
-                                      </p:to>
-                                    </p:set>
-                                  </p:childTnLst>
-                                </p:cTn>
-                              </p:par>
-                            </p:childTnLst>
-                          </p:cTn>
-                        </p:par>
-                      </p:childTnLst>
-                    </p:cTn>
-                  </p:par>
-                  <p:par>
-                    <p:cTn id="7" fill="hold">
-                      <p:stCondLst>
-                        <p:cond delay="indefinite"/>
-                      </p:stCondLst>
-                      <p:childTnLst>
-                        <p:par>
-                          <p:cTn id="8" fill="hold">
-                            <p:stCondLst>
-                              <p:cond delay="0"/>
-                            </p:stCondLst>
-                            <p:childTnLst>
-                              <p:par>
-                                <p:cTn id="9" presetID="1" presetClass="entr" presetSubtype="0" fill="hold" grpId="0" nodeType="clickEffect">
-                                  <p:stCondLst>
-                                    <p:cond delay="0"/>
-                                  </p:stCondLst>
-                                  <p:childTnLst>
-                                    <p:set>
-                                      <p:cBhvr>
-                                        <p:cTn id="10" dur="1" fill="hold">
-                                          <p:stCondLst>
-                                            <p:cond delay="0"/>
-                                          </p:stCondLst>
-                                        </p:cTn>
-                                        <p:tgtEl>
-                                          <p:spTgt spid="3">
-                                            <p:txEl>
-                                              <p:pRg st="3" end="3"/>
-                                            </p:txEl>
-                                          </p:spTgt>
-                                        </p:tgtEl>
-                                        <p:attrNameLst>
-                                          <p:attrName>style.visibility</p:attrName>
-                                        </p:attrNameLst>
-                                      </p:cBhvr>
-                                      <p:to>
-                                        <p:strVal val="visible"/>
-                                      </p:to>
-                                    </p:set>
-                                  </p:childTnLst>
-                                </p:cTn>
-                              </p:par>
-                            </p:childTnLst>
-                          </p:cTn>
-                        </p:par>
-                      </p:childTnLst>
-                    </p:cTn>
-                  </p:par>
-                  <p:par>
-                    <p:cTn id="11" fill="hold">
-                      <p:stCondLst>
-                        <p:cond delay="indefinite"/>
-                      </p:stCondLst>
-                      <p:childTnLst>
-                        <p:par>
-                          <p:cTn id="12" fill="hold">
-                            <p:stCondLst>
-                              <p:cond delay="0"/>
-                            </p:stCondLst>
-                            <p:childTnLst>
-                              <p:par>
-                                <p:cTn id="13" presetID="1" presetClass="entr" presetSubtype="0" fill="hold" grpId="0" nodeType="clickEffect">
-                                  <p:stCondLst>
-                                    <p:cond delay="0"/>
-                                  </p:stCondLst>
-                                  <p:childTnLst>
-                                    <p:set>
-                                      <p:cBhvr>
-                                        <p:cTn id="14" dur="1" fill="hold">
-                                          <p:stCondLst>
-                                            <p:cond delay="0"/>
-                                          </p:stCondLst>
-                                        </p:cTn>
-                                        <p:tgtEl>
-                                          <p:spTgt spid="3">
-                                            <p:txEl>
-                                              <p:pRg st="4" end="4"/>
-                                            </p:txEl>
-                                          </p:spTgt>
-                                        </p:tgtEl>
-                                        <p:attrNameLst>
-                                          <p:attrName>style.visibility</p:attrName>
-                                        </p:attrNameLst>
-                                      </p:cBhvr>
-                                      <p:to>
-                                        <p:strVal val="visible"/>
-                                      </p:to>
-                                    </p:set>
-                                  </p:childTnLst>
-                                </p:cTn>
-                              </p:par>
-                            </p:childTnLst>
-                          </p:cTn>
-                        </p:par>
-                      </p:childTnLst>
-                    </p:cTn>
-                  </p:par>
-                  <p:par>
-                    <p:cTn id="15" fill="hold">
-                      <p:stCondLst>
-                        <p:cond delay="indefinite"/>
-                      </p:stCondLst>
-                      <p:childTnLst>
-                        <p:par>
-                          <p:cTn id="16" fill="hold">
-                            <p:stCondLst>
-                              <p:cond delay="0"/>
-                            </p:stCondLst>
-                            <p:childTnLst>
-                              <p:par>
-                                <p:cTn id="17" presetID="1" presetClass="entr" presetSubtype="0" fill="hold" grpId="0" nodeType="clickEffect">
-                                  <p:stCondLst>
-                                    <p:cond delay="0"/>
-                                  </p:stCondLst>
-                                  <p:childTnLst>
-                                    <p:set>
-                                      <p:cBhvr>
-                                        <p:cTn id="18" dur="1" fill="hold">
-                                          <p:stCondLst>
-                                            <p:cond delay="0"/>
-                                          </p:stCondLst>
-                                        </p:cTn>
-                                        <p:tgtEl>
-                                          <p:spTgt spid="3">
-                                            <p:txEl>
-                                              <p:pRg st="12" end="12"/>
-                                            </p:txEl>
-                                          </p:spTgt>
-                                        </p:tgtEl>
-                                        <p:attrNameLst>
-                                          <p:attrName>style.visibility</p:attrName>
-                                        </p:attrNameLst>
-                                      </p:cBhvr>
-                                      <p:to>
-                                        <p:strVal val="visible"/>
-                                      </p:to>
-                                    </p:set>
-                                  </p:childTnLst>
-                                </p:cTn>
-                              </p:par>
-                            </p:childTnLst>
-                          </p:cTn>
-                        </p:par>
-                      </p:childTnLst>
-                    </p:cTn>
-                  </p:par>
-                  <p:par>
-                    <p:cTn id="19" fill="hold">
-                      <p:stCondLst>
-                        <p:cond delay="indefinite"/>
-                      </p:stCondLst>
-                      <p:childTnLst>
-                        <p:par>
-                          <p:cTn id="20" fill="hold">
-                            <p:stCondLst>
-                              <p:cond delay="0"/>
-                            </p:stCondLst>
-                            <p:childTnLst>
-                              <p:par>
-                                <p:cTn id="21" presetID="1" presetClass="entr" presetSubtype="0" fill="hold" grpId="0" nodeType="clickEffect">
-                                  <p:stCondLst>
-                                    <p:cond delay="0"/>
-                                  </p:stCondLst>
-                                  <p:childTnLst>
-                                    <p:set>
-                                      <p:cBhvr>
-                                        <p:cTn id="22" dur="1" fill="hold">
-                                          <p:stCondLst>
-                                            <p:cond delay="0"/>
-                                          </p:stCondLst>
-                                        </p:cTn>
-                                        <p:tgtEl>
-                                          <p:spTgt spid="3">
-                                            <p:txEl>
-                                              <p:pRg st="13" end="13"/>
-                                            </p:txEl>
-                                          </p:spTgt>
-                                        </p:tgtEl>
-                                        <p:attrNameLst>
-                                          <p:attrName>style.visibility</p:attrName>
-                                        </p:attrNameLst>
-                                      </p:cBhvr>
-                                      <p:to>
-                                        <p:strVal val="visible"/>
-                                      </p:to>
-                                    </p:set>
-                                  </p:childTnLst>
-                                </p:cTn>
-                              </p:par>
-                            </p:childTnLst>
-                          </p:cTn>
-                        </p:par>
-                      </p:childTnLst>
-                    </p:cTn>
-                  </p:par>
-                  <p:par>
-                    <p:cTn id="23" fill="hold">
-                      <p:stCondLst>
-                        <p:cond delay="indefinite"/>
-                      </p:stCondLst>
-                      <p:childTnLst>
-                        <p:par>
-                          <p:cTn id="24" fill="hold">
-                            <p:stCondLst>
-                              <p:cond delay="0"/>
-                            </p:stCondLst>
-                            <p:childTnLst>
-                              <p:par>
-                                <p:cTn id="25" presetID="1" presetClass="entr" presetSubtype="0" fill="hold" grpId="0" nodeType="clickEffect">
-                                  <p:stCondLst>
-                                    <p:cond delay="0"/>
-                                  </p:stCondLst>
-                                  <p:childTnLst>
-                                    <p:set>
-                                      <p:cBhvr>
-                                        <p:cTn id="26" dur="1" fill="hold">
-                                          <p:stCondLst>
-                                            <p:cond delay="0"/>
-                                          </p:stCondLst>
-                                        </p:cTn>
-                                        <p:tgtEl>
-                                          <p:spTgt spid="3">
-                                            <p:txEl>
-                                              <p:pRg st="14" end="14"/>
-                                            </p:txEl>
-                                          </p:spTgt>
-                                        </p:tgtEl>
-                                        <p:attrNameLst>
-                                          <p:attrName>style.visibility</p:attrName>
-                                        </p:attrNameLst>
-                                      </p:cBhvr>
-                                      <p:to>
-                                        <p:strVal val="visible"/>
-                                      </p:to>
-                                    </p:set>
-                                  </p:childTnLst>
-                                </p:cTn>
-                              </p:par>
-                            </p:childTnLst>
-                          </p:cTn>
-                        </p:par>
-                      </p:childTnLst>
-                    </p:cTn>
-                  </p:par>
-                  <p:par>
-                    <p:cTn id="27" fill="hold">
-                      <p:stCondLst>
-                        <p:cond delay="indefinite"/>
-                      </p:stCondLst>
-                      <p:childTnLst>
-                        <p:par>
-                          <p:cTn id="28" fill="hold">
-                            <p:stCondLst>
-                              <p:cond delay="0"/>
-                            </p:stCondLst>
-                            <p:childTnLst>
-                              <p:par>
-                                <p:cTn id="29" presetID="1" presetClass="entr" presetSubtype="0" fill="hold" grpId="0" nodeType="clickEffect">
-                                  <p:stCondLst>
-                                    <p:cond delay="0"/>
-                                  </p:stCondLst>
-                                  <p:childTnLst>
-                                    <p:set>
-                                      <p:cBhvr>
-                                        <p:cTn id="30" dur="1" fill="hold">
-                                          <p:stCondLst>
-                                            <p:cond delay="0"/>
-                                          </p:stCondLst>
-                                        </p:cTn>
-                                        <p:tgtEl>
-                                          <p:spTgt spid="3">
-                                            <p:txEl>
-                                              <p:pRg st="19" end="19"/>
-                                            </p:txEl>
-                                          </p:spTgt>
-                                        </p:tgtEl>
-                                        <p:attrNameLst>
-                                          <p:attrName>style.visibility</p:attrName>
-                                        </p:attrNameLst>
-                                      </p:cBhvr>
-                                      <p:to>
-                                        <p:strVal val="visible"/>
-                                      </p:to>
-                                    </p:set>
-                                  </p:childTnLst>
-                                </p:cTn>
-                              </p:par>
-                            </p:childTnLst>
-                          </p:cTn>
-                        </p:par>
-                      </p:childTnLst>
-                    </p:cTn>
-                  </p:par>
-                  <p:par>
-                    <p:cTn id="31" fill="hold">
-                      <p:stCondLst>
-                        <p:cond delay="indefinite"/>
-                      </p:stCondLst>
-                      <p:childTnLst>
-                        <p:par>
-                          <p:cTn id="32" fill="hold">
-                            <p:stCondLst>
-                              <p:cond delay="0"/>
-                            </p:stCondLst>
-                            <p:childTnLst>
-                              <p:par>
-                                <p:cTn id="33" presetID="1" presetClass="entr" presetSubtype="0" fill="hold" grpId="0" nodeType="clickEffect">
-                                  <p:stCondLst>
-                                    <p:cond delay="0"/>
-                                  </p:stCondLst>
-                                  <p:childTnLst>
-                                    <p:set>
-                                      <p:cBhvr>
-                                        <p:cTn id="34" dur="1" fill="hold">
-                                          <p:stCondLst>
-                                            <p:cond delay="0"/>
-                                          </p:stCondLst>
-                                        </p:cTn>
-                                        <p:tgtEl>
-                                          <p:spTgt spid="3">
-                                            <p:txEl>
-                                              <p:pRg st="20" end="20"/>
-                                            </p:txEl>
-                                          </p:spTgt>
-                                        </p:tgtEl>
-                                        <p:attrNameLst>
-                                          <p:attrName>style.visibility</p:attrName>
-                                        </p:attrNameLst>
-                                      </p:cBhvr>
-                                      <p:to>
-                                        <p:strVal val="visible"/>
-                                      </p:to>
-                                    </p:set>
-                                  </p:childTnLst>
-                                </p:cTn>
-                              </p:par>
-                            </p:childTnLst>
-                          </p:cTn>
-                        </p:par>
-                      </p:childTnLst>
-                    </p:cTn>
-                  </p:par>
-                  <p:par>
-                    <p:cTn id="35" fill="hold">
-                      <p:stCondLst>
-                        <p:cond delay="indefinite"/>
-                      </p:stCondLst>
-                      <p:childTnLst>
-                        <p:par>
-                          <p:cTn id="36" fill="hold">
-                            <p:stCondLst>
-                              <p:cond delay="0"/>
-                            </p:stCondLst>
-                            <p:childTnLst>
-                              <p:par>
-                                <p:cTn id="37" presetID="1" presetClass="entr" presetSubtype="0" fill="hold" grpId="0" nodeType="clickEffect">
-                                  <p:stCondLst>
-                                    <p:cond delay="0"/>
-                                  </p:stCondLst>
-                                  <p:childTnLst>
-                                    <p:set>
-                                      <p:cBhvr>
-                                        <p:cTn id="38" dur="1" fill="hold">
-                                          <p:stCondLst>
-                                            <p:cond delay="0"/>
-                                          </p:stCondLst>
-                                        </p:cTn>
-                                        <p:tgtEl>
-                                          <p:spTgt spid="3">
-                                            <p:txEl>
-                                              <p:pRg st="21" end="21"/>
-                                            </p:txEl>
-                                          </p:spTgt>
-                                        </p:tgtEl>
-                                        <p:attrNameLst>
-                                          <p:attrName>style.visibility</p:attrName>
-                                        </p:attrNameLst>
-                                      </p:cBhvr>
-                                      <p:to>
-                                        <p:strVal val="visible"/>
-                                      </p:to>
-                                    </p:set>
-                                  </p:childTnLst>
-                                </p:cTn>
-                              </p:par>
-                            </p:childTnLst>
-                          </p:cTn>
-                        </p:par>
-                      </p:childTnLst>
-                    </p:cTn>
-                  </p:par>
-                  <p:par>
-                    <p:cTn id="39" fill="hold">
-                      <p:stCondLst>
-                        <p:cond delay="indefinite"/>
-                      </p:stCondLst>
-                      <p:childTnLst>
-                        <p:par>
-                          <p:cTn id="40" fill="hold">
-                            <p:stCondLst>
-                              <p:cond delay="0"/>
-                            </p:stCondLst>
-                            <p:childTnLst>
-                              <p:par>
-                                <p:cTn id="41" presetID="1" presetClass="entr" presetSubtype="0" fill="hold" grpId="0" nodeType="clickEffect">
-                                  <p:stCondLst>
-                                    <p:cond delay="0"/>
-                                  </p:stCondLst>
-                                  <p:childTnLst>
-                                    <p:set>
-                                      <p:cBhvr>
-                                        <p:cTn id="42" dur="1" fill="hold">
-                                          <p:stCondLst>
-                                            <p:cond delay="0"/>
-                                          </p:stCondLst>
-                                        </p:cTn>
-                                        <p:tgtEl>
-                                          <p:spTgt spid="3">
-                                            <p:txEl>
-                                              <p:pRg st="22" end="22"/>
-                                            </p:txEl>
-                                          </p:spTgt>
-                                        </p:tgtEl>
-                                        <p:attrNameLst>
-                                          <p:attrName>style.visibility</p:attrName>
-                                        </p:attrNameLst>
-                                      </p:cBhvr>
-                                      <p:to>
-                                        <p:strVal val="visible"/>
-                                      </p:to>
-                                    </p:set>
-                                  </p:childTnLst>
-                                </p:cTn>
-                              </p:par>
-                            </p:childTnLst>
-                          </p:cTn>
-                        </p:par>
-                      </p:childTnLst>
-                    </p:cTn>
-                  </p:par>
-                </p:childTnLst>
-              </p:cTn>
-              <p:prevCondLst>
-                <p:cond evt="onPrev" delay="0">
-                  <p:tgtEl>
-                    <p:sldTgt/>
-                  </p:tgtEl>
-                </p:cond>
-              </p:prevCondLst>
-              <p:nextCondLst>
-                <p:cond evt="onNext" delay="0">
-                  <p:tgtEl>
-                    <p:sldTgt/>
-                  </p:tgtEl>
-                </p:cond>
-              </p:nextCondLst>
-            </p:seq>
-          </p:childTnLst>
-        </p:cTn>
-      </p:par>
-    </p:tnLst>
-    <p:bldLst>
-      <p:bldP spid="3" grpId="0" uiExpand="1" build="p"/>
-    </p:bldLst>
-  </p:timing>
 </p:sld>
 </file>
 
@@ -6276,31 +7170,6 @@
       </p:grpSpPr>
       <p:sp>
         <p:nvSpPr>
-          <p:cNvPr id="2" name="Title 1"/>
-          <p:cNvSpPr>
-            <a:spLocks noGrp="1"/>
-          </p:cNvSpPr>
-          <p:nvPr>
-            <p:ph type="title"/>
-          </p:nvPr>
-        </p:nvSpPr>
-        <p:spPr/>
-        <p:txBody>
-          <a:bodyPr/>
-          <a:lstStyle/>
-          <a:p>
-            <a:pPr lvl="0" indent="0" marL="0">
-              <a:buNone/>
-            </a:pPr>
-            <a:r>
-              <a:rPr/>
-              <a:t>Reading a Case Study</a:t>
-            </a:r>
-          </a:p>
-        </p:txBody>
-      </p:sp>
-      <p:sp>
-        <p:nvSpPr>
           <p:cNvPr id="3" name="Content Placeholder 2"/>
           <p:cNvSpPr>
             <a:spLocks noGrp="1"/>
@@ -6320,624 +7189,38 @@
               </a:spcBef>
               <a:buNone/>
             </a:pPr>
-            <a:r>
-              <a:rPr b="1"/>
-              <a:t>Five Questions for Any Case Study</a:t>
-            </a:r>
-          </a:p>
-          <a:p>
-            <a:pPr lvl="0" indent="-342900" marL="342900">
-              <a:buAutoNum type="arabicPeriod"/>
-            </a:pPr>
-            <a:r>
-              <a:rPr b="1"/>
-              <a:t>Decision context</a:t>
-            </a:r>
-            <a:r>
-              <a:rPr/>
-              <a:t>: Who decides? What’s at stake? What are the constraints?</a:t>
-            </a:r>
-          </a:p>
-          <a:p>
-            <a:pPr lvl="0" indent="-342900" marL="342900">
-              <a:buAutoNum type="arabicPeriod"/>
-            </a:pPr>
-            <a:r>
-              <a:rPr b="1"/>
-              <a:t>System model</a:t>
-            </a:r>
-            <a:r>
-              <a:rPr/>
-              <a:t>: What’s captured? What’s left out?</a:t>
-            </a:r>
-          </a:p>
-          <a:p>
-            <a:pPr lvl="0" indent="-342900" marL="342900">
-              <a:buAutoNum type="arabicPeriod"/>
-            </a:pPr>
-            <a:r>
-              <a:rPr b="1"/>
-              <a:t>Uncertainty characterization</a:t>
-            </a:r>
-            <a:r>
-              <a:rPr/>
-              <a:t>: Deep or well-characterized? How sampled?</a:t>
-            </a:r>
-          </a:p>
-          <a:p>
-            <a:pPr lvl="0" indent="-342900" marL="342900">
-              <a:buAutoNum type="arabicPeriod"/>
-            </a:pPr>
-            <a:r>
-              <a:rPr b="1"/>
-              <a:t>Decision framework</a:t>
-            </a:r>
-            <a:r>
-              <a:rPr/>
-              <a:t>: Static or adaptive? Single or multi-objective?</a:t>
-            </a:r>
-          </a:p>
-          <a:p>
-            <a:pPr lvl="0" indent="-342900" marL="342900">
-              <a:buAutoNum type="arabicPeriod"/>
-            </a:pPr>
-            <a:r>
-              <a:rPr b="1"/>
-              <a:t>Limits</a:t>
-            </a:r>
-            <a:r>
-              <a:rPr/>
-              <a:t>: What does this analysis NOT answer?</a:t>
-            </a:r>
-          </a:p>
-          <a:p>
-            <a:pPr lvl="0" indent="0" marL="0">
-              <a:spcBef>
-                <a:spcPts val="3000"/>
-              </a:spcBef>
-              <a:buNone/>
-            </a:pPr>
-            <a:r>
-              <a:rPr b="1"/>
-              <a:t>Discussion Prep: Haasnoot et al. (2012)</a:t>
-            </a:r>
-          </a:p>
-          <a:p>
-            <a:pPr lvl="0" indent="0" marL="0">
-              <a:buNone/>
-            </a:pPr>
-            <a:r>
-              <a:rPr b="1"/>
-              <a:t>For Wednesday:</a:t>
-            </a:r>
-            <a:r>
-              <a:rPr/>
-              <a:t> Dongwook leads discussion on Haasnoot et al. (2012)</a:t>
-            </a:r>
-          </a:p>
-          <a:p>
-            <a:pPr lvl="0" indent="0" marL="0">
-              <a:buNone/>
-            </a:pPr>
-            <a:r>
-              <a:rPr/>
-              <a:t>Come ready to address:</a:t>
-            </a:r>
-          </a:p>
-          <a:p>
-            <a:pPr lvl="0"/>
-            <a:r>
-              <a:rPr/>
-              <a:t>What is the </a:t>
-            </a:r>
-            <a:r>
-              <a:rPr i="1"/>
-              <a:t>specific</a:t>
-            </a:r>
-            <a:r>
-              <a:rPr/>
-              <a:t> decision the pathways are designed for?</a:t>
-            </a:r>
-          </a:p>
-          <a:p>
-            <a:pPr lvl="0"/>
-            <a:r>
-              <a:rPr/>
-              <a:t>What triggers are proposed, and how were they derived?</a:t>
-            </a:r>
-          </a:p>
-          <a:p>
-            <a:pPr lvl="0"/>
-            <a:r>
-              <a:rPr/>
-              <a:t>What trade-offs does the paper surface — and which does it leave aside?</a:t>
-            </a:r>
-          </a:p>
-          <a:p>
-            <a:pPr lvl="0"/>
-            <a:r>
-              <a:rPr/>
-              <a:t>How would you apply this approach somewhere other than the Netherlands?</a:t>
+          </a:p>
+          <a:p>
+            <a:pPr lvl="0" indent="0" marL="1270000">
+              <a:buNone/>
+            </a:pPr>
+            <a:r>
+              <a:rPr sz="2000" b="1"/>
+              <a:t>Think-Pair-Share (90 seconds)</a:t>
+            </a:r>
+          </a:p>
+          <a:p>
+            <a:pPr lvl="0" indent="0" marL="1270000">
+              <a:buNone/>
+            </a:pPr>
+            <a:r>
+              <a:rPr sz="2000"/>
+              <a:t>It’s 2026. You’re advising the Dutch government on whether the Delta Works are still adequate.</a:t>
+            </a:r>
+          </a:p>
+          <a:p>
+            <a:pPr lvl="0" indent="0" marL="1270000">
+              <a:buNone/>
+            </a:pPr>
+            <a:r>
+              <a:rPr sz="2000" b="1"/>
+              <a:t>Using what you’ve learned in this course, what questions would you ask?</a:t>
             </a:r>
           </a:p>
         </p:txBody>
       </p:sp>
     </p:spTree>
   </p:cSld>
-  <p:timing>
-    <p:tnLst>
-      <p:par>
-        <p:cTn id="1" dur="indefinite" restart="never" nodeType="tmRoot">
-          <p:childTnLst>
-            <p:seq concurrent="1" nextAc="seek">
-              <p:cTn id="2" dur="indefinite" nodeType="mainSeq">
-                <p:childTnLst>
-                  <p:par>
-                    <p:cTn id="3" fill="hold">
-                      <p:stCondLst>
-                        <p:cond delay="indefinite"/>
-                      </p:stCondLst>
-                      <p:childTnLst>
-                        <p:par>
-                          <p:cTn id="4" fill="hold">
-                            <p:stCondLst>
-                              <p:cond delay="0"/>
-                            </p:stCondLst>
-                            <p:childTnLst>
-                              <p:par>
-                                <p:cTn id="5" presetID="1" presetClass="entr" presetSubtype="0" fill="hold" grpId="0" nodeType="clickEffect">
-                                  <p:stCondLst>
-                                    <p:cond delay="0"/>
-                                  </p:stCondLst>
-                                  <p:childTnLst>
-                                    <p:set>
-                                      <p:cBhvr>
-                                        <p:cTn id="6" dur="1" fill="hold">
-                                          <p:stCondLst>
-                                            <p:cond delay="0"/>
-                                          </p:stCondLst>
-                                        </p:cTn>
-                                        <p:tgtEl>
-                                          <p:spTgt spid="3">
-                                            <p:txEl>
-                                              <p:pRg st="1" end="1"/>
-                                            </p:txEl>
-                                          </p:spTgt>
-                                        </p:tgtEl>
-                                        <p:attrNameLst>
-                                          <p:attrName>style.visibility</p:attrName>
-                                        </p:attrNameLst>
-                                      </p:cBhvr>
-                                      <p:to>
-                                        <p:strVal val="visible"/>
-                                      </p:to>
-                                    </p:set>
-                                  </p:childTnLst>
-                                </p:cTn>
-                              </p:par>
-                            </p:childTnLst>
-                          </p:cTn>
-                        </p:par>
-                      </p:childTnLst>
-                    </p:cTn>
-                  </p:par>
-                  <p:par>
-                    <p:cTn id="7" fill="hold">
-                      <p:stCondLst>
-                        <p:cond delay="indefinite"/>
-                      </p:stCondLst>
-                      <p:childTnLst>
-                        <p:par>
-                          <p:cTn id="8" fill="hold">
-                            <p:stCondLst>
-                              <p:cond delay="0"/>
-                            </p:stCondLst>
-                            <p:childTnLst>
-                              <p:par>
-                                <p:cTn id="9" presetID="1" presetClass="entr" presetSubtype="0" fill="hold" grpId="0" nodeType="clickEffect">
-                                  <p:stCondLst>
-                                    <p:cond delay="0"/>
-                                  </p:stCondLst>
-                                  <p:childTnLst>
-                                    <p:set>
-                                      <p:cBhvr>
-                                        <p:cTn id="10" dur="1" fill="hold">
-                                          <p:stCondLst>
-                                            <p:cond delay="0"/>
-                                          </p:stCondLst>
-                                        </p:cTn>
-                                        <p:tgtEl>
-                                          <p:spTgt spid="3">
-                                            <p:txEl>
-                                              <p:pRg st="2" end="2"/>
-                                            </p:txEl>
-                                          </p:spTgt>
-                                        </p:tgtEl>
-                                        <p:attrNameLst>
-                                          <p:attrName>style.visibility</p:attrName>
-                                        </p:attrNameLst>
-                                      </p:cBhvr>
-                                      <p:to>
-                                        <p:strVal val="visible"/>
-                                      </p:to>
-                                    </p:set>
-                                  </p:childTnLst>
-                                </p:cTn>
-                              </p:par>
-                            </p:childTnLst>
-                          </p:cTn>
-                        </p:par>
-                      </p:childTnLst>
-                    </p:cTn>
-                  </p:par>
-                  <p:par>
-                    <p:cTn id="11" fill="hold">
-                      <p:stCondLst>
-                        <p:cond delay="indefinite"/>
-                      </p:stCondLst>
-                      <p:childTnLst>
-                        <p:par>
-                          <p:cTn id="12" fill="hold">
-                            <p:stCondLst>
-                              <p:cond delay="0"/>
-                            </p:stCondLst>
-                            <p:childTnLst>
-                              <p:par>
-                                <p:cTn id="13" presetID="1" presetClass="entr" presetSubtype="0" fill="hold" grpId="0" nodeType="clickEffect">
-                                  <p:stCondLst>
-                                    <p:cond delay="0"/>
-                                  </p:stCondLst>
-                                  <p:childTnLst>
-                                    <p:set>
-                                      <p:cBhvr>
-                                        <p:cTn id="14" dur="1" fill="hold">
-                                          <p:stCondLst>
-                                            <p:cond delay="0"/>
-                                          </p:stCondLst>
-                                        </p:cTn>
-                                        <p:tgtEl>
-                                          <p:spTgt spid="3">
-                                            <p:txEl>
-                                              <p:pRg st="3" end="3"/>
-                                            </p:txEl>
-                                          </p:spTgt>
-                                        </p:tgtEl>
-                                        <p:attrNameLst>
-                                          <p:attrName>style.visibility</p:attrName>
-                                        </p:attrNameLst>
-                                      </p:cBhvr>
-                                      <p:to>
-                                        <p:strVal val="visible"/>
-                                      </p:to>
-                                    </p:set>
-                                  </p:childTnLst>
-                                </p:cTn>
-                              </p:par>
-                            </p:childTnLst>
-                          </p:cTn>
-                        </p:par>
-                      </p:childTnLst>
-                    </p:cTn>
-                  </p:par>
-                  <p:par>
-                    <p:cTn id="15" fill="hold">
-                      <p:stCondLst>
-                        <p:cond delay="indefinite"/>
-                      </p:stCondLst>
-                      <p:childTnLst>
-                        <p:par>
-                          <p:cTn id="16" fill="hold">
-                            <p:stCondLst>
-                              <p:cond delay="0"/>
-                            </p:stCondLst>
-                            <p:childTnLst>
-                              <p:par>
-                                <p:cTn id="17" presetID="1" presetClass="entr" presetSubtype="0" fill="hold" grpId="0" nodeType="clickEffect">
-                                  <p:stCondLst>
-                                    <p:cond delay="0"/>
-                                  </p:stCondLst>
-                                  <p:childTnLst>
-                                    <p:set>
-                                      <p:cBhvr>
-                                        <p:cTn id="18" dur="1" fill="hold">
-                                          <p:stCondLst>
-                                            <p:cond delay="0"/>
-                                          </p:stCondLst>
-                                        </p:cTn>
-                                        <p:tgtEl>
-                                          <p:spTgt spid="3">
-                                            <p:txEl>
-                                              <p:pRg st="4" end="4"/>
-                                            </p:txEl>
-                                          </p:spTgt>
-                                        </p:tgtEl>
-                                        <p:attrNameLst>
-                                          <p:attrName>style.visibility</p:attrName>
-                                        </p:attrNameLst>
-                                      </p:cBhvr>
-                                      <p:to>
-                                        <p:strVal val="visible"/>
-                                      </p:to>
-                                    </p:set>
-                                  </p:childTnLst>
-                                </p:cTn>
-                              </p:par>
-                            </p:childTnLst>
-                          </p:cTn>
-                        </p:par>
-                      </p:childTnLst>
-                    </p:cTn>
-                  </p:par>
-                  <p:par>
-                    <p:cTn id="19" fill="hold">
-                      <p:stCondLst>
-                        <p:cond delay="indefinite"/>
-                      </p:stCondLst>
-                      <p:childTnLst>
-                        <p:par>
-                          <p:cTn id="20" fill="hold">
-                            <p:stCondLst>
-                              <p:cond delay="0"/>
-                            </p:stCondLst>
-                            <p:childTnLst>
-                              <p:par>
-                                <p:cTn id="21" presetID="1" presetClass="entr" presetSubtype="0" fill="hold" grpId="0" nodeType="clickEffect">
-                                  <p:stCondLst>
-                                    <p:cond delay="0"/>
-                                  </p:stCondLst>
-                                  <p:childTnLst>
-                                    <p:set>
-                                      <p:cBhvr>
-                                        <p:cTn id="22" dur="1" fill="hold">
-                                          <p:stCondLst>
-                                            <p:cond delay="0"/>
-                                          </p:stCondLst>
-                                        </p:cTn>
-                                        <p:tgtEl>
-                                          <p:spTgt spid="3">
-                                            <p:txEl>
-                                              <p:pRg st="5" end="5"/>
-                                            </p:txEl>
-                                          </p:spTgt>
-                                        </p:tgtEl>
-                                        <p:attrNameLst>
-                                          <p:attrName>style.visibility</p:attrName>
-                                        </p:attrNameLst>
-                                      </p:cBhvr>
-                                      <p:to>
-                                        <p:strVal val="visible"/>
-                                      </p:to>
-                                    </p:set>
-                                  </p:childTnLst>
-                                </p:cTn>
-                              </p:par>
-                            </p:childTnLst>
-                          </p:cTn>
-                        </p:par>
-                      </p:childTnLst>
-                    </p:cTn>
-                  </p:par>
-                  <p:par>
-                    <p:cTn id="23" fill="hold">
-                      <p:stCondLst>
-                        <p:cond delay="indefinite"/>
-                      </p:stCondLst>
-                      <p:childTnLst>
-                        <p:par>
-                          <p:cTn id="24" fill="hold">
-                            <p:stCondLst>
-                              <p:cond delay="0"/>
-                            </p:stCondLst>
-                            <p:childTnLst>
-                              <p:par>
-                                <p:cTn id="25" presetID="1" presetClass="entr" presetSubtype="0" fill="hold" grpId="0" nodeType="clickEffect">
-                                  <p:stCondLst>
-                                    <p:cond delay="0"/>
-                                  </p:stCondLst>
-                                  <p:childTnLst>
-                                    <p:set>
-                                      <p:cBhvr>
-                                        <p:cTn id="26" dur="1" fill="hold">
-                                          <p:stCondLst>
-                                            <p:cond delay="0"/>
-                                          </p:stCondLst>
-                                        </p:cTn>
-                                        <p:tgtEl>
-                                          <p:spTgt spid="3">
-                                            <p:txEl>
-                                              <p:pRg st="9" end="9"/>
-                                            </p:txEl>
-                                          </p:spTgt>
-                                        </p:tgtEl>
-                                        <p:attrNameLst>
-                                          <p:attrName>style.visibility</p:attrName>
-                                        </p:attrNameLst>
-                                      </p:cBhvr>
-                                      <p:to>
-                                        <p:strVal val="visible"/>
-                                      </p:to>
-                                    </p:set>
-                                  </p:childTnLst>
-                                </p:cTn>
-                              </p:par>
-                            </p:childTnLst>
-                          </p:cTn>
-                        </p:par>
-                      </p:childTnLst>
-                    </p:cTn>
-                  </p:par>
-                  <p:par>
-                    <p:cTn id="27" fill="hold">
-                      <p:stCondLst>
-                        <p:cond delay="indefinite"/>
-                      </p:stCondLst>
-                      <p:childTnLst>
-                        <p:par>
-                          <p:cTn id="28" fill="hold">
-                            <p:stCondLst>
-                              <p:cond delay="0"/>
-                            </p:stCondLst>
-                            <p:childTnLst>
-                              <p:par>
-                                <p:cTn id="29" presetID="1" presetClass="entr" presetSubtype="0" fill="hold" grpId="0" nodeType="clickEffect">
-                                  <p:stCondLst>
-                                    <p:cond delay="0"/>
-                                  </p:stCondLst>
-                                  <p:childTnLst>
-                                    <p:set>
-                                      <p:cBhvr>
-                                        <p:cTn id="30" dur="1" fill="hold">
-                                          <p:stCondLst>
-                                            <p:cond delay="0"/>
-                                          </p:stCondLst>
-                                        </p:cTn>
-                                        <p:tgtEl>
-                                          <p:spTgt spid="3">
-                                            <p:txEl>
-                                              <p:pRg st="10" end="10"/>
-                                            </p:txEl>
-                                          </p:spTgt>
-                                        </p:tgtEl>
-                                        <p:attrNameLst>
-                                          <p:attrName>style.visibility</p:attrName>
-                                        </p:attrNameLst>
-                                      </p:cBhvr>
-                                      <p:to>
-                                        <p:strVal val="visible"/>
-                                      </p:to>
-                                    </p:set>
-                                  </p:childTnLst>
-                                </p:cTn>
-                              </p:par>
-                            </p:childTnLst>
-                          </p:cTn>
-                        </p:par>
-                      </p:childTnLst>
-                    </p:cTn>
-                  </p:par>
-                  <p:par>
-                    <p:cTn id="31" fill="hold">
-                      <p:stCondLst>
-                        <p:cond delay="indefinite"/>
-                      </p:stCondLst>
-                      <p:childTnLst>
-                        <p:par>
-                          <p:cTn id="32" fill="hold">
-                            <p:stCondLst>
-                              <p:cond delay="0"/>
-                            </p:stCondLst>
-                            <p:childTnLst>
-                              <p:par>
-                                <p:cTn id="33" presetID="1" presetClass="entr" presetSubtype="0" fill="hold" grpId="0" nodeType="clickEffect">
-                                  <p:stCondLst>
-                                    <p:cond delay="0"/>
-                                  </p:stCondLst>
-                                  <p:childTnLst>
-                                    <p:set>
-                                      <p:cBhvr>
-                                        <p:cTn id="34" dur="1" fill="hold">
-                                          <p:stCondLst>
-                                            <p:cond delay="0"/>
-                                          </p:stCondLst>
-                                        </p:cTn>
-                                        <p:tgtEl>
-                                          <p:spTgt spid="3">
-                                            <p:txEl>
-                                              <p:pRg st="11" end="11"/>
-                                            </p:txEl>
-                                          </p:spTgt>
-                                        </p:tgtEl>
-                                        <p:attrNameLst>
-                                          <p:attrName>style.visibility</p:attrName>
-                                        </p:attrNameLst>
-                                      </p:cBhvr>
-                                      <p:to>
-                                        <p:strVal val="visible"/>
-                                      </p:to>
-                                    </p:set>
-                                  </p:childTnLst>
-                                </p:cTn>
-                              </p:par>
-                            </p:childTnLst>
-                          </p:cTn>
-                        </p:par>
-                      </p:childTnLst>
-                    </p:cTn>
-                  </p:par>
-                  <p:par>
-                    <p:cTn id="35" fill="hold">
-                      <p:stCondLst>
-                        <p:cond delay="indefinite"/>
-                      </p:stCondLst>
-                      <p:childTnLst>
-                        <p:par>
-                          <p:cTn id="36" fill="hold">
-                            <p:stCondLst>
-                              <p:cond delay="0"/>
-                            </p:stCondLst>
-                            <p:childTnLst>
-                              <p:par>
-                                <p:cTn id="37" presetID="1" presetClass="entr" presetSubtype="0" fill="hold" grpId="0" nodeType="clickEffect">
-                                  <p:stCondLst>
-                                    <p:cond delay="0"/>
-                                  </p:stCondLst>
-                                  <p:childTnLst>
-                                    <p:set>
-                                      <p:cBhvr>
-                                        <p:cTn id="38" dur="1" fill="hold">
-                                          <p:stCondLst>
-                                            <p:cond delay="0"/>
-                                          </p:stCondLst>
-                                        </p:cTn>
-                                        <p:tgtEl>
-                                          <p:spTgt spid="3">
-                                            <p:txEl>
-                                              <p:pRg st="12" end="12"/>
-                                            </p:txEl>
-                                          </p:spTgt>
-                                        </p:tgtEl>
-                                        <p:attrNameLst>
-                                          <p:attrName>style.visibility</p:attrName>
-                                        </p:attrNameLst>
-                                      </p:cBhvr>
-                                      <p:to>
-                                        <p:strVal val="visible"/>
-                                      </p:to>
-                                    </p:set>
-                                  </p:childTnLst>
-                                </p:cTn>
-                              </p:par>
-                            </p:childTnLst>
-                          </p:cTn>
-                        </p:par>
-                      </p:childTnLst>
-                    </p:cTn>
-                  </p:par>
-                </p:childTnLst>
-              </p:cTn>
-              <p:prevCondLst>
-                <p:cond evt="onPrev" delay="0">
-                  <p:tgtEl>
-                    <p:sldTgt/>
-                  </p:tgtEl>
-                </p:cond>
-              </p:prevCondLst>
-              <p:nextCondLst>
-                <p:cond evt="onNext" delay="0">
-                  <p:tgtEl>
-                    <p:sldTgt/>
-                  </p:tgtEl>
-                </p:cond>
-              </p:nextCondLst>
-            </p:seq>
-          </p:childTnLst>
-        </p:cTn>
-      </p:par>
-    </p:tnLst>
-    <p:bldLst>
-      <p:bldP spid="3" grpId="0" uiExpand="1" build="p"/>
-    </p:bldLst>
-  </p:timing>
 </p:sld>
 </file>
 
@@ -6968,34 +7251,29 @@
             <p:ph type="title"/>
           </p:nvPr>
         </p:nvSpPr>
-        <p:spPr>
-          <a:xfrm>
-            <a:off x="457201" y="204787"/>
-            <a:ext cx="3008313" cy="871538"/>
-          </a:xfrm>
-        </p:spPr>
-        <p:txBody>
-          <a:bodyPr/>
-          <a:lstStyle/>
-          <a:p>
-            <a:pPr lvl="0" indent="0" marL="0">
-              <a:buNone/>
-            </a:pPr>
-            <a:r>
-              <a:rPr/>
-              <a:t>Your Final Projects</a:t>
-            </a:r>
-          </a:p>
-        </p:txBody>
-      </p:sp>
-      <p:sp>
-        <p:nvSpPr>
-          <p:cNvPr id="4" name="Text Placeholder 3"/>
-          <p:cNvSpPr>
-            <a:spLocks noGrp="1"/>
-          </p:cNvSpPr>
-          <p:nvPr>
-            <p:ph idx="2" sz="half" type="body"/>
+        <p:spPr/>
+        <p:txBody>
+          <a:bodyPr/>
+          <a:lstStyle/>
+          <a:p>
+            <a:pPr lvl="0" indent="0" marL="0">
+              <a:buNone/>
+            </a:pPr>
+            <a:r>
+              <a:rPr/>
+              <a:t>Room for the River</a:t>
+            </a:r>
+          </a:p>
+        </p:txBody>
+      </p:sp>
+      <p:sp>
+        <p:nvSpPr>
+          <p:cNvPr id="3" name="Content Placeholder 2"/>
+          <p:cNvSpPr>
+            <a:spLocks noGrp="1"/>
+          </p:cNvSpPr>
+          <p:nvPr>
+            <p:ph idx="1"/>
           </p:nvPr>
         </p:nvSpPr>
         <p:spPr/>
@@ -7011,49 +7289,20 @@
             </a:pPr>
             <a:r>
               <a:rPr b="1"/>
-              <a:t>You’ve Already Done the Analysis</a:t>
-            </a:r>
-          </a:p>
-          <a:p>
-            <a:pPr lvl="0" indent="0" marL="0">
-              <a:buNone/>
-            </a:pPr>
-            <a:r>
-              <a:rPr/>
-              <a:t>Your project follows the same logic as Haasnoot et al.:</a:t>
-            </a:r>
-          </a:p>
-          <a:p>
-            <a:pPr lvl="0"/>
+              <a:t>A Different Kind of Response</a:t>
+            </a:r>
+          </a:p>
+          <a:p>
+            <a:pPr lvl="0" indent="0" marL="0">
+              <a:buNone/>
+            </a:pPr>
+            <a:r>
+              <a:rPr/>
+              <a:t>The Delta Works said: </a:t>
+            </a:r>
             <a:r>
               <a:rPr b="1"/>
-              <a:t>Memo 1</a:t>
-            </a:r>
-            <a:r>
-              <a:rPr/>
-              <a:t>: Characterized uncertainties (X) and levers (L); built your model (R) and chose metrics (M)</a:t>
-            </a:r>
-          </a:p>
-          <a:p>
-            <a:pPr lvl="0"/>
-            <a:r>
-              <a:rPr b="1"/>
-              <a:t>Memo 2</a:t>
-            </a:r>
-            <a:r>
-              <a:rPr/>
-              <a:t>: Evaluated evidence and robustness across scenarios</a:t>
-            </a:r>
-          </a:p>
-          <a:p>
-            <a:pPr lvl="0"/>
-            <a:r>
-              <a:rPr b="1"/>
-              <a:t>Now</a:t>
-            </a:r>
-            <a:r>
-              <a:rPr/>
-              <a:t>: Synthesize into a coherent recommendation (or structured trade-offs)</a:t>
+              <a:t>hold the line.</a:t>
             </a:r>
           </a:p>
           <a:p>
@@ -7071,15 +7320,16 @@
             </a:pPr>
             <a:r>
               <a:rPr/>
-              <a:t>The pipeline you’ve built </a:t>
-            </a:r>
-            <a:r>
-              <a:rPr i="1"/>
-              <a:t>is</a:t>
-            </a:r>
-            <a:r>
-              <a:rPr/>
-              <a:t> the analysis. The presentation is how you communicate it.</a:t>
+              <a:t>Starting in 2006, the Dutch tried something different.</a:t>
+            </a:r>
+          </a:p>
+          <a:p>
+            <a:pPr lvl="0" indent="0" marL="0">
+              <a:buNone/>
+            </a:pPr>
+            <a:r>
+              <a:rPr/>
+              <a:t>Instead of raising dikes higher, they asked: what if we give the river more room?</a:t>
             </a:r>
           </a:p>
           <a:p>
@@ -7091,678 +7341,24 @@
             </a:pPr>
             <a:r>
               <a:rPr b="1"/>
-              <a:t>The Executive Briefing Challenge</a:t>
-            </a:r>
-          </a:p>
-          <a:p>
-            <a:pPr lvl="0" indent="0" marL="0">
-              <a:buNone/>
-            </a:pPr>
-            <a:r>
-              <a:rPr/>
-              <a:t>A decision-maker doesn’t want to hear about your methodology.</a:t>
-            </a:r>
-          </a:p>
-          <a:p>
-            <a:pPr lvl="0" indent="0" marL="0">
-              <a:buNone/>
-            </a:pPr>
-            <a:r>
-              <a:rPr/>
-              <a:t>. . .</a:t>
-            </a:r>
-          </a:p>
-          <a:p>
-            <a:pPr lvl="0" indent="0" marL="0">
-              <a:buNone/>
-            </a:pPr>
-            <a:r>
-              <a:rPr/>
-              <a:t>They want to know:</a:t>
-            </a:r>
-          </a:p>
-          <a:p>
-            <a:pPr lvl="0"/>
-            <a:r>
-              <a:rPr b="1"/>
-              <a:t>What’s at stake</a:t>
-            </a:r>
-            <a:r>
-              <a:rPr/>
-              <a:t> — why should they care?</a:t>
-            </a:r>
-          </a:p>
-          <a:p>
-            <a:pPr lvl="0"/>
-            <a:r>
-              <a:rPr b="1"/>
-              <a:t>What you found</a:t>
-            </a:r>
-            <a:r>
-              <a:rPr/>
-              <a:t> — what does the evidence say?</a:t>
-            </a:r>
-          </a:p>
-          <a:p>
-            <a:pPr lvl="0"/>
-            <a:r>
-              <a:rPr b="1"/>
-              <a:t>What to do</a:t>
-            </a:r>
-            <a:r>
-              <a:rPr/>
-              <a:t> — your recommendation, even if hedged</a:t>
-            </a:r>
-          </a:p>
-          <a:p>
-            <a:pPr lvl="0"/>
-            <a:r>
-              <a:rPr b="1"/>
-              <a:t>What could change your mind</a:t>
-            </a:r>
-            <a:r>
-              <a:rPr/>
-              <a:t> — the key uncertainties</a:t>
-            </a:r>
-          </a:p>
-          <a:p>
-            <a:pPr lvl="0" indent="0" marL="0">
-              <a:spcBef>
-                <a:spcPts val="3000"/>
-              </a:spcBef>
-              <a:buNone/>
-            </a:pPr>
-            <a:r>
-              <a:rPr b="1"/>
-              <a:t>Slide Structure Suggestion</a:t>
-            </a:r>
-          </a:p>
-        </p:txBody>
-      </p:sp>
-      <p:graphicFrame>
-        <p:nvGraphicFramePr>
-          <p:cNvPr id="6" name="Content Placeholder 5"/>
-          <p:cNvGraphicFramePr>
-            <a:graphicFrameLocks noGrp="1"/>
-          </p:cNvGraphicFramePr>
-          <p:nvPr>
-            <p:ph idx="1"/>
-          </p:nvPr>
-        </p:nvGraphicFramePr>
-        <p:xfrm>
-          <a:off x="3568700" y="203200"/>
-          <a:ext cx="5105400" cy="4381500"/>
-        </p:xfrm>
-        <a:graphic>
-          <a:graphicData uri="http://schemas.openxmlformats.org/drawingml/2006/table">
-            <a:tbl>
-              <a:tblPr firstRow="1" bandRow="1">
-                <a:tableStyleId>{5C22544A-7EE6-4342-B048-85BDC9FD1C3A}</a:tableStyleId>
-              </a:tblPr>
-              <a:tblGrid>
-                <a:gridCol w="2552700"/>
-                <a:gridCol w="2552700"/>
-              </a:tblGrid>
-              <a:tr h="0">
-                <a:tc>
-                  <a:txBody>
-                    <a:bodyPr/>
-                    <a:lstStyle/>
-                    <a:p>
-                      <a:pPr lvl="0" indent="0" marL="0">
-                        <a:buNone/>
-                      </a:pPr>
-                      <a:r>
-                        <a:rPr/>
-                        <a:t>Slide</a:t>
-                      </a:r>
-                    </a:p>
-                  </a:txBody>
-                  <a:tcPr/>
-                </a:tc>
-                <a:tc>
-                  <a:txBody>
-                    <a:bodyPr/>
-                    <a:lstStyle/>
-                    <a:p>
-                      <a:pPr lvl="0" indent="0" marL="0">
-                        <a:buNone/>
-                      </a:pPr>
-                      <a:r>
-                        <a:rPr/>
-                        <a:t>Content</a:t>
-                      </a:r>
-                    </a:p>
-                  </a:txBody>
-                  <a:tcPr/>
-                </a:tc>
-              </a:tr>
-              <a:tr h="0">
-                <a:tc>
-                  <a:txBody>
-                    <a:bodyPr/>
-                    <a:lstStyle/>
-                    <a:p>
-                      <a:pPr lvl="0" indent="0" marL="0">
-                        <a:buNone/>
-                      </a:pPr>
-                      <a:r>
-                        <a:rPr/>
-                        <a:t>1</a:t>
-                      </a:r>
-                    </a:p>
-                  </a:txBody>
-                </a:tc>
-                <a:tc>
-                  <a:txBody>
-                    <a:bodyPr/>
-                    <a:lstStyle/>
-                    <a:p>
-                      <a:pPr lvl="0" indent="0" marL="0">
-                        <a:buNone/>
-                      </a:pPr>
-                      <a:r>
-                        <a:rPr b="1"/>
-                        <a:t>What’s at stake</a:t>
-                      </a:r>
-                      <a:r>
-                        <a:rPr/>
-                        <a:t> — the decision, the stakes</a:t>
-                      </a:r>
-                    </a:p>
-                  </a:txBody>
-                </a:tc>
-              </a:tr>
-              <a:tr h="0">
-                <a:tc>
-                  <a:txBody>
-                    <a:bodyPr/>
-                    <a:lstStyle/>
-                    <a:p>
-                      <a:pPr lvl="0" indent="0" marL="0">
-                        <a:buNone/>
-                      </a:pPr>
-                      <a:r>
-                        <a:rPr/>
-                        <a:t>2</a:t>
-                      </a:r>
-                    </a:p>
-                  </a:txBody>
-                </a:tc>
-                <a:tc>
-                  <a:txBody>
-                    <a:bodyPr/>
-                    <a:lstStyle/>
-                    <a:p>
-                      <a:pPr lvl="0" indent="0" marL="0">
-                        <a:buNone/>
-                      </a:pPr>
-                      <a:r>
-                        <a:rPr b="1"/>
-                        <a:t>The key uncertainty</a:t>
-                      </a:r>
-                      <a:r>
-                        <a:rPr/>
-                        <a:t> — what you don’t know and why it matters</a:t>
-                      </a:r>
-                    </a:p>
-                  </a:txBody>
-                </a:tc>
-              </a:tr>
-              <a:tr h="0">
-                <a:tc>
-                  <a:txBody>
-                    <a:bodyPr/>
-                    <a:lstStyle/>
-                    <a:p>
-                      <a:pPr lvl="0" indent="0" marL="0">
-                        <a:buNone/>
-                      </a:pPr>
-                      <a:r>
-                        <a:rPr/>
-                        <a:t>3–5</a:t>
-                      </a:r>
-                    </a:p>
-                  </a:txBody>
-                </a:tc>
-                <a:tc>
-                  <a:txBody>
-                    <a:bodyPr/>
-                    <a:lstStyle/>
-                    <a:p>
-                      <a:pPr lvl="0" indent="0" marL="0">
-                        <a:buNone/>
-                      </a:pPr>
-                      <a:r>
-                        <a:rPr b="1"/>
-                        <a:t>What you found</a:t>
-                      </a:r>
-                      <a:r>
-                        <a:rPr/>
-                        <a:t> — your main results</a:t>
-                      </a:r>
-                    </a:p>
-                  </a:txBody>
-                </a:tc>
-              </a:tr>
-              <a:tr h="0">
-                <a:tc>
-                  <a:txBody>
-                    <a:bodyPr/>
-                    <a:lstStyle/>
-                    <a:p>
-                      <a:pPr lvl="0" indent="0" marL="0">
-                        <a:buNone/>
-                      </a:pPr>
-                      <a:r>
-                        <a:rPr/>
-                        <a:t>6–7</a:t>
-                      </a:r>
-                    </a:p>
-                  </a:txBody>
-                </a:tc>
-                <a:tc>
-                  <a:txBody>
-                    <a:bodyPr/>
-                    <a:lstStyle/>
-                    <a:p>
-                      <a:pPr lvl="0" indent="0" marL="0">
-                        <a:buNone/>
-                      </a:pPr>
-                      <a:r>
-                        <a:rPr b="1"/>
-                        <a:t>Recommendation</a:t>
-                      </a:r>
-                      <a:r>
-                        <a:rPr/>
-                        <a:t> — what to do, with conditions and limits</a:t>
-                      </a:r>
-                    </a:p>
-                  </a:txBody>
-                </a:tc>
-              </a:tr>
-            </a:tbl>
-          </a:graphicData>
-        </a:graphic>
-      </p:graphicFrame>
+              <a:t>Room for the River</a:t>
+            </a:r>
+          </a:p>
+          <a:p>
+            <a:pPr lvl="0" indent="0" marL="0">
+              <a:buNone/>
+            </a:pPr>
+            <a:r>
+              <a:rPr>
+                <a:hlinkClick r:id="rId3"/>
+              </a:rPr>
+              <a:t>https://www.youtube.com/watch?v=xPtRK6wu_tg</a:t>
+            </a:r>
+          </a:p>
+        </p:txBody>
+      </p:sp>
     </p:spTree>
   </p:cSld>
-  <p:timing>
-    <p:tnLst>
-      <p:par>
-        <p:cTn id="1" dur="indefinite" restart="never" nodeType="tmRoot">
-          <p:childTnLst>
-            <p:seq concurrent="1" nextAc="seek">
-              <p:cTn id="2" dur="indefinite" nodeType="mainSeq">
-                <p:childTnLst>
-                  <p:par>
-                    <p:cTn id="3" fill="hold">
-                      <p:stCondLst>
-                        <p:cond delay="indefinite"/>
-                      </p:stCondLst>
-                      <p:childTnLst>
-                        <p:par>
-                          <p:cTn id="4" fill="hold">
-                            <p:stCondLst>
-                              <p:cond delay="0"/>
-                            </p:stCondLst>
-                            <p:childTnLst>
-                              <p:par>
-                                <p:cTn id="5" presetID="1" presetClass="entr" presetSubtype="0" fill="hold" grpId="0" nodeType="clickEffect">
-                                  <p:stCondLst>
-                                    <p:cond delay="0"/>
-                                  </p:stCondLst>
-                                  <p:childTnLst>
-                                    <p:set>
-                                      <p:cBhvr>
-                                        <p:cTn id="6" dur="1" fill="hold">
-                                          <p:stCondLst>
-                                            <p:cond delay="0"/>
-                                          </p:stCondLst>
-                                        </p:cTn>
-                                        <p:tgtEl>
-                                          <p:spTgt spid="4">
-                                            <p:txEl>
-                                              <p:pRg st="2" end="2"/>
-                                            </p:txEl>
-                                          </p:spTgt>
-                                        </p:tgtEl>
-                                        <p:attrNameLst>
-                                          <p:attrName>style.visibility</p:attrName>
-                                        </p:attrNameLst>
-                                      </p:cBhvr>
-                                      <p:to>
-                                        <p:strVal val="visible"/>
-                                      </p:to>
-                                    </p:set>
-                                  </p:childTnLst>
-                                </p:cTn>
-                              </p:par>
-                            </p:childTnLst>
-                          </p:cTn>
-                        </p:par>
-                      </p:childTnLst>
-                    </p:cTn>
-                  </p:par>
-                  <p:par>
-                    <p:cTn id="7" fill="hold">
-                      <p:stCondLst>
-                        <p:cond delay="indefinite"/>
-                      </p:stCondLst>
-                      <p:childTnLst>
-                        <p:par>
-                          <p:cTn id="8" fill="hold">
-                            <p:stCondLst>
-                              <p:cond delay="0"/>
-                            </p:stCondLst>
-                            <p:childTnLst>
-                              <p:par>
-                                <p:cTn id="9" presetID="1" presetClass="entr" presetSubtype="0" fill="hold" grpId="0" nodeType="clickEffect">
-                                  <p:stCondLst>
-                                    <p:cond delay="0"/>
-                                  </p:stCondLst>
-                                  <p:childTnLst>
-                                    <p:set>
-                                      <p:cBhvr>
-                                        <p:cTn id="10" dur="1" fill="hold">
-                                          <p:stCondLst>
-                                            <p:cond delay="0"/>
-                                          </p:stCondLst>
-                                        </p:cTn>
-                                        <p:tgtEl>
-                                          <p:spTgt spid="4">
-                                            <p:txEl>
-                                              <p:pRg st="3" end="3"/>
-                                            </p:txEl>
-                                          </p:spTgt>
-                                        </p:tgtEl>
-                                        <p:attrNameLst>
-                                          <p:attrName>style.visibility</p:attrName>
-                                        </p:attrNameLst>
-                                      </p:cBhvr>
-                                      <p:to>
-                                        <p:strVal val="visible"/>
-                                      </p:to>
-                                    </p:set>
-                                  </p:childTnLst>
-                                </p:cTn>
-                              </p:par>
-                            </p:childTnLst>
-                          </p:cTn>
-                        </p:par>
-                      </p:childTnLst>
-                    </p:cTn>
-                  </p:par>
-                  <p:par>
-                    <p:cTn id="11" fill="hold">
-                      <p:stCondLst>
-                        <p:cond delay="indefinite"/>
-                      </p:stCondLst>
-                      <p:childTnLst>
-                        <p:par>
-                          <p:cTn id="12" fill="hold">
-                            <p:stCondLst>
-                              <p:cond delay="0"/>
-                            </p:stCondLst>
-                            <p:childTnLst>
-                              <p:par>
-                                <p:cTn id="13" presetID="1" presetClass="entr" presetSubtype="0" fill="hold" grpId="0" nodeType="clickEffect">
-                                  <p:stCondLst>
-                                    <p:cond delay="0"/>
-                                  </p:stCondLst>
-                                  <p:childTnLst>
-                                    <p:set>
-                                      <p:cBhvr>
-                                        <p:cTn id="14" dur="1" fill="hold">
-                                          <p:stCondLst>
-                                            <p:cond delay="0"/>
-                                          </p:stCondLst>
-                                        </p:cTn>
-                                        <p:tgtEl>
-                                          <p:spTgt spid="4">
-                                            <p:txEl>
-                                              <p:pRg st="4" end="4"/>
-                                            </p:txEl>
-                                          </p:spTgt>
-                                        </p:tgtEl>
-                                        <p:attrNameLst>
-                                          <p:attrName>style.visibility</p:attrName>
-                                        </p:attrNameLst>
-                                      </p:cBhvr>
-                                      <p:to>
-                                        <p:strVal val="visible"/>
-                                      </p:to>
-                                    </p:set>
-                                  </p:childTnLst>
-                                </p:cTn>
-                              </p:par>
-                            </p:childTnLst>
-                          </p:cTn>
-                        </p:par>
-                      </p:childTnLst>
-                    </p:cTn>
-                  </p:par>
-                  <p:par>
-                    <p:cTn id="15" fill="hold">
-                      <p:stCondLst>
-                        <p:cond delay="indefinite"/>
-                      </p:stCondLst>
-                      <p:childTnLst>
-                        <p:par>
-                          <p:cTn id="16" fill="hold">
-                            <p:stCondLst>
-                              <p:cond delay="0"/>
-                            </p:stCondLst>
-                            <p:childTnLst>
-                              <p:par>
-                                <p:cTn id="17" presetID="1" presetClass="entr" presetSubtype="0" fill="hold" grpId="0" nodeType="clickEffect">
-                                  <p:stCondLst>
-                                    <p:cond delay="0"/>
-                                  </p:stCondLst>
-                                  <p:childTnLst>
-                                    <p:set>
-                                      <p:cBhvr>
-                                        <p:cTn id="18" dur="1" fill="hold">
-                                          <p:stCondLst>
-                                            <p:cond delay="0"/>
-                                          </p:stCondLst>
-                                        </p:cTn>
-                                        <p:tgtEl>
-                                          <p:spTgt spid="4">
-                                            <p:txEl>
-                                              <p:pRg st="11" end="11"/>
-                                            </p:txEl>
-                                          </p:spTgt>
-                                        </p:tgtEl>
-                                        <p:attrNameLst>
-                                          <p:attrName>style.visibility</p:attrName>
-                                        </p:attrNameLst>
-                                      </p:cBhvr>
-                                      <p:to>
-                                        <p:strVal val="visible"/>
-                                      </p:to>
-                                    </p:set>
-                                  </p:childTnLst>
-                                </p:cTn>
-                              </p:par>
-                            </p:childTnLst>
-                          </p:cTn>
-                        </p:par>
-                      </p:childTnLst>
-                    </p:cTn>
-                  </p:par>
-                  <p:par>
-                    <p:cTn id="19" fill="hold">
-                      <p:stCondLst>
-                        <p:cond delay="indefinite"/>
-                      </p:stCondLst>
-                      <p:childTnLst>
-                        <p:par>
-                          <p:cTn id="20" fill="hold">
-                            <p:stCondLst>
-                              <p:cond delay="0"/>
-                            </p:stCondLst>
-                            <p:childTnLst>
-                              <p:par>
-                                <p:cTn id="21" presetID="1" presetClass="entr" presetSubtype="0" fill="hold" grpId="0" nodeType="clickEffect">
-                                  <p:stCondLst>
-                                    <p:cond delay="0"/>
-                                  </p:stCondLst>
-                                  <p:childTnLst>
-                                    <p:set>
-                                      <p:cBhvr>
-                                        <p:cTn id="22" dur="1" fill="hold">
-                                          <p:stCondLst>
-                                            <p:cond delay="0"/>
-                                          </p:stCondLst>
-                                        </p:cTn>
-                                        <p:tgtEl>
-                                          <p:spTgt spid="4">
-                                            <p:txEl>
-                                              <p:pRg st="12" end="12"/>
-                                            </p:txEl>
-                                          </p:spTgt>
-                                        </p:tgtEl>
-                                        <p:attrNameLst>
-                                          <p:attrName>style.visibility</p:attrName>
-                                        </p:attrNameLst>
-                                      </p:cBhvr>
-                                      <p:to>
-                                        <p:strVal val="visible"/>
-                                      </p:to>
-                                    </p:set>
-                                  </p:childTnLst>
-                                </p:cTn>
-                              </p:par>
-                            </p:childTnLst>
-                          </p:cTn>
-                        </p:par>
-                      </p:childTnLst>
-                    </p:cTn>
-                  </p:par>
-                  <p:par>
-                    <p:cTn id="23" fill="hold">
-                      <p:stCondLst>
-                        <p:cond delay="indefinite"/>
-                      </p:stCondLst>
-                      <p:childTnLst>
-                        <p:par>
-                          <p:cTn id="24" fill="hold">
-                            <p:stCondLst>
-                              <p:cond delay="0"/>
-                            </p:stCondLst>
-                            <p:childTnLst>
-                              <p:par>
-                                <p:cTn id="25" presetID="1" presetClass="entr" presetSubtype="0" fill="hold" grpId="0" nodeType="clickEffect">
-                                  <p:stCondLst>
-                                    <p:cond delay="0"/>
-                                  </p:stCondLst>
-                                  <p:childTnLst>
-                                    <p:set>
-                                      <p:cBhvr>
-                                        <p:cTn id="26" dur="1" fill="hold">
-                                          <p:stCondLst>
-                                            <p:cond delay="0"/>
-                                          </p:stCondLst>
-                                        </p:cTn>
-                                        <p:tgtEl>
-                                          <p:spTgt spid="4">
-                                            <p:txEl>
-                                              <p:pRg st="13" end="13"/>
-                                            </p:txEl>
-                                          </p:spTgt>
-                                        </p:tgtEl>
-                                        <p:attrNameLst>
-                                          <p:attrName>style.visibility</p:attrName>
-                                        </p:attrNameLst>
-                                      </p:cBhvr>
-                                      <p:to>
-                                        <p:strVal val="visible"/>
-                                      </p:to>
-                                    </p:set>
-                                  </p:childTnLst>
-                                </p:cTn>
-                              </p:par>
-                            </p:childTnLst>
-                          </p:cTn>
-                        </p:par>
-                      </p:childTnLst>
-                    </p:cTn>
-                  </p:par>
-                  <p:par>
-                    <p:cTn id="27" fill="hold">
-                      <p:stCondLst>
-                        <p:cond delay="indefinite"/>
-                      </p:stCondLst>
-                      <p:childTnLst>
-                        <p:par>
-                          <p:cTn id="28" fill="hold">
-                            <p:stCondLst>
-                              <p:cond delay="0"/>
-                            </p:stCondLst>
-                            <p:childTnLst>
-                              <p:par>
-                                <p:cTn id="29" presetID="1" presetClass="entr" presetSubtype="0" fill="hold" grpId="0" nodeType="clickEffect">
-                                  <p:stCondLst>
-                                    <p:cond delay="0"/>
-                                  </p:stCondLst>
-                                  <p:childTnLst>
-                                    <p:set>
-                                      <p:cBhvr>
-                                        <p:cTn id="30" dur="1" fill="hold">
-                                          <p:stCondLst>
-                                            <p:cond delay="0"/>
-                                          </p:stCondLst>
-                                        </p:cTn>
-                                        <p:tgtEl>
-                                          <p:spTgt spid="4">
-                                            <p:txEl>
-                                              <p:pRg st="14" end="14"/>
-                                            </p:txEl>
-                                          </p:spTgt>
-                                        </p:tgtEl>
-                                        <p:attrNameLst>
-                                          <p:attrName>style.visibility</p:attrName>
-                                        </p:attrNameLst>
-                                      </p:cBhvr>
-                                      <p:to>
-                                        <p:strVal val="visible"/>
-                                      </p:to>
-                                    </p:set>
-                                  </p:childTnLst>
-                                </p:cTn>
-                              </p:par>
-                            </p:childTnLst>
-                          </p:cTn>
-                        </p:par>
-                      </p:childTnLst>
-                    </p:cTn>
-                  </p:par>
-                </p:childTnLst>
-              </p:cTn>
-              <p:prevCondLst>
-                <p:cond evt="onPrev" delay="0">
-                  <p:tgtEl>
-                    <p:sldTgt/>
-                  </p:tgtEl>
-                </p:cond>
-              </p:prevCondLst>
-              <p:nextCondLst>
-                <p:cond evt="onNext" delay="0">
-                  <p:tgtEl>
-                    <p:sldTgt/>
-                  </p:tgtEl>
-                </p:cond>
-              </p:nextCondLst>
-            </p:seq>
-          </p:childTnLst>
-        </p:cTn>
-      </p:par>
-    </p:tnLst>
-    <p:bldLst>
-      <p:bldP spid="4" grpId="0" uiExpand="1" build="p"/>
-    </p:bldLst>
-  </p:timing>
 </p:sld>
 </file>
 
@@ -7785,6 +7381,31 @@
       </p:grpSpPr>
       <p:sp>
         <p:nvSpPr>
+          <p:cNvPr id="2" name="Title 1"/>
+          <p:cNvSpPr>
+            <a:spLocks noGrp="1"/>
+          </p:cNvSpPr>
+          <p:nvPr>
+            <p:ph type="title"/>
+          </p:nvPr>
+        </p:nvSpPr>
+        <p:spPr/>
+        <p:txBody>
+          <a:bodyPr/>
+          <a:lstStyle/>
+          <a:p>
+            <a:pPr lvl="0" indent="0" marL="0">
+              <a:buNone/>
+            </a:pPr>
+            <a:r>
+              <a:rPr/>
+              <a:t>Current Debates</a:t>
+            </a:r>
+          </a:p>
+        </p:txBody>
+      </p:sp>
+      <p:sp>
+        <p:nvSpPr>
           <p:cNvPr id="3" name="Content Placeholder 2"/>
           <p:cNvSpPr>
             <a:spLocks noGrp="1"/>
@@ -7797,24 +7418,6 @@
         <p:txBody>
           <a:bodyPr/>
           <a:lstStyle/>
-          <a:p>
-            <a:pPr lvl="0" indent="0" marL="0">
-              <a:buNone/>
-            </a:pPr>
-            <a:r>
-              <a:rPr/>
-              <a:t>. . .</a:t>
-            </a:r>
-          </a:p>
-          <a:p>
-            <a:pPr lvl="0" indent="0" marL="0">
-              <a:buNone/>
-            </a:pPr>
-            <a:r>
-              <a:rPr/>
-              <a:t>15 minutes goes fast. Cut ruthlessly. Practice out loud.</a:t>
-            </a:r>
-          </a:p>
           <a:p>
             <a:pPr lvl="0" indent="0" marL="0">
               <a:spcBef>
@@ -7824,43 +7427,7 @@
             </a:pPr>
             <a:r>
               <a:rPr b="1"/>
-              <a:t>One Reflection Prompt</a:t>
-            </a:r>
-          </a:p>
-          <a:p>
-            <a:pPr lvl="0" indent="0" marL="0">
-              <a:buNone/>
-            </a:pPr>
-            <a:r>
-              <a:rPr b="1"/>
-              <a:t>Think about your project for 60 seconds:</a:t>
-            </a:r>
-          </a:p>
-          <a:p>
-            <a:pPr lvl="0" indent="0" marL="1270000">
-              <a:buNone/>
-            </a:pPr>
-            <a:r>
-              <a:rPr sz="2000"/>
-              <a:t>What is the single most important figure or finding you want your audience to remember after they leave the room?</a:t>
-            </a:r>
-          </a:p>
-          <a:p>
-            <a:pPr lvl="0" indent="0" marL="0">
-              <a:buNone/>
-            </a:pPr>
-            <a:r>
-              <a:rPr/>
-              <a:t>. . .</a:t>
-            </a:r>
-          </a:p>
-          <a:p>
-            <a:pPr lvl="0" indent="0" marL="0">
-              <a:buNone/>
-            </a:pPr>
-            <a:r>
-              <a:rPr/>
-              <a:t>That figure should be on slide 3 or 4. Everything else supports it.</a:t>
+              <a:t>The Problem with “Predict-Then-Act”</a:t>
             </a:r>
           </a:p>
         </p:txBody>
@@ -7889,29 +7456,156 @@
       </p:grpSpPr>
       <p:sp>
         <p:nvSpPr>
-          <p:cNvPr id="2" name="Title 1"/>
-          <p:cNvSpPr>
-            <a:spLocks noGrp="1"/>
-          </p:cNvSpPr>
-          <p:nvPr>
-            <p:ph type="title"/>
-          </p:nvPr>
-        </p:nvSpPr>
-        <p:spPr/>
-        <p:txBody>
-          <a:bodyPr/>
-          <a:lstStyle/>
-          <a:p>
-            <a:pPr lvl="0" indent="0" marL="0">
-              <a:buNone/>
-            </a:pPr>
-            <a:r>
-              <a:rPr/>
-              <a:t>Looking Ahead</a:t>
-            </a:r>
-          </a:p>
-        </p:txBody>
-      </p:sp>
+          <p:cNvPr id="3" name="Content Placeholder 2"/>
+          <p:cNvSpPr>
+            <a:spLocks noGrp="1"/>
+          </p:cNvSpPr>
+          <p:nvPr>
+            <p:ph idx="1" sz="half"/>
+          </p:nvPr>
+        </p:nvSpPr>
+        <p:spPr/>
+        <p:txBody>
+          <a:bodyPr/>
+          <a:lstStyle/>
+          <a:p>
+            <a:pPr lvl="0" indent="0" marL="0">
+              <a:buNone/>
+            </a:pPr>
+            <a:r>
+              <a:rPr b="1"/>
+              <a:t>Traditional approach:</a:t>
+            </a:r>
+          </a:p>
+          <a:p>
+            <a:pPr lvl="0" indent="-342900" marL="342900">
+              <a:buAutoNum type="arabicPeriod"/>
+            </a:pPr>
+            <a:r>
+              <a:rPr/>
+              <a:t>Make best forecast</a:t>
+            </a:r>
+          </a:p>
+          <a:p>
+            <a:pPr lvl="0" indent="-342900" marL="342900">
+              <a:buAutoNum type="arabicPeriod"/>
+            </a:pPr>
+            <a:r>
+              <a:rPr/>
+              <a:t>Design optimal solution</a:t>
+            </a:r>
+          </a:p>
+          <a:p>
+            <a:pPr lvl="0" indent="-342900" marL="342900">
+              <a:buAutoNum type="arabicPeriod"/>
+            </a:pPr>
+            <a:r>
+              <a:rPr/>
+              <a:t>Build it and hope</a:t>
+            </a:r>
+          </a:p>
+          <a:p>
+            <a:pPr lvl="0" indent="0" marL="0">
+              <a:buNone/>
+            </a:pPr>
+            <a:r>
+              <a:rPr/>
+              <a:t>(is this a straw man? yes.)</a:t>
+            </a:r>
+          </a:p>
+        </p:txBody>
+      </p:sp>
+      <p:sp>
+        <p:nvSpPr>
+          <p:cNvPr id="4" name="Content Placeholder 3"/>
+          <p:cNvSpPr>
+            <a:spLocks noGrp="1"/>
+          </p:cNvSpPr>
+          <p:nvPr>
+            <p:ph idx="2" sz="half"/>
+          </p:nvPr>
+        </p:nvSpPr>
+        <p:spPr/>
+        <p:txBody>
+          <a:bodyPr/>
+          <a:lstStyle/>
+          <a:p>
+            <a:pPr lvl="0" indent="0" marL="0">
+              <a:buNone/>
+            </a:pPr>
+            <a:r>
+              <a:rPr b="1"/>
+              <a:t>Problems:</a:t>
+            </a:r>
+          </a:p>
+          <a:p>
+            <a:pPr lvl="0"/>
+            <a:r>
+              <a:rPr b="1"/>
+              <a:t>Brittle:</a:t>
+            </a:r>
+            <a:r>
+              <a:rPr/>
+              <a:t> Optimal for one future, fails in others</a:t>
+            </a:r>
+          </a:p>
+          <a:p>
+            <a:pPr lvl="0"/>
+            <a:r>
+              <a:rPr b="1"/>
+              <a:t>Divisive:</a:t>
+            </a:r>
+            <a:r>
+              <a:rPr/>
+              <a:t> Stakeholders disagree on which forecast to use</a:t>
+            </a:r>
+          </a:p>
+          <a:p>
+            <a:pPr lvl="0"/>
+            <a:r>
+              <a:rPr b="1"/>
+              <a:t>Static:</a:t>
+            </a:r>
+            <a:r>
+              <a:rPr/>
+              <a:t> Hard to change course as you learn more</a:t>
+            </a:r>
+          </a:p>
+          <a:p>
+            <a:pPr lvl="0"/>
+            <a:r>
+              <a:rPr b="1"/>
+              <a:t>Vulnerable:</a:t>
+            </a:r>
+            <a:r>
+              <a:rPr/>
+              <a:t> Fails catastrophically when surprised</a:t>
+            </a:r>
+          </a:p>
+        </p:txBody>
+      </p:sp>
+    </p:spTree>
+  </p:cSld>
+</p:sld>
+</file>
+
+<file path=ppt/slides/slide9.xml><?xml version="1.0" encoding="utf-8"?>
+<p:sld xmlns:a="http://schemas.openxmlformats.org/drawingml/2006/main" xmlns:r="http://schemas.openxmlformats.org/officeDocument/2006/relationships" xmlns:p="http://schemas.openxmlformats.org/presentationml/2006/main">
+  <p:cSld>
+    <p:spTree>
+      <p:nvGrpSpPr>
+        <p:cNvPr id="1" name=""/>
+        <p:cNvGrpSpPr/>
+        <p:nvPr/>
+      </p:nvGrpSpPr>
+      <p:grpSpPr>
+        <a:xfrm>
+          <a:off x="0" y="0"/>
+          <a:ext cx="0" cy="0"/>
+          <a:chOff x="0" y="0"/>
+          <a:chExt cx="0" cy="0"/>
+        </a:xfrm>
+      </p:grpSpPr>
       <p:sp>
         <p:nvSpPr>
           <p:cNvPr id="3" name="Content Placeholder 2"/>
@@ -7935,292 +7629,13 @@
             </a:pPr>
             <a:r>
               <a:rPr b="1"/>
-              <a:t>This Week and Next</a:t>
-            </a:r>
-          </a:p>
-          <a:p>
-            <a:pPr lvl="0"/>
-            <a:r>
-              <a:rPr b="1"/>
-              <a:t>Wednesday</a:t>
-            </a:r>
-            <a:r>
-              <a:rPr/>
-              <a:t>: Dongwook leads discussion of Haasnoot et al. (2012) — Come with your five questions answered</a:t>
-            </a:r>
-          </a:p>
-          <a:p>
-            <a:pPr lvl="0"/>
-            <a:r>
-              <a:rPr b="1"/>
-              <a:t>Friday, Apr 17</a:t>
-            </a:r>
-            <a:r>
-              <a:rPr/>
-              <a:t>: Slides due — Treat this deadline seriously; practice requires finished slides</a:t>
-            </a:r>
-          </a:p>
-          <a:p>
-            <a:pPr lvl="0"/>
-            <a:r>
-              <a:rPr b="1"/>
-              <a:t>Week 14 (Apr 20–24)</a:t>
-            </a:r>
-            <a:r>
-              <a:rPr/>
-              <a:t>: Executive Briefings — Treat it like a real client presentation</a:t>
-            </a:r>
-          </a:p>
-          <a:p>
-            <a:pPr lvl="0" indent="0" marL="0">
-              <a:buNone/>
-            </a:pPr>
-            <a:r>
-              <a:rPr/>
-              <a:t>. . .</a:t>
-            </a:r>
-          </a:p>
-          <a:p>
-            <a:pPr lvl="0" indent="0" marL="0">
-              <a:buNone/>
-            </a:pPr>
-            <a:r>
-              <a:rPr/>
-              <a:t>This is the end of the formal curriculum.</a:t>
-            </a:r>
-          </a:p>
-          <a:p>
-            <a:pPr lvl="0" indent="0" marL="0">
-              <a:buNone/>
-            </a:pPr>
-            <a:r>
-              <a:rPr/>
-              <a:t>Everything from here is yours to use.</a:t>
-            </a:r>
-          </a:p>
-          <a:p>
-            <a:pPr lvl="0" indent="0" marL="0">
-              <a:spcBef>
-                <a:spcPts val="3000"/>
-              </a:spcBef>
-              <a:buNone/>
-            </a:pPr>
-            <a:r>
-              <a:rPr b="1"/>
-              <a:t>References</a:t>
-            </a:r>
-          </a:p>
-          <a:p>
-            <a:pPr lvl="0" indent="0" marL="0">
-              <a:buNone/>
-            </a:pPr>
-            <a:r>
-              <a:rPr/>
-              <a:t>Haasnoot, Marjolijn, Hans Middelkoop, Astrid Offermans, Eelco van Beek, and Willem P. A. van Deursen. 2012. “Exploring Pathways for Sustainable Water Management in River Deltas in a Changing Environment.” </a:t>
-            </a:r>
-            <a:r>
-              <a:rPr i="1"/>
-              <a:t>Climatic Change</a:t>
-            </a:r>
-            <a:r>
-              <a:rPr/>
-              <a:t> 115 (3): 795–819. </a:t>
-            </a:r>
-            <a:r>
-              <a:rPr>
-                <a:hlinkClick r:id="rId3"/>
-              </a:rPr>
-              <a:t>https://doi.org/10.1007/s10584-012-0444-2</a:t>
-            </a:r>
-            <a:r>
-              <a:rPr/>
-              <a:t>.</a:t>
+              <a:t>Hold the Line vs. Adapt with Nature</a:t>
             </a:r>
           </a:p>
         </p:txBody>
       </p:sp>
     </p:spTree>
   </p:cSld>
-  <p:timing>
-    <p:tnLst>
-      <p:par>
-        <p:cTn id="1" dur="indefinite" restart="never" nodeType="tmRoot">
-          <p:childTnLst>
-            <p:seq concurrent="1" nextAc="seek">
-              <p:cTn id="2" dur="indefinite" nodeType="mainSeq">
-                <p:childTnLst>
-                  <p:par>
-                    <p:cTn id="3" fill="hold">
-                      <p:stCondLst>
-                        <p:cond delay="indefinite"/>
-                      </p:stCondLst>
-                      <p:childTnLst>
-                        <p:par>
-                          <p:cTn id="4" fill="hold">
-                            <p:stCondLst>
-                              <p:cond delay="0"/>
-                            </p:stCondLst>
-                            <p:childTnLst>
-                              <p:par>
-                                <p:cTn id="5" presetID="1" presetClass="entr" presetSubtype="0" fill="hold" grpId="0" nodeType="clickEffect">
-                                  <p:stCondLst>
-                                    <p:cond delay="0"/>
-                                  </p:stCondLst>
-                                  <p:childTnLst>
-                                    <p:set>
-                                      <p:cBhvr>
-                                        <p:cTn id="6" dur="1" fill="hold">
-                                          <p:stCondLst>
-                                            <p:cond delay="0"/>
-                                          </p:stCondLst>
-                                        </p:cTn>
-                                        <p:tgtEl>
-                                          <p:spTgt spid="3">
-                                            <p:txEl>
-                                              <p:pRg st="1" end="1"/>
-                                            </p:txEl>
-                                          </p:spTgt>
-                                        </p:tgtEl>
-                                        <p:attrNameLst>
-                                          <p:attrName>style.visibility</p:attrName>
-                                        </p:attrNameLst>
-                                      </p:cBhvr>
-                                      <p:to>
-                                        <p:strVal val="visible"/>
-                                      </p:to>
-                                    </p:set>
-                                  </p:childTnLst>
-                                </p:cTn>
-                              </p:par>
-                            </p:childTnLst>
-                          </p:cTn>
-                        </p:par>
-                      </p:childTnLst>
-                    </p:cTn>
-                  </p:par>
-                  <p:par>
-                    <p:cTn id="7" fill="hold">
-                      <p:stCondLst>
-                        <p:cond delay="indefinite"/>
-                      </p:stCondLst>
-                      <p:childTnLst>
-                        <p:par>
-                          <p:cTn id="8" fill="hold">
-                            <p:stCondLst>
-                              <p:cond delay="0"/>
-                            </p:stCondLst>
-                            <p:childTnLst>
-                              <p:par>
-                                <p:cTn id="9" presetID="1" presetClass="entr" presetSubtype="0" fill="hold" grpId="0" nodeType="clickEffect">
-                                  <p:stCondLst>
-                                    <p:cond delay="0"/>
-                                  </p:stCondLst>
-                                  <p:childTnLst>
-                                    <p:set>
-                                      <p:cBhvr>
-                                        <p:cTn id="10" dur="1" fill="hold">
-                                          <p:stCondLst>
-                                            <p:cond delay="0"/>
-                                          </p:stCondLst>
-                                        </p:cTn>
-                                        <p:tgtEl>
-                                          <p:spTgt spid="3">
-                                            <p:txEl>
-                                              <p:pRg st="2" end="2"/>
-                                            </p:txEl>
-                                          </p:spTgt>
-                                        </p:tgtEl>
-                                        <p:attrNameLst>
-                                          <p:attrName>style.visibility</p:attrName>
-                                        </p:attrNameLst>
-                                      </p:cBhvr>
-                                      <p:to>
-                                        <p:strVal val="visible"/>
-                                      </p:to>
-                                    </p:set>
-                                  </p:childTnLst>
-                                </p:cTn>
-                              </p:par>
-                            </p:childTnLst>
-                          </p:cTn>
-                        </p:par>
-                      </p:childTnLst>
-                    </p:cTn>
-                  </p:par>
-                  <p:par>
-                    <p:cTn id="11" fill="hold">
-                      <p:stCondLst>
-                        <p:cond delay="indefinite"/>
-                      </p:stCondLst>
-                      <p:childTnLst>
-                        <p:par>
-                          <p:cTn id="12" fill="hold">
-                            <p:stCondLst>
-                              <p:cond delay="0"/>
-                            </p:stCondLst>
-                            <p:childTnLst>
-                              <p:par>
-                                <p:cTn id="13" presetID="1" presetClass="entr" presetSubtype="0" fill="hold" grpId="0" nodeType="clickEffect">
-                                  <p:stCondLst>
-                                    <p:cond delay="0"/>
-                                  </p:stCondLst>
-                                  <p:childTnLst>
-                                    <p:set>
-                                      <p:cBhvr>
-                                        <p:cTn id="14" dur="1" fill="hold">
-                                          <p:stCondLst>
-                                            <p:cond delay="0"/>
-                                          </p:stCondLst>
-                                        </p:cTn>
-                                        <p:tgtEl>
-                                          <p:spTgt spid="3">
-                                            <p:txEl>
-                                              <p:pRg st="3" end="3"/>
-                                            </p:txEl>
-                                          </p:spTgt>
-                                        </p:tgtEl>
-                                        <p:attrNameLst>
-                                          <p:attrName>style.visibility</p:attrName>
-                                        </p:attrNameLst>
-                                      </p:cBhvr>
-                                      <p:to>
-                                        <p:strVal val="visible"/>
-                                      </p:to>
-                                    </p:set>
-                                  </p:childTnLst>
-                                </p:cTn>
-                              </p:par>
-                            </p:childTnLst>
-                          </p:cTn>
-                        </p:par>
-                      </p:childTnLst>
-                    </p:cTn>
-                  </p:par>
-                </p:childTnLst>
-              </p:cTn>
-              <p:prevCondLst>
-                <p:cond evt="onPrev" delay="0">
-                  <p:tgtEl>
-                    <p:sldTgt/>
-                  </p:tgtEl>
-                </p:cond>
-              </p:prevCondLst>
-              <p:nextCondLst>
-                <p:cond evt="onNext" delay="0">
-                  <p:tgtEl>
-                    <p:sldTgt/>
-                  </p:tgtEl>
-                </p:cond>
-              </p:nextCondLst>
-            </p:seq>
-          </p:childTnLst>
-        </p:cTn>
-      </p:par>
-    </p:tnLst>
-    <p:bldLst>
-      <p:bldP spid="3" grpId="0" uiExpand="1" build="p"/>
-    </p:bldLst>
-  </p:timing>
 </p:sld>
 </file>
 
